--- a/docs/lessons/assets/cah-004-protocol-v1.pptx
+++ b/docs/lessons/assets/cah-004-protocol-v1.pptx
@@ -2,20 +2,20 @@
 <file path=ppt/presentation.xml><?xml version="1.0" encoding="utf-8"?>
 <p:presentation xmlns:p="http://schemas.openxmlformats.org/presentationml/2006/main">
   <p:sldMasterIdLst>
-    <p:sldMasterId xmlns:r="http://schemas.openxmlformats.org/officeDocument/2006/relationships" id="2147483648" r:id="R2137425360924174"/>
+    <p:sldMasterId xmlns:r="http://schemas.openxmlformats.org/officeDocument/2006/relationships" id="2147483648" r:id="R3c8e758b7b7d447d"/>
   </p:sldMasterIdLst>
   <p:notesMasterIdLst>
-    <p:notesMasterId xmlns:r="http://schemas.openxmlformats.org/officeDocument/2006/relationships" r:id="Rad9c4fabde7c4b4d"/>
+    <p:notesMasterId xmlns:r="http://schemas.openxmlformats.org/officeDocument/2006/relationships" r:id="Rcff67309576740b0"/>
   </p:notesMasterIdLst>
   <p:sldIdLst>
-    <p:sldId xmlns:r="http://schemas.openxmlformats.org/officeDocument/2006/relationships" id="256" r:id="R9a669380bcfd46c6"/>
-    <p:sldId xmlns:r="http://schemas.openxmlformats.org/officeDocument/2006/relationships" id="257" r:id="R06644693a9c1426d"/>
-    <p:sldId xmlns:r="http://schemas.openxmlformats.org/officeDocument/2006/relationships" id="258" r:id="Rae66f2ceddbe4d9a"/>
-    <p:sldId xmlns:r="http://schemas.openxmlformats.org/officeDocument/2006/relationships" id="259" r:id="R3560c3b89ccf4b4e"/>
-    <p:sldId xmlns:r="http://schemas.openxmlformats.org/officeDocument/2006/relationships" id="260" r:id="R4ecc79db23354acf"/>
-    <p:sldId xmlns:r="http://schemas.openxmlformats.org/officeDocument/2006/relationships" id="261" r:id="R4c34945297904c5d"/>
-    <p:sldId xmlns:r="http://schemas.openxmlformats.org/officeDocument/2006/relationships" id="262" r:id="Rda2bb9671ece43b8"/>
-    <p:sldId xmlns:r="http://schemas.openxmlformats.org/officeDocument/2006/relationships" id="263" r:id="R3ff593ce232a4166"/>
+    <p:sldId xmlns:r="http://schemas.openxmlformats.org/officeDocument/2006/relationships" id="256" r:id="R186da38ce3d24d6e"/>
+    <p:sldId xmlns:r="http://schemas.openxmlformats.org/officeDocument/2006/relationships" id="257" r:id="R0f1d5ea4e6064294"/>
+    <p:sldId xmlns:r="http://schemas.openxmlformats.org/officeDocument/2006/relationships" id="258" r:id="R91a5a8fda4c64d20"/>
+    <p:sldId xmlns:r="http://schemas.openxmlformats.org/officeDocument/2006/relationships" id="259" r:id="Rb6049653200b4c69"/>
+    <p:sldId xmlns:r="http://schemas.openxmlformats.org/officeDocument/2006/relationships" id="260" r:id="Reb63250a48cc4821"/>
+    <p:sldId xmlns:r="http://schemas.openxmlformats.org/officeDocument/2006/relationships" id="261" r:id="Rda0d477236ed4832"/>
+    <p:sldId xmlns:r="http://schemas.openxmlformats.org/officeDocument/2006/relationships" id="262" r:id="Rf7ee70e635b1413a"/>
+    <p:sldId xmlns:r="http://schemas.openxmlformats.org/officeDocument/2006/relationships" id="263" r:id="Ra84a3c97827a4b00"/>
   </p:sldIdLst>
   <p:sldSz cx="12192000" cy="6858000"/>
   <p:notesSz cx="6858000" cy="9144000"/>
@@ -1070,7 +1070,7 @@
   </p:cSld>
   <p:clrMap bg1="lt1" tx1="dk1" bg2="lt2" tx2="dk2" accent1="accent1" accent2="accent2" accent3="accent3" accent4="accent4" accent5="accent5" accent6="accent6" hlink="hlink" folHlink="folHlink"/>
   <p:sldLayoutIdLst>
-    <p:sldLayoutId xmlns:r="http://schemas.openxmlformats.org/officeDocument/2006/relationships" id="2147483649" r:id="R48daf58c89884749"/>
+    <p:sldLayoutId xmlns:r="http://schemas.openxmlformats.org/officeDocument/2006/relationships" id="2147483649" r:id="Re49b52b514484f81"/>
   </p:sldLayoutIdLst>
   <p:txStyles>
     <p:titleStyle>
@@ -1614,7 +1614,7 @@
           <p:cNvPr id="1" name="Shape-14">
             <a:extLst xmlns:a="http://schemas.openxmlformats.org/drawingml/2006/main">
               <a:ext uri="{FF2B5EF4-FFF2-40B4-BE49-F238E27FC236}">
-                <a16:creationId xmlns:a16="http://schemas.microsoft.com/office/drawing/2014/main" id="{E80020BA-B251-4780-BBF2-1E077A8353BD}"/>
+                <a16:creationId xmlns:a16="http://schemas.microsoft.com/office/drawing/2014/main" id="{EC87728F-835A-490B-9DFD-82BE3BF95EC4}"/>
               </a:ext>
             </a:extLst>
           </p:cNvPr>
@@ -1641,7 +1641,7 @@
           <p:cNvPr id="2" name="Text-1">
             <a:extLst xmlns:a="http://schemas.openxmlformats.org/drawingml/2006/main">
               <a:ext uri="{FF2B5EF4-FFF2-40B4-BE49-F238E27FC236}">
-                <a16:creationId xmlns:a16="http://schemas.microsoft.com/office/drawing/2014/main" id="{76500F3B-3DC8-40EC-9A49-6B49F3A650F3}"/>
+                <a16:creationId xmlns:a16="http://schemas.microsoft.com/office/drawing/2014/main" id="{A75FD61D-465F-45D6-BBB1-105A30BEBAAD}"/>
               </a:ext>
             </a:extLst>
           </p:cNvPr>
@@ -1666,7 +1666,7 @@
           <a:lstStyle xmlns:a="http://schemas.openxmlformats.org/drawingml/2006/main"/>
           <a:p xmlns:a="http://schemas.openxmlformats.org/drawingml/2006/main">
             <a:pPr algn="l">
-              <a:defRPr sz="1200" b="1">
+              <a:defRPr sz="1500" b="1">
                 <a:solidFill>
                   <a:srgbClr val="1F5EFF"/>
                 </a:solidFill>
@@ -1708,7 +1708,7 @@
           <p:cNvPr id="4" name="Text-3">
             <a:extLst xmlns:a="http://schemas.openxmlformats.org/drawingml/2006/main">
               <a:ext uri="{FF2B5EF4-FFF2-40B4-BE49-F238E27FC236}">
-                <a16:creationId xmlns:a16="http://schemas.microsoft.com/office/drawing/2014/main" id="{562AB3B3-024C-41AB-910B-2B2EEC372A8F}"/>
+                <a16:creationId xmlns:a16="http://schemas.microsoft.com/office/drawing/2014/main" id="{CC9F9973-AF25-4AF4-BCAD-AF70C39A2D6C}"/>
               </a:ext>
             </a:extLst>
           </p:cNvPr>
@@ -1753,7 +1753,7 @@
           <p:cNvPr id="5" name="Text-4">
             <a:extLst xmlns:a="http://schemas.openxmlformats.org/drawingml/2006/main">
               <a:ext uri="{FF2B5EF4-FFF2-40B4-BE49-F238E27FC236}">
-                <a16:creationId xmlns:a16="http://schemas.microsoft.com/office/drawing/2014/main" id="{58C12A06-09E3-4F27-955F-735ED1506068}"/>
+                <a16:creationId xmlns:a16="http://schemas.microsoft.com/office/drawing/2014/main" id="{921C8321-205E-4FF7-9D52-D440201B563C}"/>
               </a:ext>
             </a:extLst>
           </p:cNvPr>
@@ -1798,7 +1798,7 @@
           <p:cNvPr id="6" name="Text-5">
             <a:extLst xmlns:a="http://schemas.openxmlformats.org/drawingml/2006/main">
               <a:ext uri="{FF2B5EF4-FFF2-40B4-BE49-F238E27FC236}">
-                <a16:creationId xmlns:a16="http://schemas.microsoft.com/office/drawing/2014/main" id="{FC8D11CC-E72F-4577-9F19-464A46BD584C}"/>
+                <a16:creationId xmlns:a16="http://schemas.microsoft.com/office/drawing/2014/main" id="{9D1A090D-54A1-48C8-A097-8F9794C90240}"/>
               </a:ext>
             </a:extLst>
           </p:cNvPr>
@@ -1823,7 +1823,7 @@
           <a:lstStyle xmlns:a="http://schemas.openxmlformats.org/drawingml/2006/main"/>
           <a:p xmlns:a="http://schemas.openxmlformats.org/drawingml/2006/main">
             <a:pPr algn="l">
-              <a:defRPr sz="1500" b="0">
+              <a:defRPr sz="1650" b="0">
                 <a:solidFill>
                   <a:srgbClr val="123DAE"/>
                 </a:solidFill>
@@ -1843,7 +1843,7 @@
           <p:cNvPr id="7" name="Text-6">
             <a:extLst xmlns:a="http://schemas.openxmlformats.org/drawingml/2006/main">
               <a:ext uri="{FF2B5EF4-FFF2-40B4-BE49-F238E27FC236}">
-                <a16:creationId xmlns:a16="http://schemas.microsoft.com/office/drawing/2014/main" id="{25D3293E-1B3F-4254-9298-8D8DFEBC800B}"/>
+                <a16:creationId xmlns:a16="http://schemas.microsoft.com/office/drawing/2014/main" id="{E1D718D3-DFE9-4ABC-95FC-89B8119D87D9}"/>
               </a:ext>
             </a:extLst>
           </p:cNvPr>
@@ -1868,7 +1868,7 @@
           <a:lstStyle xmlns:a="http://schemas.openxmlformats.org/drawingml/2006/main"/>
           <a:p xmlns:a="http://schemas.openxmlformats.org/drawingml/2006/main">
             <a:pPr algn="l">
-              <a:defRPr sz="1350" b="1">
+              <a:defRPr sz="1650" b="1">
                 <a:solidFill>
                   <a:srgbClr val="5B6472"/>
                 </a:solidFill>
@@ -1910,7 +1910,7 @@
           <p:cNvPr id="9" name="Shape-8">
             <a:extLst xmlns:a="http://schemas.openxmlformats.org/drawingml/2006/main">
               <a:ext uri="{FF2B5EF4-FFF2-40B4-BE49-F238E27FC236}">
-                <a16:creationId xmlns:a16="http://schemas.microsoft.com/office/drawing/2014/main" id="{B9217833-2C1F-4AEE-A981-402E2EB48D2B}"/>
+                <a16:creationId xmlns:a16="http://schemas.microsoft.com/office/drawing/2014/main" id="{23839292-2AB7-4F5A-ABC6-83144807B2C3}"/>
               </a:ext>
             </a:extLst>
           </p:cNvPr>
@@ -1937,7 +1937,7 @@
           <p:cNvPr id="10" name="Shape-9">
             <a:extLst xmlns:a="http://schemas.openxmlformats.org/drawingml/2006/main">
               <a:ext uri="{FF2B5EF4-FFF2-40B4-BE49-F238E27FC236}">
-                <a16:creationId xmlns:a16="http://schemas.microsoft.com/office/drawing/2014/main" id="{47065178-0634-4818-8922-4D2603A1E1D7}"/>
+                <a16:creationId xmlns:a16="http://schemas.microsoft.com/office/drawing/2014/main" id="{33EB53F3-0018-4EE9-BE08-FECB05AFB547}"/>
               </a:ext>
             </a:extLst>
           </p:cNvPr>
@@ -1964,7 +1964,7 @@
           <p:cNvPr id="11" name="Text-10">
             <a:extLst xmlns:a="http://schemas.openxmlformats.org/drawingml/2006/main">
               <a:ext uri="{FF2B5EF4-FFF2-40B4-BE49-F238E27FC236}">
-                <a16:creationId xmlns:a16="http://schemas.microsoft.com/office/drawing/2014/main" id="{DF53BE8A-196D-4120-8940-2CB2C28F7CCB}"/>
+                <a16:creationId xmlns:a16="http://schemas.microsoft.com/office/drawing/2014/main" id="{0AD20A87-C0B4-4FB0-9847-8FA74C854752}"/>
               </a:ext>
             </a:extLst>
           </p:cNvPr>
@@ -1989,7 +1989,7 @@
           <a:lstStyle xmlns:a="http://schemas.openxmlformats.org/drawingml/2006/main"/>
           <a:p xmlns:a="http://schemas.openxmlformats.org/drawingml/2006/main">
             <a:pPr algn="r">
-              <a:defRPr sz="1350" b="1">
+              <a:defRPr sz="1650" b="1">
                 <a:solidFill>
                   <a:srgbClr val="123DAE"/>
                 </a:solidFill>
@@ -2031,7 +2031,7 @@
           <p:cNvPr id="13" name="Text-12">
             <a:extLst xmlns:a="http://schemas.openxmlformats.org/drawingml/2006/main">
               <a:ext uri="{FF2B5EF4-FFF2-40B4-BE49-F238E27FC236}">
-                <a16:creationId xmlns:a16="http://schemas.microsoft.com/office/drawing/2014/main" id="{E5514A4C-6109-4F65-8B0E-6ADDA6DA5BE4}"/>
+                <a16:creationId xmlns:a16="http://schemas.microsoft.com/office/drawing/2014/main" id="{A764EEA8-2272-4C9B-9D5B-D0ED47397EB6}"/>
               </a:ext>
             </a:extLst>
           </p:cNvPr>
@@ -2076,7 +2076,7 @@
           <p:cNvPr id="14" name="Text-13">
             <a:extLst xmlns:a="http://schemas.openxmlformats.org/drawingml/2006/main">
               <a:ext uri="{FF2B5EF4-FFF2-40B4-BE49-F238E27FC236}">
-                <a16:creationId xmlns:a16="http://schemas.microsoft.com/office/drawing/2014/main" id="{FFF11696-CD97-4BB7-A164-251B379C83EF}"/>
+                <a16:creationId xmlns:a16="http://schemas.microsoft.com/office/drawing/2014/main" id="{8DCB75E0-51E6-47A2-9F50-5CFCC94DDFA2}"/>
               </a:ext>
             </a:extLst>
           </p:cNvPr>
@@ -2119,7 +2119,7 @@
     </p:spTree>
     <p:extLst>
       <p:ext uri="{BB962C8B-B14F-4D97-AF65-F5344CB8AC3E}">
-        <p14:creationId xmlns:p14="http://schemas.microsoft.com/office/powerpoint/2010/main" val="1810031237"/>
+        <p14:creationId xmlns:p14="http://schemas.microsoft.com/office/powerpoint/2010/main" val="1651040580"/>
       </p:ext>
     </p:extLst>
   </p:cSld>
@@ -2143,7 +2143,7 @@
           <p:cNvPr id="1" name="Shape-53">
             <a:extLst xmlns:a="http://schemas.openxmlformats.org/drawingml/2006/main">
               <a:ext uri="{FF2B5EF4-FFF2-40B4-BE49-F238E27FC236}">
-                <a16:creationId xmlns:a16="http://schemas.microsoft.com/office/drawing/2014/main" id="{0E284AE3-F038-483F-A959-8EE8E2AFFF0F}"/>
+                <a16:creationId xmlns:a16="http://schemas.microsoft.com/office/drawing/2014/main" id="{C1B378E8-8E64-463D-9CFE-56F9F1DFF024}"/>
               </a:ext>
             </a:extLst>
           </p:cNvPr>
@@ -2170,7 +2170,7 @@
           <p:cNvPr id="2" name="Text-15">
             <a:extLst xmlns:a="http://schemas.openxmlformats.org/drawingml/2006/main">
               <a:ext uri="{FF2B5EF4-FFF2-40B4-BE49-F238E27FC236}">
-                <a16:creationId xmlns:a16="http://schemas.microsoft.com/office/drawing/2014/main" id="{FE6E4C89-FC1D-412C-A953-2B36F9E39B76}"/>
+                <a16:creationId xmlns:a16="http://schemas.microsoft.com/office/drawing/2014/main" id="{E71383F2-D8D6-4226-A4CC-5BE8E83C3E13}"/>
               </a:ext>
             </a:extLst>
           </p:cNvPr>
@@ -2215,7 +2215,7 @@
           <p:cNvPr id="3" name="Text-16">
             <a:extLst xmlns:a="http://schemas.openxmlformats.org/drawingml/2006/main">
               <a:ext uri="{FF2B5EF4-FFF2-40B4-BE49-F238E27FC236}">
-                <a16:creationId xmlns:a16="http://schemas.microsoft.com/office/drawing/2014/main" id="{2B9BA65F-13FA-41FE-9683-D9092A8C2B66}"/>
+                <a16:creationId xmlns:a16="http://schemas.microsoft.com/office/drawing/2014/main" id="{ACEB42D5-6945-4CF6-B903-213645208544}"/>
               </a:ext>
             </a:extLst>
           </p:cNvPr>
@@ -2240,7 +2240,7 @@
           <a:lstStyle xmlns:a="http://schemas.openxmlformats.org/drawingml/2006/main"/>
           <a:p xmlns:a="http://schemas.openxmlformats.org/drawingml/2006/main">
             <a:pPr algn="l">
-              <a:defRPr sz="1575" b="0">
+              <a:defRPr sz="1725" b="0">
                 <a:solidFill>
                   <a:srgbClr val="5B6472"/>
                 </a:solidFill>
@@ -2260,7 +2260,7 @@
           <p:cNvPr id="4" name="Shape-17">
             <a:extLst xmlns:a="http://schemas.openxmlformats.org/drawingml/2006/main">
               <a:ext uri="{FF2B5EF4-FFF2-40B4-BE49-F238E27FC236}">
-                <a16:creationId xmlns:a16="http://schemas.microsoft.com/office/drawing/2014/main" id="{31FB2AEC-F5A2-47D5-B658-45DD3C82BEFF}"/>
+                <a16:creationId xmlns:a16="http://schemas.microsoft.com/office/drawing/2014/main" id="{2C467716-284A-4476-BDEE-3A0D7583FA76}"/>
               </a:ext>
             </a:extLst>
           </p:cNvPr>
@@ -2287,7 +2287,7 @@
           <p:cNvPr id="5" name="Text-18">
             <a:extLst xmlns:a="http://schemas.openxmlformats.org/drawingml/2006/main">
               <a:ext uri="{FF2B5EF4-FFF2-40B4-BE49-F238E27FC236}">
-                <a16:creationId xmlns:a16="http://schemas.microsoft.com/office/drawing/2014/main" id="{314FA54E-4CFB-4768-B57F-16AC0C39AE68}"/>
+                <a16:creationId xmlns:a16="http://schemas.microsoft.com/office/drawing/2014/main" id="{6B2E603F-D047-4804-B0E7-023CFFD9D225}"/>
               </a:ext>
             </a:extLst>
           </p:cNvPr>
@@ -2307,12 +2307,12 @@
         </p:spPr>
         <p:txBody>
           <a:bodyPr xmlns:a="http://schemas.openxmlformats.org/drawingml/2006/main" lIns="0" tIns="0" rIns="0" bIns="0" anchor="t">
-            <a:normAutofit fontScale="100000"/>
+            <a:normAutofit fontScale="90909"/>
           </a:bodyPr>
           <a:lstStyle xmlns:a="http://schemas.openxmlformats.org/drawingml/2006/main"/>
           <a:p xmlns:a="http://schemas.openxmlformats.org/drawingml/2006/main">
             <a:pPr algn="ctr">
-              <a:defRPr sz="1050" b="1">
+              <a:defRPr sz="1650" b="1">
                 <a:solidFill>
                   <a:srgbClr val="5B6472"/>
                 </a:solidFill>
@@ -2398,7 +2398,7 @@
           <p:cNvPr id="9" name="Text-22">
             <a:extLst xmlns:a="http://schemas.openxmlformats.org/drawingml/2006/main">
               <a:ext uri="{FF2B5EF4-FFF2-40B4-BE49-F238E27FC236}">
-                <a16:creationId xmlns:a16="http://schemas.microsoft.com/office/drawing/2014/main" id="{8C4F2F03-3625-4F55-9F9E-CC03FFA62E01}"/>
+                <a16:creationId xmlns:a16="http://schemas.microsoft.com/office/drawing/2014/main" id="{3F4CC64C-29FD-45ED-8A0B-85FC60C9F6DB}"/>
               </a:ext>
             </a:extLst>
           </p:cNvPr>
@@ -2443,7 +2443,7 @@
           <p:cNvPr id="10" name="Text-23">
             <a:extLst xmlns:a="http://schemas.openxmlformats.org/drawingml/2006/main">
               <a:ext uri="{FF2B5EF4-FFF2-40B4-BE49-F238E27FC236}">
-                <a16:creationId xmlns:a16="http://schemas.microsoft.com/office/drawing/2014/main" id="{01955AAE-185C-4F70-9F5B-51DC35F87D90}"/>
+                <a16:creationId xmlns:a16="http://schemas.microsoft.com/office/drawing/2014/main" id="{F7A739C5-5C1C-424D-B23A-8337ACDE10F3}"/>
               </a:ext>
             </a:extLst>
           </p:cNvPr>
@@ -2488,7 +2488,7 @@
           <p:cNvPr id="11" name="Text-24">
             <a:extLst xmlns:a="http://schemas.openxmlformats.org/drawingml/2006/main">
               <a:ext uri="{FF2B5EF4-FFF2-40B4-BE49-F238E27FC236}">
-                <a16:creationId xmlns:a16="http://schemas.microsoft.com/office/drawing/2014/main" id="{AF153B32-C781-4530-8BB6-F86C448D1969}"/>
+                <a16:creationId xmlns:a16="http://schemas.microsoft.com/office/drawing/2014/main" id="{812F5741-C544-4454-A939-25D3548C67DF}"/>
               </a:ext>
             </a:extLst>
           </p:cNvPr>
@@ -2533,7 +2533,7 @@
           <p:cNvPr id="12" name="Text-25">
             <a:extLst xmlns:a="http://schemas.openxmlformats.org/drawingml/2006/main">
               <a:ext uri="{FF2B5EF4-FFF2-40B4-BE49-F238E27FC236}">
-                <a16:creationId xmlns:a16="http://schemas.microsoft.com/office/drawing/2014/main" id="{1A66CD9D-EFA6-409B-9615-F847C605FBC6}"/>
+                <a16:creationId xmlns:a16="http://schemas.microsoft.com/office/drawing/2014/main" id="{9C4FD446-784C-44F9-A752-B45522370569}"/>
               </a:ext>
             </a:extLst>
           </p:cNvPr>
@@ -2578,7 +2578,7 @@
           <p:cNvPr id="13" name="Shape-26">
             <a:extLst xmlns:a="http://schemas.openxmlformats.org/drawingml/2006/main">
               <a:ext uri="{FF2B5EF4-FFF2-40B4-BE49-F238E27FC236}">
-                <a16:creationId xmlns:a16="http://schemas.microsoft.com/office/drawing/2014/main" id="{C572026C-B42C-4893-AB02-7D0438781F16}"/>
+                <a16:creationId xmlns:a16="http://schemas.microsoft.com/office/drawing/2014/main" id="{59B8CA5E-3616-4834-8C9E-AC40FB79E3EC}"/>
               </a:ext>
             </a:extLst>
           </p:cNvPr>
@@ -2607,7 +2607,7 @@
           <p:cNvPr id="14" name="Text-27">
             <a:extLst xmlns:a="http://schemas.openxmlformats.org/drawingml/2006/main">
               <a:ext uri="{FF2B5EF4-FFF2-40B4-BE49-F238E27FC236}">
-                <a16:creationId xmlns:a16="http://schemas.microsoft.com/office/drawing/2014/main" id="{745D90D9-8856-40BF-8C3C-1D5D26F8B97D}"/>
+                <a16:creationId xmlns:a16="http://schemas.microsoft.com/office/drawing/2014/main" id="{49166146-4D61-49B8-8765-9C4437AD9672}"/>
               </a:ext>
             </a:extLst>
           </p:cNvPr>
@@ -2652,7 +2652,7 @@
           <p:cNvPr id="15" name="Shape-28">
             <a:extLst xmlns:a="http://schemas.openxmlformats.org/drawingml/2006/main">
               <a:ext uri="{FF2B5EF4-FFF2-40B4-BE49-F238E27FC236}">
-                <a16:creationId xmlns:a16="http://schemas.microsoft.com/office/drawing/2014/main" id="{01FA7AEB-FCBC-4112-8753-C8A59B46FF35}"/>
+                <a16:creationId xmlns:a16="http://schemas.microsoft.com/office/drawing/2014/main" id="{3182BB29-31C5-42C0-AC84-5FE1D34FCFAC}"/>
               </a:ext>
             </a:extLst>
           </p:cNvPr>
@@ -2687,7 +2687,7 @@
           <p:cNvPr id="16" name="Text-29">
             <a:extLst xmlns:a="http://schemas.openxmlformats.org/drawingml/2006/main">
               <a:ext uri="{FF2B5EF4-FFF2-40B4-BE49-F238E27FC236}">
-                <a16:creationId xmlns:a16="http://schemas.microsoft.com/office/drawing/2014/main" id="{DCA11525-34F1-405E-A71A-42F680B90160}"/>
+                <a16:creationId xmlns:a16="http://schemas.microsoft.com/office/drawing/2014/main" id="{A70FC70F-AAFE-4213-BDEC-C2455425F6A5}"/>
               </a:ext>
             </a:extLst>
           </p:cNvPr>
@@ -2712,7 +2712,7 @@
           <a:lstStyle xmlns:a="http://schemas.openxmlformats.org/drawingml/2006/main"/>
           <a:p xmlns:a="http://schemas.openxmlformats.org/drawingml/2006/main">
             <a:pPr algn="ctr">
-              <a:defRPr sz="1500" b="0">
+              <a:defRPr sz="1650" b="0">
                 <a:solidFill>
                   <a:srgbClr val="123DAE"/>
                 </a:solidFill>
@@ -2732,7 +2732,7 @@
           <p:cNvPr id="17" name="Shape-30">
             <a:extLst xmlns:a="http://schemas.openxmlformats.org/drawingml/2006/main">
               <a:ext uri="{FF2B5EF4-FFF2-40B4-BE49-F238E27FC236}">
-                <a16:creationId xmlns:a16="http://schemas.microsoft.com/office/drawing/2014/main" id="{C755ADBE-6EB3-4C85-9057-76A0DF7F9238}"/>
+                <a16:creationId xmlns:a16="http://schemas.microsoft.com/office/drawing/2014/main" id="{90DF8D8B-41AD-491E-9F39-37615BF05F0E}"/>
               </a:ext>
             </a:extLst>
           </p:cNvPr>
@@ -2767,7 +2767,7 @@
           <p:cNvPr id="18" name="Text-31">
             <a:extLst xmlns:a="http://schemas.openxmlformats.org/drawingml/2006/main">
               <a:ext uri="{FF2B5EF4-FFF2-40B4-BE49-F238E27FC236}">
-                <a16:creationId xmlns:a16="http://schemas.microsoft.com/office/drawing/2014/main" id="{F12265ED-FD99-4098-A885-BB6EAD4B581E}"/>
+                <a16:creationId xmlns:a16="http://schemas.microsoft.com/office/drawing/2014/main" id="{1AABF39D-4839-460C-82A2-6822DA70D536}"/>
               </a:ext>
             </a:extLst>
           </p:cNvPr>
@@ -2792,7 +2792,7 @@
           <a:lstStyle xmlns:a="http://schemas.openxmlformats.org/drawingml/2006/main"/>
           <a:p xmlns:a="http://schemas.openxmlformats.org/drawingml/2006/main">
             <a:pPr algn="ctr">
-              <a:defRPr sz="1500" b="0">
+              <a:defRPr sz="1650" b="0">
                 <a:solidFill>
                   <a:srgbClr val="0B0D12"/>
                 </a:solidFill>
@@ -2812,7 +2812,7 @@
           <p:cNvPr id="19" name="Shape-32">
             <a:extLst xmlns:a="http://schemas.openxmlformats.org/drawingml/2006/main">
               <a:ext uri="{FF2B5EF4-FFF2-40B4-BE49-F238E27FC236}">
-                <a16:creationId xmlns:a16="http://schemas.microsoft.com/office/drawing/2014/main" id="{3D7DB987-80B5-460D-931A-EBE93D190EBF}"/>
+                <a16:creationId xmlns:a16="http://schemas.microsoft.com/office/drawing/2014/main" id="{97F18E8E-179E-4874-BD91-E64E646EFC73}"/>
               </a:ext>
             </a:extLst>
           </p:cNvPr>
@@ -2847,7 +2847,7 @@
           <p:cNvPr id="20" name="Text-33">
             <a:extLst xmlns:a="http://schemas.openxmlformats.org/drawingml/2006/main">
               <a:ext uri="{FF2B5EF4-FFF2-40B4-BE49-F238E27FC236}">
-                <a16:creationId xmlns:a16="http://schemas.microsoft.com/office/drawing/2014/main" id="{67B18458-8245-4683-AE12-0C60A4016506}"/>
+                <a16:creationId xmlns:a16="http://schemas.microsoft.com/office/drawing/2014/main" id="{8E7A7D48-6833-40AF-A622-F7ECD19D813B}"/>
               </a:ext>
             </a:extLst>
           </p:cNvPr>
@@ -2867,12 +2867,12 @@
         </p:spPr>
         <p:txBody>
           <a:bodyPr xmlns:a="http://schemas.openxmlformats.org/drawingml/2006/main" lIns="0" tIns="0" rIns="0" bIns="0" anchor="t">
-            <a:normAutofit fontScale="100000"/>
+            <a:normAutofit fontScale="98485"/>
           </a:bodyPr>
           <a:lstStyle xmlns:a="http://schemas.openxmlformats.org/drawingml/2006/main"/>
           <a:p xmlns:a="http://schemas.openxmlformats.org/drawingml/2006/main">
             <a:pPr algn="ctr">
-              <a:defRPr sz="1425" b="0">
+              <a:defRPr sz="1650" b="0">
                 <a:solidFill>
                   <a:srgbClr val="123DAE"/>
                 </a:solidFill>
@@ -2892,7 +2892,7 @@
           <p:cNvPr id="21" name="Shape-34">
             <a:extLst xmlns:a="http://schemas.openxmlformats.org/drawingml/2006/main">
               <a:ext uri="{FF2B5EF4-FFF2-40B4-BE49-F238E27FC236}">
-                <a16:creationId xmlns:a16="http://schemas.microsoft.com/office/drawing/2014/main" id="{A6552C01-1D8D-4D9E-81AF-EB97F69A23BA}"/>
+                <a16:creationId xmlns:a16="http://schemas.microsoft.com/office/drawing/2014/main" id="{C4D78F9A-2D87-411D-B22C-FA384F2DE12A}"/>
               </a:ext>
             </a:extLst>
           </p:cNvPr>
@@ -2921,7 +2921,7 @@
           <p:cNvPr id="22" name="Text-35">
             <a:extLst xmlns:a="http://schemas.openxmlformats.org/drawingml/2006/main">
               <a:ext uri="{FF2B5EF4-FFF2-40B4-BE49-F238E27FC236}">
-                <a16:creationId xmlns:a16="http://schemas.microsoft.com/office/drawing/2014/main" id="{2B9AB6A4-4CEC-4C9D-B07B-03817C6F5C37}"/>
+                <a16:creationId xmlns:a16="http://schemas.microsoft.com/office/drawing/2014/main" id="{11AF5A07-2CDD-48F3-A7D7-3F5D0ABF71DF}"/>
               </a:ext>
             </a:extLst>
           </p:cNvPr>
@@ -2966,7 +2966,7 @@
           <p:cNvPr id="23" name="Shape-36">
             <a:extLst xmlns:a="http://schemas.openxmlformats.org/drawingml/2006/main">
               <a:ext uri="{FF2B5EF4-FFF2-40B4-BE49-F238E27FC236}">
-                <a16:creationId xmlns:a16="http://schemas.microsoft.com/office/drawing/2014/main" id="{37107BE9-53B1-4925-A471-C76592B7A7F5}"/>
+                <a16:creationId xmlns:a16="http://schemas.microsoft.com/office/drawing/2014/main" id="{15BE599D-B953-4E65-8A6F-F56BDD0F712A}"/>
               </a:ext>
             </a:extLst>
           </p:cNvPr>
@@ -2995,7 +2995,7 @@
           <p:cNvPr id="24" name="Text-37">
             <a:extLst xmlns:a="http://schemas.openxmlformats.org/drawingml/2006/main">
               <a:ext uri="{FF2B5EF4-FFF2-40B4-BE49-F238E27FC236}">
-                <a16:creationId xmlns:a16="http://schemas.microsoft.com/office/drawing/2014/main" id="{5C093E61-9D6F-478B-8D01-D4E885E76EB7}"/>
+                <a16:creationId xmlns:a16="http://schemas.microsoft.com/office/drawing/2014/main" id="{C627A817-8D8C-4415-ADA8-B54E1AE9384A}"/>
               </a:ext>
             </a:extLst>
           </p:cNvPr>
@@ -3020,7 +3020,7 @@
           <a:lstStyle xmlns:a="http://schemas.openxmlformats.org/drawingml/2006/main"/>
           <a:p xmlns:a="http://schemas.openxmlformats.org/drawingml/2006/main">
             <a:pPr algn="ctr">
-              <a:defRPr sz="1500" b="1">
+              <a:defRPr sz="1650" b="1">
                 <a:solidFill>
                   <a:srgbClr val="FFFFFF"/>
                 </a:solidFill>
@@ -3040,7 +3040,7 @@
           <p:cNvPr id="25" name="Shape-38">
             <a:extLst xmlns:a="http://schemas.openxmlformats.org/drawingml/2006/main">
               <a:ext uri="{FF2B5EF4-FFF2-40B4-BE49-F238E27FC236}">
-                <a16:creationId xmlns:a16="http://schemas.microsoft.com/office/drawing/2014/main" id="{5293B93F-E22C-4B26-9B47-C2B462C4B183}"/>
+                <a16:creationId xmlns:a16="http://schemas.microsoft.com/office/drawing/2014/main" id="{6EA31E70-6CF9-435D-84A3-639A89637672}"/>
               </a:ext>
             </a:extLst>
           </p:cNvPr>
@@ -3075,7 +3075,7 @@
           <p:cNvPr id="26" name="Text-39">
             <a:extLst xmlns:a="http://schemas.openxmlformats.org/drawingml/2006/main">
               <a:ext uri="{FF2B5EF4-FFF2-40B4-BE49-F238E27FC236}">
-                <a16:creationId xmlns:a16="http://schemas.microsoft.com/office/drawing/2014/main" id="{C2144328-5562-4A96-B214-A74CB8238B27}"/>
+                <a16:creationId xmlns:a16="http://schemas.microsoft.com/office/drawing/2014/main" id="{A4ADF8FF-F787-48EC-8881-8651FE371DC7}"/>
               </a:ext>
             </a:extLst>
           </p:cNvPr>
@@ -3100,7 +3100,7 @@
           <a:lstStyle xmlns:a="http://schemas.openxmlformats.org/drawingml/2006/main"/>
           <a:p xmlns:a="http://schemas.openxmlformats.org/drawingml/2006/main">
             <a:pPr algn="ctr">
-              <a:defRPr sz="1500" b="0">
+              <a:defRPr sz="1650" b="0">
                 <a:solidFill>
                   <a:srgbClr val="123DAE"/>
                 </a:solidFill>
@@ -3120,7 +3120,7 @@
           <p:cNvPr id="27" name="Shape-40">
             <a:extLst xmlns:a="http://schemas.openxmlformats.org/drawingml/2006/main">
               <a:ext uri="{FF2B5EF4-FFF2-40B4-BE49-F238E27FC236}">
-                <a16:creationId xmlns:a16="http://schemas.microsoft.com/office/drawing/2014/main" id="{D5A4598C-915A-4A68-B00D-9AB837EF47F8}"/>
+                <a16:creationId xmlns:a16="http://schemas.microsoft.com/office/drawing/2014/main" id="{48A4D548-1B0A-4B91-9F53-391574CDEA99}"/>
               </a:ext>
             </a:extLst>
           </p:cNvPr>
@@ -3155,7 +3155,7 @@
           <p:cNvPr id="28" name="Text-41">
             <a:extLst xmlns:a="http://schemas.openxmlformats.org/drawingml/2006/main">
               <a:ext uri="{FF2B5EF4-FFF2-40B4-BE49-F238E27FC236}">
-                <a16:creationId xmlns:a16="http://schemas.microsoft.com/office/drawing/2014/main" id="{D82A8A64-4FEE-43FB-9EC9-F28DA404F33C}"/>
+                <a16:creationId xmlns:a16="http://schemas.microsoft.com/office/drawing/2014/main" id="{7BCA7409-F59B-48FC-A436-87E6EAE2C311}"/>
               </a:ext>
             </a:extLst>
           </p:cNvPr>
@@ -3180,7 +3180,7 @@
           <a:lstStyle xmlns:a="http://schemas.openxmlformats.org/drawingml/2006/main"/>
           <a:p xmlns:a="http://schemas.openxmlformats.org/drawingml/2006/main">
             <a:pPr algn="ctr">
-              <a:defRPr sz="1500" b="0">
+              <a:defRPr sz="1650" b="0">
                 <a:solidFill>
                   <a:srgbClr val="0B0D12"/>
                 </a:solidFill>
@@ -3200,23 +3200,23 @@
           <p:cNvPr id="29" name="Shape-42">
             <a:extLst xmlns:a="http://schemas.openxmlformats.org/drawingml/2006/main">
               <a:ext uri="{FF2B5EF4-FFF2-40B4-BE49-F238E27FC236}">
-                <a16:creationId xmlns:a16="http://schemas.microsoft.com/office/drawing/2014/main" id="{41BDF692-EB8E-4F8A-9F7D-02CEC9859788}"/>
-              </a:ext>
-            </a:extLst>
-          </p:cNvPr>
-          <p:cNvSpPr>
-            <a:spLocks xmlns:a="http://schemas.openxmlformats.org/drawingml/2006/main" noGrp="1"/>
-          </p:cNvSpPr>
-          <p:nvPr/>
-        </p:nvSpPr>
-        <p:spPr>
-          <a:xfrm xmlns:a="http://schemas.openxmlformats.org/drawingml/2006/main">
-            <a:off x="7886700" y="3476625"/>
-            <a:ext cx="2019300" cy="762000"/>
+                <a16:creationId xmlns:a16="http://schemas.microsoft.com/office/drawing/2014/main" id="{BF9FD25D-DB9D-4384-88F2-44DC6E93ED77}"/>
+              </a:ext>
+            </a:extLst>
+          </p:cNvPr>
+          <p:cNvSpPr>
+            <a:spLocks xmlns:a="http://schemas.openxmlformats.org/drawingml/2006/main" noGrp="1"/>
+          </p:cNvSpPr>
+          <p:nvPr/>
+        </p:nvSpPr>
+        <p:spPr>
+          <a:xfrm xmlns:a="http://schemas.openxmlformats.org/drawingml/2006/main">
+            <a:off x="7886700" y="3400425"/>
+            <a:ext cx="2019300" cy="914400"/>
           </a:xfrm>
           <a:prstGeom xmlns:a="http://schemas.openxmlformats.org/drawingml/2006/main" prst="roundRect">
             <a:avLst>
-              <a:gd name="adj" fmla="val 10000"/>
+              <a:gd name="adj" fmla="val 8333"/>
             </a:avLst>
           </a:prstGeom>
           <a:solidFill xmlns:a="http://schemas.openxmlformats.org/drawingml/2006/main">
@@ -3235,19 +3235,19 @@
           <p:cNvPr id="30" name="Text-43">
             <a:extLst xmlns:a="http://schemas.openxmlformats.org/drawingml/2006/main">
               <a:ext uri="{FF2B5EF4-FFF2-40B4-BE49-F238E27FC236}">
-                <a16:creationId xmlns:a16="http://schemas.microsoft.com/office/drawing/2014/main" id="{E90A4FF7-55F9-405C-A392-45BFA74DD3D1}"/>
-              </a:ext>
-            </a:extLst>
-          </p:cNvPr>
-          <p:cNvSpPr>
-            <a:spLocks xmlns:a="http://schemas.openxmlformats.org/drawingml/2006/main" noGrp="1"/>
-          </p:cNvSpPr>
-          <p:nvPr/>
-        </p:nvSpPr>
-        <p:spPr>
-          <a:xfrm xmlns:a="http://schemas.openxmlformats.org/drawingml/2006/main">
-            <a:off x="8039100" y="3571875"/>
-            <a:ext cx="1714500" cy="514350"/>
+                <a16:creationId xmlns:a16="http://schemas.microsoft.com/office/drawing/2014/main" id="{B94F29A9-4AF7-424D-9DA8-8CF5C80D4325}"/>
+              </a:ext>
+            </a:extLst>
+          </p:cNvPr>
+          <p:cNvSpPr>
+            <a:spLocks xmlns:a="http://schemas.openxmlformats.org/drawingml/2006/main" noGrp="1"/>
+          </p:cNvSpPr>
+          <p:nvPr/>
+        </p:nvSpPr>
+        <p:spPr>
+          <a:xfrm xmlns:a="http://schemas.openxmlformats.org/drawingml/2006/main">
+            <a:off x="8039100" y="3467100"/>
+            <a:ext cx="1714500" cy="800100"/>
           </a:xfrm>
           <a:prstGeom xmlns:a="http://schemas.openxmlformats.org/drawingml/2006/main" prst="rect">
             <a:avLst/>
@@ -3260,7 +3260,7 @@
           <a:lstStyle xmlns:a="http://schemas.openxmlformats.org/drawingml/2006/main"/>
           <a:p xmlns:a="http://schemas.openxmlformats.org/drawingml/2006/main">
             <a:pPr algn="ctr">
-              <a:defRPr sz="1275" b="0">
+              <a:defRPr sz="1650" b="0">
                 <a:solidFill>
                   <a:srgbClr val="123DAE"/>
                 </a:solidFill>
@@ -3270,7 +3270,9 @@
               </a:defRPr>
             </a:pPr>
             <a:r>
-              <a:t>ordered Pydantic event</a:t>
+              <a:t>ordered
+Pydantic
+event</a:t>
             </a:r>
           </a:p>
         </p:txBody>
@@ -3280,7 +3282,7 @@
           <p:cNvPr id="31" name="Shape-44">
             <a:extLst xmlns:a="http://schemas.openxmlformats.org/drawingml/2006/main">
               <a:ext uri="{FF2B5EF4-FFF2-40B4-BE49-F238E27FC236}">
-                <a16:creationId xmlns:a16="http://schemas.microsoft.com/office/drawing/2014/main" id="{4382C187-B824-4EFB-9E16-9B3598CE4C9E}"/>
+                <a16:creationId xmlns:a16="http://schemas.microsoft.com/office/drawing/2014/main" id="{253245D2-C548-434A-BDB9-F80A10874640}"/>
               </a:ext>
             </a:extLst>
           </p:cNvPr>
@@ -3309,7 +3311,7 @@
           <p:cNvPr id="32" name="Text-45">
             <a:extLst xmlns:a="http://schemas.openxmlformats.org/drawingml/2006/main">
               <a:ext uri="{FF2B5EF4-FFF2-40B4-BE49-F238E27FC236}">
-                <a16:creationId xmlns:a16="http://schemas.microsoft.com/office/drawing/2014/main" id="{83F51678-9AA3-48C6-A7C3-0BC61C206485}"/>
+                <a16:creationId xmlns:a16="http://schemas.microsoft.com/office/drawing/2014/main" id="{2C65F003-5527-4CD5-9741-AC30D1E9FC34}"/>
               </a:ext>
             </a:extLst>
           </p:cNvPr>
@@ -3354,19 +3356,19 @@
           <p:cNvPr id="33" name="Shape-46">
             <a:extLst xmlns:a="http://schemas.openxmlformats.org/drawingml/2006/main">
               <a:ext uri="{FF2B5EF4-FFF2-40B4-BE49-F238E27FC236}">
-                <a16:creationId xmlns:a16="http://schemas.microsoft.com/office/drawing/2014/main" id="{4BD9FBAC-DBF9-441A-86CC-2E5D9533899C}"/>
-              </a:ext>
-            </a:extLst>
-          </p:cNvPr>
-          <p:cNvSpPr>
-            <a:spLocks xmlns:a="http://schemas.openxmlformats.org/drawingml/2006/main" noGrp="1"/>
-          </p:cNvSpPr>
-          <p:nvPr/>
-        </p:nvSpPr>
-        <p:spPr>
-          <a:xfrm xmlns:a="http://schemas.openxmlformats.org/drawingml/2006/main">
-            <a:off x="4686300" y="4772025"/>
-            <a:ext cx="2781300" cy="342900"/>
+                <a16:creationId xmlns:a16="http://schemas.microsoft.com/office/drawing/2014/main" id="{589BFFB6-B354-4824-B9BD-4F7C658841E3}"/>
+              </a:ext>
+            </a:extLst>
+          </p:cNvPr>
+          <p:cNvSpPr>
+            <a:spLocks xmlns:a="http://schemas.openxmlformats.org/drawingml/2006/main" noGrp="1"/>
+          </p:cNvSpPr>
+          <p:nvPr/>
+        </p:nvSpPr>
+        <p:spPr>
+          <a:xfrm xmlns:a="http://schemas.openxmlformats.org/drawingml/2006/main">
+            <a:off x="4286250" y="4772025"/>
+            <a:ext cx="3581400" cy="342900"/>
           </a:xfrm>
           <a:prstGeom xmlns:a="http://schemas.openxmlformats.org/drawingml/2006/main" prst="roundRect">
             <a:avLst>
@@ -3383,32 +3385,32 @@
           <p:cNvPr id="34" name="Text-47">
             <a:extLst xmlns:a="http://schemas.openxmlformats.org/drawingml/2006/main">
               <a:ext uri="{FF2B5EF4-FFF2-40B4-BE49-F238E27FC236}">
-                <a16:creationId xmlns:a16="http://schemas.microsoft.com/office/drawing/2014/main" id="{500E1C04-306C-41C3-842D-73C845E95CC0}"/>
-              </a:ext>
-            </a:extLst>
-          </p:cNvPr>
-          <p:cNvSpPr>
-            <a:spLocks xmlns:a="http://schemas.openxmlformats.org/drawingml/2006/main" noGrp="1"/>
-          </p:cNvSpPr>
-          <p:nvPr/>
-        </p:nvSpPr>
-        <p:spPr>
-          <a:xfrm xmlns:a="http://schemas.openxmlformats.org/drawingml/2006/main">
-            <a:off x="4800600" y="4848225"/>
-            <a:ext cx="2552700" cy="228600"/>
-          </a:xfrm>
-          <a:prstGeom xmlns:a="http://schemas.openxmlformats.org/drawingml/2006/main" prst="rect">
-            <a:avLst/>
-          </a:prstGeom>
-        </p:spPr>
-        <p:txBody>
-          <a:bodyPr xmlns:a="http://schemas.openxmlformats.org/drawingml/2006/main" lIns="0" tIns="0" rIns="0" bIns="0" anchor="t">
-            <a:normAutofit fontScale="100000"/>
+                <a16:creationId xmlns:a16="http://schemas.microsoft.com/office/drawing/2014/main" id="{440376AA-27BA-4BEB-9585-53160B8F2D65}"/>
+              </a:ext>
+            </a:extLst>
+          </p:cNvPr>
+          <p:cNvSpPr>
+            <a:spLocks xmlns:a="http://schemas.openxmlformats.org/drawingml/2006/main" noGrp="1"/>
+          </p:cNvSpPr>
+          <p:nvPr/>
+        </p:nvSpPr>
+        <p:spPr>
+          <a:xfrm xmlns:a="http://schemas.openxmlformats.org/drawingml/2006/main">
+            <a:off x="4400550" y="4848225"/>
+            <a:ext cx="3352800" cy="228600"/>
+          </a:xfrm>
+          <a:prstGeom xmlns:a="http://schemas.openxmlformats.org/drawingml/2006/main" prst="rect">
+            <a:avLst/>
+          </a:prstGeom>
+        </p:spPr>
+        <p:txBody>
+          <a:bodyPr xmlns:a="http://schemas.openxmlformats.org/drawingml/2006/main" lIns="0" tIns="0" rIns="0" bIns="0" anchor="t">
+            <a:normAutofit fontScale="90909"/>
           </a:bodyPr>
           <a:lstStyle xmlns:a="http://schemas.openxmlformats.org/drawingml/2006/main"/>
           <a:p xmlns:a="http://schemas.openxmlformats.org/drawingml/2006/main">
             <a:pPr algn="ctr">
-              <a:defRPr sz="1200" b="1">
+              <a:defRPr sz="1650" b="1">
                 <a:solidFill>
                   <a:srgbClr val="B96800"/>
                 </a:solidFill>
@@ -3428,7 +3430,7 @@
           <p:cNvPr id="35" name="Text-48">
             <a:extLst xmlns:a="http://schemas.openxmlformats.org/drawingml/2006/main">
               <a:ext uri="{FF2B5EF4-FFF2-40B4-BE49-F238E27FC236}">
-                <a16:creationId xmlns:a16="http://schemas.microsoft.com/office/drawing/2014/main" id="{1A809323-1244-46EF-8361-4518A6E9A5FC}"/>
+                <a16:creationId xmlns:a16="http://schemas.microsoft.com/office/drawing/2014/main" id="{B5E9B582-D5FB-4FF1-8ED4-79CE0351E4DA}"/>
               </a:ext>
             </a:extLst>
           </p:cNvPr>
@@ -3453,7 +3455,7 @@
           <a:lstStyle xmlns:a="http://schemas.openxmlformats.org/drawingml/2006/main"/>
           <a:p xmlns:a="http://schemas.openxmlformats.org/drawingml/2006/main">
             <a:pPr algn="l">
-              <a:defRPr sz="1350" b="0">
+              <a:defRPr sz="1650" b="0">
                 <a:solidFill>
                   <a:srgbClr val="5B6472"/>
                 </a:solidFill>
@@ -3473,7 +3475,7 @@
           <p:cNvPr id="36" name="Text-49">
             <a:extLst xmlns:a="http://schemas.openxmlformats.org/drawingml/2006/main">
               <a:ext uri="{FF2B5EF4-FFF2-40B4-BE49-F238E27FC236}">
-                <a16:creationId xmlns:a16="http://schemas.microsoft.com/office/drawing/2014/main" id="{85B07F19-D048-40F1-98A0-649C6CC5F210}"/>
+                <a16:creationId xmlns:a16="http://schemas.microsoft.com/office/drawing/2014/main" id="{5C38561D-94C9-42EA-8F71-9C10313AF1AD}"/>
               </a:ext>
             </a:extLst>
           </p:cNvPr>
@@ -3498,7 +3500,7 @@
           <a:lstStyle xmlns:a="http://schemas.openxmlformats.org/drawingml/2006/main"/>
           <a:p xmlns:a="http://schemas.openxmlformats.org/drawingml/2006/main">
             <a:pPr algn="r">
-              <a:defRPr sz="1350" b="0">
+              <a:defRPr sz="1650" b="0">
                 <a:solidFill>
                   <a:srgbClr val="5B6472"/>
                 </a:solidFill>
@@ -3540,7 +3542,7 @@
           <p:cNvPr id="38" name="Text-51">
             <a:extLst xmlns:a="http://schemas.openxmlformats.org/drawingml/2006/main">
               <a:ext uri="{FF2B5EF4-FFF2-40B4-BE49-F238E27FC236}">
-                <a16:creationId xmlns:a16="http://schemas.microsoft.com/office/drawing/2014/main" id="{490222F1-930F-4232-9AF2-F09396687955}"/>
+                <a16:creationId xmlns:a16="http://schemas.microsoft.com/office/drawing/2014/main" id="{2A211AFD-875B-4F59-88F8-C9A2AC78A63C}"/>
               </a:ext>
             </a:extLst>
           </p:cNvPr>
@@ -3585,7 +3587,7 @@
           <p:cNvPr id="39" name="Text-52">
             <a:extLst xmlns:a="http://schemas.openxmlformats.org/drawingml/2006/main">
               <a:ext uri="{FF2B5EF4-FFF2-40B4-BE49-F238E27FC236}">
-                <a16:creationId xmlns:a16="http://schemas.microsoft.com/office/drawing/2014/main" id="{96D4913C-7ED1-4F5E-A0A8-70A232E9C7EB}"/>
+                <a16:creationId xmlns:a16="http://schemas.microsoft.com/office/drawing/2014/main" id="{F32CAD0A-70D1-4044-836F-A29BA683A85D}"/>
               </a:ext>
             </a:extLst>
           </p:cNvPr>
@@ -3628,7 +3630,7 @@
     </p:spTree>
     <p:extLst>
       <p:ext uri="{BB962C8B-B14F-4D97-AF65-F5344CB8AC3E}">
-        <p14:creationId xmlns:p14="http://schemas.microsoft.com/office/powerpoint/2010/main" val="625957370"/>
+        <p14:creationId xmlns:p14="http://schemas.microsoft.com/office/powerpoint/2010/main" val="1699585559"/>
       </p:ext>
     </p:extLst>
   </p:cSld>
@@ -3649,10 +3651,10 @@
       </p:grpSpPr>
       <p:sp>
         <p:nvSpPr>
-          <p:cNvPr id="1" name="Shape-100">
-            <a:extLst xmlns:a="http://schemas.openxmlformats.org/drawingml/2006/main">
-              <a:ext uri="{FF2B5EF4-FFF2-40B4-BE49-F238E27FC236}">
-                <a16:creationId xmlns:a16="http://schemas.microsoft.com/office/drawing/2014/main" id="{16A9ABEA-0AAE-439C-826B-6CAD822214E5}"/>
+          <p:cNvPr id="1" name="Shape-101">
+            <a:extLst xmlns:a="http://schemas.openxmlformats.org/drawingml/2006/main">
+              <a:ext uri="{FF2B5EF4-FFF2-40B4-BE49-F238E27FC236}">
+                <a16:creationId xmlns:a16="http://schemas.microsoft.com/office/drawing/2014/main" id="{7A29DA51-8CE9-405A-9790-E768D686AC6E}"/>
               </a:ext>
             </a:extLst>
           </p:cNvPr>
@@ -3679,7 +3681,7 @@
           <p:cNvPr id="2" name="Text-54">
             <a:extLst xmlns:a="http://schemas.openxmlformats.org/drawingml/2006/main">
               <a:ext uri="{FF2B5EF4-FFF2-40B4-BE49-F238E27FC236}">
-                <a16:creationId xmlns:a16="http://schemas.microsoft.com/office/drawing/2014/main" id="{8C8D0E57-DC36-4909-B04A-BA1CF491209B}"/>
+                <a16:creationId xmlns:a16="http://schemas.microsoft.com/office/drawing/2014/main" id="{FE61B1D3-5394-4B02-A555-0A8966AA3860}"/>
               </a:ext>
             </a:extLst>
           </p:cNvPr>
@@ -3724,19 +3726,19 @@
           <p:cNvPr id="3" name="Shape-55">
             <a:extLst xmlns:a="http://schemas.openxmlformats.org/drawingml/2006/main">
               <a:ext uri="{FF2B5EF4-FFF2-40B4-BE49-F238E27FC236}">
-                <a16:creationId xmlns:a16="http://schemas.microsoft.com/office/drawing/2014/main" id="{BD985661-AE5C-460E-B674-F218288DE634}"/>
-              </a:ext>
-            </a:extLst>
-          </p:cNvPr>
-          <p:cNvSpPr>
-            <a:spLocks xmlns:a="http://schemas.openxmlformats.org/drawingml/2006/main" noGrp="1"/>
-          </p:cNvSpPr>
-          <p:nvPr/>
-        </p:nvSpPr>
-        <p:spPr>
-          <a:xfrm xmlns:a="http://schemas.openxmlformats.org/drawingml/2006/main">
-            <a:off x="552450" y="1143000"/>
-            <a:ext cx="2286000" cy="342900"/>
+                <a16:creationId xmlns:a16="http://schemas.microsoft.com/office/drawing/2014/main" id="{2A545D26-A759-4576-BE69-39B6B7569AB4}"/>
+              </a:ext>
+            </a:extLst>
+          </p:cNvPr>
+          <p:cNvSpPr>
+            <a:spLocks xmlns:a="http://schemas.openxmlformats.org/drawingml/2006/main" noGrp="1"/>
+          </p:cNvSpPr>
+          <p:nvPr/>
+        </p:nvSpPr>
+        <p:spPr>
+          <a:xfrm xmlns:a="http://schemas.openxmlformats.org/drawingml/2006/main">
+            <a:off x="457200" y="1143000"/>
+            <a:ext cx="2095500" cy="342900"/>
           </a:xfrm>
           <a:prstGeom xmlns:a="http://schemas.openxmlformats.org/drawingml/2006/main" prst="roundRect">
             <a:avLst>
@@ -3753,32 +3755,32 @@
           <p:cNvPr id="4" name="Text-56">
             <a:extLst xmlns:a="http://schemas.openxmlformats.org/drawingml/2006/main">
               <a:ext uri="{FF2B5EF4-FFF2-40B4-BE49-F238E27FC236}">
-                <a16:creationId xmlns:a16="http://schemas.microsoft.com/office/drawing/2014/main" id="{E0A9390F-E116-4B30-9AB7-BDED01F3A7CC}"/>
-              </a:ext>
-            </a:extLst>
-          </p:cNvPr>
-          <p:cNvSpPr>
-            <a:spLocks xmlns:a="http://schemas.openxmlformats.org/drawingml/2006/main" noGrp="1"/>
-          </p:cNvSpPr>
-          <p:nvPr/>
-        </p:nvSpPr>
-        <p:spPr>
-          <a:xfrm xmlns:a="http://schemas.openxmlformats.org/drawingml/2006/main">
-            <a:off x="666750" y="1219200"/>
-            <a:ext cx="2057400" cy="228600"/>
-          </a:xfrm>
-          <a:prstGeom xmlns:a="http://schemas.openxmlformats.org/drawingml/2006/main" prst="rect">
-            <a:avLst/>
-          </a:prstGeom>
-        </p:spPr>
-        <p:txBody>
-          <a:bodyPr xmlns:a="http://schemas.openxmlformats.org/drawingml/2006/main" lIns="0" tIns="0" rIns="0" bIns="0" anchor="t">
-            <a:normAutofit fontScale="100000"/>
+                <a16:creationId xmlns:a16="http://schemas.microsoft.com/office/drawing/2014/main" id="{F7C4E396-0F11-4524-BFD7-7263F825DE49}"/>
+              </a:ext>
+            </a:extLst>
+          </p:cNvPr>
+          <p:cNvSpPr>
+            <a:spLocks xmlns:a="http://schemas.openxmlformats.org/drawingml/2006/main" noGrp="1"/>
+          </p:cNvSpPr>
+          <p:nvPr/>
+        </p:nvSpPr>
+        <p:spPr>
+          <a:xfrm xmlns:a="http://schemas.openxmlformats.org/drawingml/2006/main">
+            <a:off x="571500" y="1219200"/>
+            <a:ext cx="1866900" cy="228600"/>
+          </a:xfrm>
+          <a:prstGeom xmlns:a="http://schemas.openxmlformats.org/drawingml/2006/main" prst="rect">
+            <a:avLst/>
+          </a:prstGeom>
+        </p:spPr>
+        <p:txBody>
+          <a:bodyPr xmlns:a="http://schemas.openxmlformats.org/drawingml/2006/main" lIns="0" tIns="0" rIns="0" bIns="0" anchor="t">
+            <a:normAutofit fontScale="90909"/>
           </a:bodyPr>
           <a:lstStyle xmlns:a="http://schemas.openxmlformats.org/drawingml/2006/main"/>
           <a:p xmlns:a="http://schemas.openxmlformats.org/drawingml/2006/main">
             <a:pPr algn="ctr">
-              <a:defRPr sz="1200" b="1">
+              <a:defRPr sz="1650" b="1">
                 <a:solidFill>
                   <a:srgbClr val="0B0D12"/>
                 </a:solidFill>
@@ -3798,19 +3800,19 @@
           <p:cNvPr id="5" name="Shape-57">
             <a:extLst xmlns:a="http://schemas.openxmlformats.org/drawingml/2006/main">
               <a:ext uri="{FF2B5EF4-FFF2-40B4-BE49-F238E27FC236}">
-                <a16:creationId xmlns:a16="http://schemas.microsoft.com/office/drawing/2014/main" id="{DFF02345-65E6-41A7-97D4-AC7E838F35DA}"/>
-              </a:ext>
-            </a:extLst>
-          </p:cNvPr>
-          <p:cNvSpPr>
-            <a:spLocks xmlns:a="http://schemas.openxmlformats.org/drawingml/2006/main" noGrp="1"/>
-          </p:cNvSpPr>
-          <p:nvPr/>
-        </p:nvSpPr>
-        <p:spPr>
-          <a:xfrm xmlns:a="http://schemas.openxmlformats.org/drawingml/2006/main">
-            <a:off x="3143250" y="1143000"/>
-            <a:ext cx="2286000" cy="342900"/>
+                <a16:creationId xmlns:a16="http://schemas.microsoft.com/office/drawing/2014/main" id="{B2A57F4A-E833-492C-B9F8-209F8E15B8D2}"/>
+              </a:ext>
+            </a:extLst>
+          </p:cNvPr>
+          <p:cNvSpPr>
+            <a:spLocks xmlns:a="http://schemas.openxmlformats.org/drawingml/2006/main" noGrp="1"/>
+          </p:cNvSpPr>
+          <p:nvPr/>
+        </p:nvSpPr>
+        <p:spPr>
+          <a:xfrm xmlns:a="http://schemas.openxmlformats.org/drawingml/2006/main">
+            <a:off x="2743200" y="1143000"/>
+            <a:ext cx="2095500" cy="342900"/>
           </a:xfrm>
           <a:prstGeom xmlns:a="http://schemas.openxmlformats.org/drawingml/2006/main" prst="roundRect">
             <a:avLst>
@@ -3827,32 +3829,32 @@
           <p:cNvPr id="6" name="Text-58">
             <a:extLst xmlns:a="http://schemas.openxmlformats.org/drawingml/2006/main">
               <a:ext uri="{FF2B5EF4-FFF2-40B4-BE49-F238E27FC236}">
-                <a16:creationId xmlns:a16="http://schemas.microsoft.com/office/drawing/2014/main" id="{12CE40CB-B881-491F-A379-C50AFE401A4A}"/>
-              </a:ext>
-            </a:extLst>
-          </p:cNvPr>
-          <p:cNvSpPr>
-            <a:spLocks xmlns:a="http://schemas.openxmlformats.org/drawingml/2006/main" noGrp="1"/>
-          </p:cNvSpPr>
-          <p:nvPr/>
-        </p:nvSpPr>
-        <p:spPr>
-          <a:xfrm xmlns:a="http://schemas.openxmlformats.org/drawingml/2006/main">
-            <a:off x="3257550" y="1219200"/>
-            <a:ext cx="2057400" cy="228600"/>
-          </a:xfrm>
-          <a:prstGeom xmlns:a="http://schemas.openxmlformats.org/drawingml/2006/main" prst="rect">
-            <a:avLst/>
-          </a:prstGeom>
-        </p:spPr>
-        <p:txBody>
-          <a:bodyPr xmlns:a="http://schemas.openxmlformats.org/drawingml/2006/main" lIns="0" tIns="0" rIns="0" bIns="0" anchor="t">
-            <a:normAutofit fontScale="100000"/>
+                <a16:creationId xmlns:a16="http://schemas.microsoft.com/office/drawing/2014/main" id="{D5A96F78-460A-4B55-88FA-460C58C67852}"/>
+              </a:ext>
+            </a:extLst>
+          </p:cNvPr>
+          <p:cNvSpPr>
+            <a:spLocks xmlns:a="http://schemas.openxmlformats.org/drawingml/2006/main" noGrp="1"/>
+          </p:cNvSpPr>
+          <p:nvPr/>
+        </p:nvSpPr>
+        <p:spPr>
+          <a:xfrm xmlns:a="http://schemas.openxmlformats.org/drawingml/2006/main">
+            <a:off x="2857500" y="1219200"/>
+            <a:ext cx="1866900" cy="228600"/>
+          </a:xfrm>
+          <a:prstGeom xmlns:a="http://schemas.openxmlformats.org/drawingml/2006/main" prst="rect">
+            <a:avLst/>
+          </a:prstGeom>
+        </p:spPr>
+        <p:txBody>
+          <a:bodyPr xmlns:a="http://schemas.openxmlformats.org/drawingml/2006/main" lIns="0" tIns="0" rIns="0" bIns="0" anchor="t">
+            <a:normAutofit fontScale="90909"/>
           </a:bodyPr>
           <a:lstStyle xmlns:a="http://schemas.openxmlformats.org/drawingml/2006/main"/>
           <a:p xmlns:a="http://schemas.openxmlformats.org/drawingml/2006/main">
             <a:pPr algn="ctr">
-              <a:defRPr sz="1200" b="1">
+              <a:defRPr sz="1650" b="1">
                 <a:solidFill>
                   <a:srgbClr val="0B0D12"/>
                 </a:solidFill>
@@ -3862,7 +3864,7 @@
               </a:defRPr>
             </a:pPr>
             <a:r>
-              <a:t>one terminating LF</a:t>
+              <a:t>one LF terminator</a:t>
             </a:r>
           </a:p>
         </p:txBody>
@@ -3872,19 +3874,19 @@
           <p:cNvPr id="7" name="Shape-59">
             <a:extLst xmlns:a="http://schemas.openxmlformats.org/drawingml/2006/main">
               <a:ext uri="{FF2B5EF4-FFF2-40B4-BE49-F238E27FC236}">
-                <a16:creationId xmlns:a16="http://schemas.microsoft.com/office/drawing/2014/main" id="{CA720B2A-7B98-4C0A-B3DF-D168C46AC779}"/>
-              </a:ext>
-            </a:extLst>
-          </p:cNvPr>
-          <p:cNvSpPr>
-            <a:spLocks xmlns:a="http://schemas.openxmlformats.org/drawingml/2006/main" noGrp="1"/>
-          </p:cNvSpPr>
-          <p:nvPr/>
-        </p:nvSpPr>
-        <p:spPr>
-          <a:xfrm xmlns:a="http://schemas.openxmlformats.org/drawingml/2006/main">
-            <a:off x="5734050" y="1143000"/>
-            <a:ext cx="2286000" cy="342900"/>
+                <a16:creationId xmlns:a16="http://schemas.microsoft.com/office/drawing/2014/main" id="{E3D337FA-698F-4D87-8113-21D0F502D77C}"/>
+              </a:ext>
+            </a:extLst>
+          </p:cNvPr>
+          <p:cNvSpPr>
+            <a:spLocks xmlns:a="http://schemas.openxmlformats.org/drawingml/2006/main" noGrp="1"/>
+          </p:cNvSpPr>
+          <p:nvPr/>
+        </p:nvSpPr>
+        <p:spPr>
+          <a:xfrm xmlns:a="http://schemas.openxmlformats.org/drawingml/2006/main">
+            <a:off x="5029200" y="1143000"/>
+            <a:ext cx="3143250" cy="342900"/>
           </a:xfrm>
           <a:prstGeom xmlns:a="http://schemas.openxmlformats.org/drawingml/2006/main" prst="roundRect">
             <a:avLst>
@@ -3901,32 +3903,32 @@
           <p:cNvPr id="8" name="Text-60">
             <a:extLst xmlns:a="http://schemas.openxmlformats.org/drawingml/2006/main">
               <a:ext uri="{FF2B5EF4-FFF2-40B4-BE49-F238E27FC236}">
-                <a16:creationId xmlns:a16="http://schemas.microsoft.com/office/drawing/2014/main" id="{3AEFCAD2-88E2-469C-8A16-8308A10B6910}"/>
-              </a:ext>
-            </a:extLst>
-          </p:cNvPr>
-          <p:cNvSpPr>
-            <a:spLocks xmlns:a="http://schemas.openxmlformats.org/drawingml/2006/main" noGrp="1"/>
-          </p:cNvSpPr>
-          <p:nvPr/>
-        </p:nvSpPr>
-        <p:spPr>
-          <a:xfrm xmlns:a="http://schemas.openxmlformats.org/drawingml/2006/main">
-            <a:off x="5848350" y="1219200"/>
-            <a:ext cx="2057400" cy="228600"/>
-          </a:xfrm>
-          <a:prstGeom xmlns:a="http://schemas.openxmlformats.org/drawingml/2006/main" prst="rect">
-            <a:avLst/>
-          </a:prstGeom>
-        </p:spPr>
-        <p:txBody>
-          <a:bodyPr xmlns:a="http://schemas.openxmlformats.org/drawingml/2006/main" lIns="0" tIns="0" rIns="0" bIns="0" anchor="t">
-            <a:normAutofit fontScale="100000"/>
+                <a16:creationId xmlns:a16="http://schemas.microsoft.com/office/drawing/2014/main" id="{75798BAF-C1FB-4F39-A9CA-25ACBFD5DE20}"/>
+              </a:ext>
+            </a:extLst>
+          </p:cNvPr>
+          <p:cNvSpPr>
+            <a:spLocks xmlns:a="http://schemas.openxmlformats.org/drawingml/2006/main" noGrp="1"/>
+          </p:cNvSpPr>
+          <p:nvPr/>
+        </p:nvSpPr>
+        <p:spPr>
+          <a:xfrm xmlns:a="http://schemas.openxmlformats.org/drawingml/2006/main">
+            <a:off x="5143500" y="1219200"/>
+            <a:ext cx="2914650" cy="228600"/>
+          </a:xfrm>
+          <a:prstGeom xmlns:a="http://schemas.openxmlformats.org/drawingml/2006/main" prst="rect">
+            <a:avLst/>
+          </a:prstGeom>
+        </p:spPr>
+        <p:txBody>
+          <a:bodyPr xmlns:a="http://schemas.openxmlformats.org/drawingml/2006/main" lIns="0" tIns="0" rIns="0" bIns="0" anchor="t">
+            <a:normAutofit fontScale="90909"/>
           </a:bodyPr>
           <a:lstStyle xmlns:a="http://schemas.openxmlformats.org/drawingml/2006/main"/>
           <a:p xmlns:a="http://schemas.openxmlformats.org/drawingml/2006/main">
             <a:pPr algn="ctr">
-              <a:defRPr sz="1200" b="1">
+              <a:defRPr sz="1650" b="1">
                 <a:solidFill>
                   <a:srgbClr val="0B0D12"/>
                 </a:solidFill>
@@ -3936,7 +3938,7 @@
               </a:defRPr>
             </a:pPr>
             <a:r>
-              <a:t>≤ 64 KiB before LF</a:t>
+              <a:t>&gt;64 KiB → line_too_long</a:t>
             </a:r>
           </a:p>
         </p:txBody>
@@ -3946,19 +3948,19 @@
           <p:cNvPr id="9" name="Shape-61">
             <a:extLst xmlns:a="http://schemas.openxmlformats.org/drawingml/2006/main">
               <a:ext uri="{FF2B5EF4-FFF2-40B4-BE49-F238E27FC236}">
-                <a16:creationId xmlns:a16="http://schemas.microsoft.com/office/drawing/2014/main" id="{4D119981-D985-4805-8B9D-7455837ECADA}"/>
-              </a:ext>
-            </a:extLst>
-          </p:cNvPr>
-          <p:cNvSpPr>
-            <a:spLocks xmlns:a="http://schemas.openxmlformats.org/drawingml/2006/main" noGrp="1"/>
-          </p:cNvSpPr>
-          <p:nvPr/>
-        </p:nvSpPr>
-        <p:spPr>
-          <a:xfrm xmlns:a="http://schemas.openxmlformats.org/drawingml/2006/main">
-            <a:off x="8324850" y="1143000"/>
-            <a:ext cx="2286000" cy="342900"/>
+                <a16:creationId xmlns:a16="http://schemas.microsoft.com/office/drawing/2014/main" id="{886A5A6B-825A-4493-BA9F-615FD095F233}"/>
+              </a:ext>
+            </a:extLst>
+          </p:cNvPr>
+          <p:cNvSpPr>
+            <a:spLocks xmlns:a="http://schemas.openxmlformats.org/drawingml/2006/main" noGrp="1"/>
+          </p:cNvSpPr>
+          <p:nvPr/>
+        </p:nvSpPr>
+        <p:spPr>
+          <a:xfrm xmlns:a="http://schemas.openxmlformats.org/drawingml/2006/main">
+            <a:off x="8362950" y="1143000"/>
+            <a:ext cx="2190750" cy="342900"/>
           </a:xfrm>
           <a:prstGeom xmlns:a="http://schemas.openxmlformats.org/drawingml/2006/main" prst="roundRect">
             <a:avLst>
@@ -3975,32 +3977,32 @@
           <p:cNvPr id="10" name="Text-62">
             <a:extLst xmlns:a="http://schemas.openxmlformats.org/drawingml/2006/main">
               <a:ext uri="{FF2B5EF4-FFF2-40B4-BE49-F238E27FC236}">
-                <a16:creationId xmlns:a16="http://schemas.microsoft.com/office/drawing/2014/main" id="{99022F50-C277-47DF-9DFF-8FD5FACA0D03}"/>
-              </a:ext>
-            </a:extLst>
-          </p:cNvPr>
-          <p:cNvSpPr>
-            <a:spLocks xmlns:a="http://schemas.openxmlformats.org/drawingml/2006/main" noGrp="1"/>
-          </p:cNvSpPr>
-          <p:nvPr/>
-        </p:nvSpPr>
-        <p:spPr>
-          <a:xfrm xmlns:a="http://schemas.openxmlformats.org/drawingml/2006/main">
-            <a:off x="8439150" y="1219200"/>
-            <a:ext cx="2057400" cy="228600"/>
-          </a:xfrm>
-          <a:prstGeom xmlns:a="http://schemas.openxmlformats.org/drawingml/2006/main" prst="rect">
-            <a:avLst/>
-          </a:prstGeom>
-        </p:spPr>
-        <p:txBody>
-          <a:bodyPr xmlns:a="http://schemas.openxmlformats.org/drawingml/2006/main" lIns="0" tIns="0" rIns="0" bIns="0" anchor="t">
-            <a:normAutofit fontScale="100000"/>
+                <a16:creationId xmlns:a16="http://schemas.microsoft.com/office/drawing/2014/main" id="{2F39C13E-D7B4-4BBF-9320-33E6E563935E}"/>
+              </a:ext>
+            </a:extLst>
+          </p:cNvPr>
+          <p:cNvSpPr>
+            <a:spLocks xmlns:a="http://schemas.openxmlformats.org/drawingml/2006/main" noGrp="1"/>
+          </p:cNvSpPr>
+          <p:nvPr/>
+        </p:nvSpPr>
+        <p:spPr>
+          <a:xfrm xmlns:a="http://schemas.openxmlformats.org/drawingml/2006/main">
+            <a:off x="8477250" y="1219200"/>
+            <a:ext cx="1962150" cy="228600"/>
+          </a:xfrm>
+          <a:prstGeom xmlns:a="http://schemas.openxmlformats.org/drawingml/2006/main" prst="rect">
+            <a:avLst/>
+          </a:prstGeom>
+        </p:spPr>
+        <p:txBody>
+          <a:bodyPr xmlns:a="http://schemas.openxmlformats.org/drawingml/2006/main" lIns="0" tIns="0" rIns="0" bIns="0" anchor="t">
+            <a:normAutofit fontScale="90909"/>
           </a:bodyPr>
           <a:lstStyle xmlns:a="http://schemas.openxmlformats.org/drawingml/2006/main"/>
           <a:p xmlns:a="http://schemas.openxmlformats.org/drawingml/2006/main">
             <a:pPr algn="ctr">
-              <a:defRPr sz="1200" b="1">
+              <a:defRPr sz="1650" b="1">
                 <a:solidFill>
                   <a:srgbClr val="0B0D12"/>
                 </a:solidFill>
@@ -4017,7 +4019,7 @@
       </p:sp>
       <p:cxnSp>
         <p:nvCxnSpPr>
-          <p:cNvPr id="58" name="Rule-63"/>
+          <p:cNvPr id="59" name="Rule-63"/>
           <p:cNvCxnSpPr/>
           <p:nvPr/>
         </p:nvCxnSpPr>
@@ -4042,7 +4044,7 @@
           <p:cNvPr id="12" name="Shape-64">
             <a:extLst xmlns:a="http://schemas.openxmlformats.org/drawingml/2006/main">
               <a:ext uri="{FF2B5EF4-FFF2-40B4-BE49-F238E27FC236}">
-                <a16:creationId xmlns:a16="http://schemas.microsoft.com/office/drawing/2014/main" id="{02D3AECE-B35E-4E3F-AF86-D17E676BCFE9}"/>
+                <a16:creationId xmlns:a16="http://schemas.microsoft.com/office/drawing/2014/main" id="{79ED5773-8A2B-4EE4-A4E3-3B2CA8173F0F}"/>
               </a:ext>
             </a:extLst>
           </p:cNvPr>
@@ -4069,7 +4071,7 @@
           <p:cNvPr id="13" name="Text-65">
             <a:extLst xmlns:a="http://schemas.openxmlformats.org/drawingml/2006/main">
               <a:ext uri="{FF2B5EF4-FFF2-40B4-BE49-F238E27FC236}">
-                <a16:creationId xmlns:a16="http://schemas.microsoft.com/office/drawing/2014/main" id="{13B79EB9-60A9-4B67-AE73-69826033754E}"/>
+                <a16:creationId xmlns:a16="http://schemas.microsoft.com/office/drawing/2014/main" id="{C2284D58-E43A-4624-9F76-021CF9EB92F0}"/>
               </a:ext>
             </a:extLst>
           </p:cNvPr>
@@ -4089,12 +4091,12 @@
         </p:spPr>
         <p:txBody>
           <a:bodyPr xmlns:a="http://schemas.openxmlformats.org/drawingml/2006/main" lIns="0" tIns="0" rIns="0" bIns="0" anchor="t">
-            <a:normAutofit fontScale="100000"/>
+            <a:normAutofit fontScale="98485"/>
           </a:bodyPr>
           <a:lstStyle xmlns:a="http://schemas.openxmlformats.org/drawingml/2006/main"/>
           <a:p xmlns:a="http://schemas.openxmlformats.org/drawingml/2006/main">
             <a:pPr algn="l">
-              <a:defRPr sz="1050" b="1">
+              <a:defRPr sz="1650" b="1">
                 <a:solidFill>
                   <a:srgbClr val="1F5EFF"/>
                 </a:solidFill>
@@ -4114,7 +4116,7 @@
           <p:cNvPr id="14" name="Text-66">
             <a:extLst xmlns:a="http://schemas.openxmlformats.org/drawingml/2006/main">
               <a:ext uri="{FF2B5EF4-FFF2-40B4-BE49-F238E27FC236}">
-                <a16:creationId xmlns:a16="http://schemas.microsoft.com/office/drawing/2014/main" id="{26846FD0-661E-483A-B9C3-4E78CFF4BCB0}"/>
+                <a16:creationId xmlns:a16="http://schemas.microsoft.com/office/drawing/2014/main" id="{4D6C801A-D7AA-469A-BAE5-88C639E5551B}"/>
               </a:ext>
             </a:extLst>
           </p:cNvPr>
@@ -4159,23 +4161,23 @@
           <p:cNvPr id="15" name="Shape-67">
             <a:extLst xmlns:a="http://schemas.openxmlformats.org/drawingml/2006/main">
               <a:ext uri="{FF2B5EF4-FFF2-40B4-BE49-F238E27FC236}">
-                <a16:creationId xmlns:a16="http://schemas.microsoft.com/office/drawing/2014/main" id="{9031F7DE-52B4-46C3-9F67-5DFE081ED921}"/>
-              </a:ext>
-            </a:extLst>
-          </p:cNvPr>
-          <p:cNvSpPr>
-            <a:spLocks xmlns:a="http://schemas.openxmlformats.org/drawingml/2006/main" noGrp="1"/>
-          </p:cNvSpPr>
-          <p:nvPr/>
-        </p:nvSpPr>
-        <p:spPr>
-          <a:xfrm xmlns:a="http://schemas.openxmlformats.org/drawingml/2006/main">
-            <a:off x="457200" y="3200400"/>
-            <a:ext cx="1714500" cy="342900"/>
+                <a16:creationId xmlns:a16="http://schemas.microsoft.com/office/drawing/2014/main" id="{3AB11B23-2D6B-4300-9660-13A187B88691}"/>
+              </a:ext>
+            </a:extLst>
+          </p:cNvPr>
+          <p:cNvSpPr>
+            <a:spLocks xmlns:a="http://schemas.openxmlformats.org/drawingml/2006/main" noGrp="1"/>
+          </p:cNvSpPr>
+          <p:nvPr/>
+        </p:nvSpPr>
+        <p:spPr>
+          <a:xfrm xmlns:a="http://schemas.openxmlformats.org/drawingml/2006/main">
+            <a:off x="457200" y="3124200"/>
+            <a:ext cx="1714500" cy="609600"/>
           </a:xfrm>
           <a:prstGeom xmlns:a="http://schemas.openxmlformats.org/drawingml/2006/main" prst="roundRect">
             <a:avLst>
-              <a:gd name="adj" fmla="val 22222"/>
+              <a:gd name="adj" fmla="val 12500"/>
             </a:avLst>
           </a:prstGeom>
           <a:solidFill xmlns:a="http://schemas.openxmlformats.org/drawingml/2006/main">
@@ -4188,32 +4190,32 @@
           <p:cNvPr id="16" name="Text-68">
             <a:extLst xmlns:a="http://schemas.openxmlformats.org/drawingml/2006/main">
               <a:ext uri="{FF2B5EF4-FFF2-40B4-BE49-F238E27FC236}">
-                <a16:creationId xmlns:a16="http://schemas.microsoft.com/office/drawing/2014/main" id="{2AECB906-191A-4CD1-BEEC-8FBA74E4FA52}"/>
-              </a:ext>
-            </a:extLst>
-          </p:cNvPr>
-          <p:cNvSpPr>
-            <a:spLocks xmlns:a="http://schemas.openxmlformats.org/drawingml/2006/main" noGrp="1"/>
-          </p:cNvSpPr>
-          <p:nvPr/>
-        </p:nvSpPr>
-        <p:spPr>
-          <a:xfrm xmlns:a="http://schemas.openxmlformats.org/drawingml/2006/main">
-            <a:off x="571500" y="3276600"/>
-            <a:ext cx="1485900" cy="228600"/>
-          </a:xfrm>
-          <a:prstGeom xmlns:a="http://schemas.openxmlformats.org/drawingml/2006/main" prst="rect">
-            <a:avLst/>
-          </a:prstGeom>
-        </p:spPr>
-        <p:txBody>
-          <a:bodyPr xmlns:a="http://schemas.openxmlformats.org/drawingml/2006/main" lIns="0" tIns="0" rIns="0" bIns="0" anchor="t">
-            <a:normAutofit fontScale="100000"/>
+                <a16:creationId xmlns:a16="http://schemas.microsoft.com/office/drawing/2014/main" id="{D0EBA2C7-615D-41CE-8E9E-720817C65809}"/>
+              </a:ext>
+            </a:extLst>
+          </p:cNvPr>
+          <p:cNvSpPr>
+            <a:spLocks xmlns:a="http://schemas.openxmlformats.org/drawingml/2006/main" noGrp="1"/>
+          </p:cNvSpPr>
+          <p:nvPr/>
+        </p:nvSpPr>
+        <p:spPr>
+          <a:xfrm xmlns:a="http://schemas.openxmlformats.org/drawingml/2006/main">
+            <a:off x="495300" y="3200400"/>
+            <a:ext cx="1638300" cy="495300"/>
+          </a:xfrm>
+          <a:prstGeom xmlns:a="http://schemas.openxmlformats.org/drawingml/2006/main" prst="rect">
+            <a:avLst/>
+          </a:prstGeom>
+        </p:spPr>
+        <p:txBody>
+          <a:bodyPr xmlns:a="http://schemas.openxmlformats.org/drawingml/2006/main" lIns="0" tIns="0" rIns="0" bIns="0" anchor="t">
+            <a:normAutofit fontScale="98485"/>
           </a:bodyPr>
           <a:lstStyle xmlns:a="http://schemas.openxmlformats.org/drawingml/2006/main"/>
           <a:p xmlns:a="http://schemas.openxmlformats.org/drawingml/2006/main">
             <a:pPr algn="ctr">
-              <a:defRPr sz="975" b="1">
+              <a:defRPr sz="1650" b="1">
                 <a:solidFill>
                   <a:srgbClr val="C33A32"/>
                 </a:solidFill>
@@ -4223,7 +4225,8 @@
               </a:defRPr>
             </a:pPr>
             <a:r>
-              <a:t>frame_too_large</a:t>
+              <a:t>invalid_
+framing</a:t>
             </a:r>
           </a:p>
         </p:txBody>
@@ -4233,7 +4236,7 @@
           <p:cNvPr id="17" name="Shape-69">
             <a:extLst xmlns:a="http://schemas.openxmlformats.org/drawingml/2006/main">
               <a:ext uri="{FF2B5EF4-FFF2-40B4-BE49-F238E27FC236}">
-                <a16:creationId xmlns:a16="http://schemas.microsoft.com/office/drawing/2014/main" id="{E8564652-6941-418E-A954-B43DC5364556}"/>
+                <a16:creationId xmlns:a16="http://schemas.microsoft.com/office/drawing/2014/main" id="{C4EC9C7B-2646-432C-9EAC-460C385A4412}"/>
               </a:ext>
             </a:extLst>
           </p:cNvPr>
@@ -4260,7 +4263,7 @@
           <p:cNvPr id="18" name="Text-70">
             <a:extLst xmlns:a="http://schemas.openxmlformats.org/drawingml/2006/main">
               <a:ext uri="{FF2B5EF4-FFF2-40B4-BE49-F238E27FC236}">
-                <a16:creationId xmlns:a16="http://schemas.microsoft.com/office/drawing/2014/main" id="{DE5931C8-E8F2-4133-8C7E-D87831E3C75F}"/>
+                <a16:creationId xmlns:a16="http://schemas.microsoft.com/office/drawing/2014/main" id="{C138ECCF-3341-4FFA-A981-4E61F5850DFC}"/>
               </a:ext>
             </a:extLst>
           </p:cNvPr>
@@ -4280,12 +4283,12 @@
         </p:spPr>
         <p:txBody>
           <a:bodyPr xmlns:a="http://schemas.openxmlformats.org/drawingml/2006/main" lIns="0" tIns="0" rIns="0" bIns="0" anchor="t">
-            <a:normAutofit fontScale="100000"/>
+            <a:normAutofit fontScale="98485"/>
           </a:bodyPr>
           <a:lstStyle xmlns:a="http://schemas.openxmlformats.org/drawingml/2006/main"/>
           <a:p xmlns:a="http://schemas.openxmlformats.org/drawingml/2006/main">
             <a:pPr algn="l">
-              <a:defRPr sz="1050" b="1">
+              <a:defRPr sz="1650" b="1">
                 <a:solidFill>
                   <a:srgbClr val="1F5EFF"/>
                 </a:solidFill>
@@ -4305,7 +4308,7 @@
           <p:cNvPr id="19" name="Text-71">
             <a:extLst xmlns:a="http://schemas.openxmlformats.org/drawingml/2006/main">
               <a:ext uri="{FF2B5EF4-FFF2-40B4-BE49-F238E27FC236}">
-                <a16:creationId xmlns:a16="http://schemas.microsoft.com/office/drawing/2014/main" id="{DDADCA4D-A3B2-4CA3-AD22-8B262564DECE}"/>
+                <a16:creationId xmlns:a16="http://schemas.microsoft.com/office/drawing/2014/main" id="{C3BAEF76-40E1-4F65-A762-12F203D46E64}"/>
               </a:ext>
             </a:extLst>
           </p:cNvPr>
@@ -4350,23 +4353,23 @@
           <p:cNvPr id="20" name="Shape-72">
             <a:extLst xmlns:a="http://schemas.openxmlformats.org/drawingml/2006/main">
               <a:ext uri="{FF2B5EF4-FFF2-40B4-BE49-F238E27FC236}">
-                <a16:creationId xmlns:a16="http://schemas.microsoft.com/office/drawing/2014/main" id="{88B1B072-0AF0-44DB-89DA-9AD400046FDF}"/>
-              </a:ext>
-            </a:extLst>
-          </p:cNvPr>
-          <p:cNvSpPr>
-            <a:spLocks xmlns:a="http://schemas.openxmlformats.org/drawingml/2006/main" noGrp="1"/>
-          </p:cNvSpPr>
-          <p:nvPr/>
-        </p:nvSpPr>
-        <p:spPr>
-          <a:xfrm xmlns:a="http://schemas.openxmlformats.org/drawingml/2006/main">
-            <a:off x="2371725" y="3200400"/>
-            <a:ext cx="1714500" cy="342900"/>
+                <a16:creationId xmlns:a16="http://schemas.microsoft.com/office/drawing/2014/main" id="{B190DC2E-D854-4069-8F8D-0EB40F0CD7B9}"/>
+              </a:ext>
+            </a:extLst>
+          </p:cNvPr>
+          <p:cNvSpPr>
+            <a:spLocks xmlns:a="http://schemas.openxmlformats.org/drawingml/2006/main" noGrp="1"/>
+          </p:cNvSpPr>
+          <p:nvPr/>
+        </p:nvSpPr>
+        <p:spPr>
+          <a:xfrm xmlns:a="http://schemas.openxmlformats.org/drawingml/2006/main">
+            <a:off x="2371725" y="3124200"/>
+            <a:ext cx="1714500" cy="609600"/>
           </a:xfrm>
           <a:prstGeom xmlns:a="http://schemas.openxmlformats.org/drawingml/2006/main" prst="roundRect">
             <a:avLst>
-              <a:gd name="adj" fmla="val 22222"/>
+              <a:gd name="adj" fmla="val 12500"/>
             </a:avLst>
           </a:prstGeom>
           <a:solidFill xmlns:a="http://schemas.openxmlformats.org/drawingml/2006/main">
@@ -4379,19 +4382,19 @@
           <p:cNvPr id="21" name="Text-73">
             <a:extLst xmlns:a="http://schemas.openxmlformats.org/drawingml/2006/main">
               <a:ext uri="{FF2B5EF4-FFF2-40B4-BE49-F238E27FC236}">
-                <a16:creationId xmlns:a16="http://schemas.microsoft.com/office/drawing/2014/main" id="{CFBF3D4B-2C45-473F-AAC1-45D55E161376}"/>
-              </a:ext>
-            </a:extLst>
-          </p:cNvPr>
-          <p:cNvSpPr>
-            <a:spLocks xmlns:a="http://schemas.openxmlformats.org/drawingml/2006/main" noGrp="1"/>
-          </p:cNvSpPr>
-          <p:nvPr/>
-        </p:nvSpPr>
-        <p:spPr>
-          <a:xfrm xmlns:a="http://schemas.openxmlformats.org/drawingml/2006/main">
-            <a:off x="2486025" y="3276600"/>
-            <a:ext cx="1485900" cy="228600"/>
+                <a16:creationId xmlns:a16="http://schemas.microsoft.com/office/drawing/2014/main" id="{479623D9-1109-44DB-8D17-957295B47B6A}"/>
+              </a:ext>
+            </a:extLst>
+          </p:cNvPr>
+          <p:cNvSpPr>
+            <a:spLocks xmlns:a="http://schemas.openxmlformats.org/drawingml/2006/main" noGrp="1"/>
+          </p:cNvSpPr>
+          <p:nvPr/>
+        </p:nvSpPr>
+        <p:spPr>
+          <a:xfrm xmlns:a="http://schemas.openxmlformats.org/drawingml/2006/main">
+            <a:off x="2409825" y="3200400"/>
+            <a:ext cx="1638300" cy="495300"/>
           </a:xfrm>
           <a:prstGeom xmlns:a="http://schemas.openxmlformats.org/drawingml/2006/main" prst="rect">
             <a:avLst/>
@@ -4404,7 +4407,7 @@
           <a:lstStyle xmlns:a="http://schemas.openxmlformats.org/drawingml/2006/main"/>
           <a:p xmlns:a="http://schemas.openxmlformats.org/drawingml/2006/main">
             <a:pPr algn="ctr">
-              <a:defRPr sz="975" b="1">
+              <a:defRPr sz="1650" b="1">
                 <a:solidFill>
                   <a:srgbClr val="C33A32"/>
                 </a:solidFill>
@@ -4424,7 +4427,7 @@
           <p:cNvPr id="22" name="Shape-74">
             <a:extLst xmlns:a="http://schemas.openxmlformats.org/drawingml/2006/main">
               <a:ext uri="{FF2B5EF4-FFF2-40B4-BE49-F238E27FC236}">
-                <a16:creationId xmlns:a16="http://schemas.microsoft.com/office/drawing/2014/main" id="{09675C03-8A39-486F-AEA2-EE17811364F0}"/>
+                <a16:creationId xmlns:a16="http://schemas.microsoft.com/office/drawing/2014/main" id="{0A4C023A-9613-4B78-93DE-CC7C0FD232C3}"/>
               </a:ext>
             </a:extLst>
           </p:cNvPr>
@@ -4451,7 +4454,7 @@
           <p:cNvPr id="23" name="Text-75">
             <a:extLst xmlns:a="http://schemas.openxmlformats.org/drawingml/2006/main">
               <a:ext uri="{FF2B5EF4-FFF2-40B4-BE49-F238E27FC236}">
-                <a16:creationId xmlns:a16="http://schemas.microsoft.com/office/drawing/2014/main" id="{2D5DF4C8-F9A2-401F-AC3E-7F6F94D5FF8C}"/>
+                <a16:creationId xmlns:a16="http://schemas.microsoft.com/office/drawing/2014/main" id="{E3B6AB3A-72A5-4BFA-904F-86AF2BBF4A5D}"/>
               </a:ext>
             </a:extLst>
           </p:cNvPr>
@@ -4471,12 +4474,12 @@
         </p:spPr>
         <p:txBody>
           <a:bodyPr xmlns:a="http://schemas.openxmlformats.org/drawingml/2006/main" lIns="0" tIns="0" rIns="0" bIns="0" anchor="t">
-            <a:normAutofit fontScale="100000"/>
+            <a:normAutofit fontScale="98485"/>
           </a:bodyPr>
           <a:lstStyle xmlns:a="http://schemas.openxmlformats.org/drawingml/2006/main"/>
           <a:p xmlns:a="http://schemas.openxmlformats.org/drawingml/2006/main">
             <a:pPr algn="l">
-              <a:defRPr sz="1050" b="1">
+              <a:defRPr sz="1650" b="1">
                 <a:solidFill>
                   <a:srgbClr val="1F5EFF"/>
                 </a:solidFill>
@@ -4496,7 +4499,7 @@
           <p:cNvPr id="24" name="Text-76">
             <a:extLst xmlns:a="http://schemas.openxmlformats.org/drawingml/2006/main">
               <a:ext uri="{FF2B5EF4-FFF2-40B4-BE49-F238E27FC236}">
-                <a16:creationId xmlns:a16="http://schemas.microsoft.com/office/drawing/2014/main" id="{589C0FA4-3557-4C6B-93C6-58008AAE9F5A}"/>
+                <a16:creationId xmlns:a16="http://schemas.microsoft.com/office/drawing/2014/main" id="{E8DE0D20-218C-4C22-9880-85678467895B}"/>
               </a:ext>
             </a:extLst>
           </p:cNvPr>
@@ -4541,23 +4544,23 @@
           <p:cNvPr id="25" name="Shape-77">
             <a:extLst xmlns:a="http://schemas.openxmlformats.org/drawingml/2006/main">
               <a:ext uri="{FF2B5EF4-FFF2-40B4-BE49-F238E27FC236}">
-                <a16:creationId xmlns:a16="http://schemas.microsoft.com/office/drawing/2014/main" id="{8ABA946D-F9EB-47EE-9C79-EB7ED5462148}"/>
-              </a:ext>
-            </a:extLst>
-          </p:cNvPr>
-          <p:cNvSpPr>
-            <a:spLocks xmlns:a="http://schemas.openxmlformats.org/drawingml/2006/main" noGrp="1"/>
-          </p:cNvSpPr>
-          <p:nvPr/>
-        </p:nvSpPr>
-        <p:spPr>
-          <a:xfrm xmlns:a="http://schemas.openxmlformats.org/drawingml/2006/main">
-            <a:off x="4286250" y="3200400"/>
-            <a:ext cx="1714500" cy="342900"/>
+                <a16:creationId xmlns:a16="http://schemas.microsoft.com/office/drawing/2014/main" id="{187618DA-8E3F-4CF1-8600-EEF5F24E4E74}"/>
+              </a:ext>
+            </a:extLst>
+          </p:cNvPr>
+          <p:cNvSpPr>
+            <a:spLocks xmlns:a="http://schemas.openxmlformats.org/drawingml/2006/main" noGrp="1"/>
+          </p:cNvSpPr>
+          <p:nvPr/>
+        </p:nvSpPr>
+        <p:spPr>
+          <a:xfrm xmlns:a="http://schemas.openxmlformats.org/drawingml/2006/main">
+            <a:off x="4286250" y="3124200"/>
+            <a:ext cx="1714500" cy="609600"/>
           </a:xfrm>
           <a:prstGeom xmlns:a="http://schemas.openxmlformats.org/drawingml/2006/main" prst="roundRect">
             <a:avLst>
-              <a:gd name="adj" fmla="val 22222"/>
+              <a:gd name="adj" fmla="val 12500"/>
             </a:avLst>
           </a:prstGeom>
           <a:solidFill xmlns:a="http://schemas.openxmlformats.org/drawingml/2006/main">
@@ -4570,32 +4573,32 @@
           <p:cNvPr id="26" name="Text-78">
             <a:extLst xmlns:a="http://schemas.openxmlformats.org/drawingml/2006/main">
               <a:ext uri="{FF2B5EF4-FFF2-40B4-BE49-F238E27FC236}">
-                <a16:creationId xmlns:a16="http://schemas.microsoft.com/office/drawing/2014/main" id="{CC2F9659-B364-43DD-87F7-E06D055DF526}"/>
-              </a:ext>
-            </a:extLst>
-          </p:cNvPr>
-          <p:cNvSpPr>
-            <a:spLocks xmlns:a="http://schemas.openxmlformats.org/drawingml/2006/main" noGrp="1"/>
-          </p:cNvSpPr>
-          <p:nvPr/>
-        </p:nvSpPr>
-        <p:spPr>
-          <a:xfrm xmlns:a="http://schemas.openxmlformats.org/drawingml/2006/main">
-            <a:off x="4400550" y="3276600"/>
-            <a:ext cx="1485900" cy="228600"/>
-          </a:xfrm>
-          <a:prstGeom xmlns:a="http://schemas.openxmlformats.org/drawingml/2006/main" prst="rect">
-            <a:avLst/>
-          </a:prstGeom>
-        </p:spPr>
-        <p:txBody>
-          <a:bodyPr xmlns:a="http://schemas.openxmlformats.org/drawingml/2006/main" lIns="0" tIns="0" rIns="0" bIns="0" anchor="t">
-            <a:normAutofit fontScale="100000"/>
+                <a16:creationId xmlns:a16="http://schemas.microsoft.com/office/drawing/2014/main" id="{ACADED79-711F-4C57-AE77-49FB0F0BC6C8}"/>
+              </a:ext>
+            </a:extLst>
+          </p:cNvPr>
+          <p:cNvSpPr>
+            <a:spLocks xmlns:a="http://schemas.openxmlformats.org/drawingml/2006/main" noGrp="1"/>
+          </p:cNvSpPr>
+          <p:nvPr/>
+        </p:nvSpPr>
+        <p:spPr>
+          <a:xfrm xmlns:a="http://schemas.openxmlformats.org/drawingml/2006/main">
+            <a:off x="4324350" y="3200400"/>
+            <a:ext cx="1638300" cy="495300"/>
+          </a:xfrm>
+          <a:prstGeom xmlns:a="http://schemas.openxmlformats.org/drawingml/2006/main" prst="rect">
+            <a:avLst/>
+          </a:prstGeom>
+        </p:spPr>
+        <p:txBody>
+          <a:bodyPr xmlns:a="http://schemas.openxmlformats.org/drawingml/2006/main" lIns="0" tIns="0" rIns="0" bIns="0" anchor="t">
+            <a:normAutofit fontScale="98485"/>
           </a:bodyPr>
           <a:lstStyle xmlns:a="http://schemas.openxmlformats.org/drawingml/2006/main"/>
           <a:p xmlns:a="http://schemas.openxmlformats.org/drawingml/2006/main">
             <a:pPr algn="ctr">
-              <a:defRPr sz="975" b="1">
+              <a:defRPr sz="1650" b="1">
                 <a:solidFill>
                   <a:srgbClr val="C33A32"/>
                 </a:solidFill>
@@ -4605,7 +4608,8 @@
               </a:defRPr>
             </a:pPr>
             <a:r>
-              <a:t>malformed_json</a:t>
+              <a:t>malformed_
+json</a:t>
             </a:r>
           </a:p>
         </p:txBody>
@@ -4615,7 +4619,7 @@
           <p:cNvPr id="27" name="Shape-79">
             <a:extLst xmlns:a="http://schemas.openxmlformats.org/drawingml/2006/main">
               <a:ext uri="{FF2B5EF4-FFF2-40B4-BE49-F238E27FC236}">
-                <a16:creationId xmlns:a16="http://schemas.microsoft.com/office/drawing/2014/main" id="{C413791B-D6E4-40FB-9DE9-468057ACDE91}"/>
+                <a16:creationId xmlns:a16="http://schemas.microsoft.com/office/drawing/2014/main" id="{F914FDC4-8359-4EAE-85A0-F71271BE217E}"/>
               </a:ext>
             </a:extLst>
           </p:cNvPr>
@@ -4642,7 +4646,7 @@
           <p:cNvPr id="28" name="Text-80">
             <a:extLst xmlns:a="http://schemas.openxmlformats.org/drawingml/2006/main">
               <a:ext uri="{FF2B5EF4-FFF2-40B4-BE49-F238E27FC236}">
-                <a16:creationId xmlns:a16="http://schemas.microsoft.com/office/drawing/2014/main" id="{4EA4185A-9040-4701-BA5C-CA5CF19D24A8}"/>
+                <a16:creationId xmlns:a16="http://schemas.microsoft.com/office/drawing/2014/main" id="{784514C2-0510-44EF-964C-B08F1C48C035}"/>
               </a:ext>
             </a:extLst>
           </p:cNvPr>
@@ -4662,12 +4666,12 @@
         </p:spPr>
         <p:txBody>
           <a:bodyPr xmlns:a="http://schemas.openxmlformats.org/drawingml/2006/main" lIns="0" tIns="0" rIns="0" bIns="0" anchor="t">
-            <a:normAutofit fontScale="100000"/>
+            <a:normAutofit fontScale="98485"/>
           </a:bodyPr>
           <a:lstStyle xmlns:a="http://schemas.openxmlformats.org/drawingml/2006/main"/>
           <a:p xmlns:a="http://schemas.openxmlformats.org/drawingml/2006/main">
             <a:pPr algn="l">
-              <a:defRPr sz="1050" b="1">
+              <a:defRPr sz="1650" b="1">
                 <a:solidFill>
                   <a:srgbClr val="1F5EFF"/>
                 </a:solidFill>
@@ -4687,7 +4691,7 @@
           <p:cNvPr id="29" name="Text-81">
             <a:extLst xmlns:a="http://schemas.openxmlformats.org/drawingml/2006/main">
               <a:ext uri="{FF2B5EF4-FFF2-40B4-BE49-F238E27FC236}">
-                <a16:creationId xmlns:a16="http://schemas.microsoft.com/office/drawing/2014/main" id="{B027A574-EE5A-4566-ACF0-0A640AB1DBAE}"/>
+                <a16:creationId xmlns:a16="http://schemas.microsoft.com/office/drawing/2014/main" id="{DD6E7A0C-A648-4C62-B638-A185EBFE05CE}"/>
               </a:ext>
             </a:extLst>
           </p:cNvPr>
@@ -4732,23 +4736,23 @@
           <p:cNvPr id="30" name="Shape-82">
             <a:extLst xmlns:a="http://schemas.openxmlformats.org/drawingml/2006/main">
               <a:ext uri="{FF2B5EF4-FFF2-40B4-BE49-F238E27FC236}">
-                <a16:creationId xmlns:a16="http://schemas.microsoft.com/office/drawing/2014/main" id="{F4335BA9-EB02-4255-998C-59BA2C6D3B53}"/>
-              </a:ext>
-            </a:extLst>
-          </p:cNvPr>
-          <p:cNvSpPr>
-            <a:spLocks xmlns:a="http://schemas.openxmlformats.org/drawingml/2006/main" noGrp="1"/>
-          </p:cNvSpPr>
-          <p:nvPr/>
-        </p:nvSpPr>
-        <p:spPr>
-          <a:xfrm xmlns:a="http://schemas.openxmlformats.org/drawingml/2006/main">
-            <a:off x="6200775" y="3200400"/>
-            <a:ext cx="1714500" cy="342900"/>
+                <a16:creationId xmlns:a16="http://schemas.microsoft.com/office/drawing/2014/main" id="{464735E9-118B-4844-9AFF-79D42FD11C25}"/>
+              </a:ext>
+            </a:extLst>
+          </p:cNvPr>
+          <p:cNvSpPr>
+            <a:spLocks xmlns:a="http://schemas.openxmlformats.org/drawingml/2006/main" noGrp="1"/>
+          </p:cNvSpPr>
+          <p:nvPr/>
+        </p:nvSpPr>
+        <p:spPr>
+          <a:xfrm xmlns:a="http://schemas.openxmlformats.org/drawingml/2006/main">
+            <a:off x="6200775" y="3124200"/>
+            <a:ext cx="1714500" cy="609600"/>
           </a:xfrm>
           <a:prstGeom xmlns:a="http://schemas.openxmlformats.org/drawingml/2006/main" prst="roundRect">
             <a:avLst>
-              <a:gd name="adj" fmla="val 22222"/>
+              <a:gd name="adj" fmla="val 12500"/>
             </a:avLst>
           </a:prstGeom>
           <a:solidFill xmlns:a="http://schemas.openxmlformats.org/drawingml/2006/main">
@@ -4761,32 +4765,32 @@
           <p:cNvPr id="31" name="Text-83">
             <a:extLst xmlns:a="http://schemas.openxmlformats.org/drawingml/2006/main">
               <a:ext uri="{FF2B5EF4-FFF2-40B4-BE49-F238E27FC236}">
-                <a16:creationId xmlns:a16="http://schemas.microsoft.com/office/drawing/2014/main" id="{3DAC1A99-1557-4BB6-9EDA-14F2241E6614}"/>
-              </a:ext>
-            </a:extLst>
-          </p:cNvPr>
-          <p:cNvSpPr>
-            <a:spLocks xmlns:a="http://schemas.openxmlformats.org/drawingml/2006/main" noGrp="1"/>
-          </p:cNvSpPr>
-          <p:nvPr/>
-        </p:nvSpPr>
-        <p:spPr>
-          <a:xfrm xmlns:a="http://schemas.openxmlformats.org/drawingml/2006/main">
-            <a:off x="6315075" y="3276600"/>
-            <a:ext cx="1485900" cy="228600"/>
-          </a:xfrm>
-          <a:prstGeom xmlns:a="http://schemas.openxmlformats.org/drawingml/2006/main" prst="rect">
-            <a:avLst/>
-          </a:prstGeom>
-        </p:spPr>
-        <p:txBody>
-          <a:bodyPr xmlns:a="http://schemas.openxmlformats.org/drawingml/2006/main" lIns="0" tIns="0" rIns="0" bIns="0" anchor="t">
-            <a:normAutofit fontScale="100000"/>
+                <a16:creationId xmlns:a16="http://schemas.microsoft.com/office/drawing/2014/main" id="{BD200E21-FF08-44AD-A043-2075B406C513}"/>
+              </a:ext>
+            </a:extLst>
+          </p:cNvPr>
+          <p:cNvSpPr>
+            <a:spLocks xmlns:a="http://schemas.openxmlformats.org/drawingml/2006/main" noGrp="1"/>
+          </p:cNvSpPr>
+          <p:nvPr/>
+        </p:nvSpPr>
+        <p:spPr>
+          <a:xfrm xmlns:a="http://schemas.openxmlformats.org/drawingml/2006/main">
+            <a:off x="6238875" y="3200400"/>
+            <a:ext cx="1638300" cy="495300"/>
+          </a:xfrm>
+          <a:prstGeom xmlns:a="http://schemas.openxmlformats.org/drawingml/2006/main" prst="rect">
+            <a:avLst/>
+          </a:prstGeom>
+        </p:spPr>
+        <p:txBody>
+          <a:bodyPr xmlns:a="http://schemas.openxmlformats.org/drawingml/2006/main" lIns="0" tIns="0" rIns="0" bIns="0" anchor="t">
+            <a:normAutofit fontScale="98485"/>
           </a:bodyPr>
           <a:lstStyle xmlns:a="http://schemas.openxmlformats.org/drawingml/2006/main"/>
           <a:p xmlns:a="http://schemas.openxmlformats.org/drawingml/2006/main">
             <a:pPr algn="ctr">
-              <a:defRPr sz="975" b="1">
+              <a:defRPr sz="1650" b="1">
                 <a:solidFill>
                   <a:srgbClr val="C33A32"/>
                 </a:solidFill>
@@ -4796,7 +4800,8 @@
               </a:defRPr>
             </a:pPr>
             <a:r>
-              <a:t>unsupported_version</a:t>
+              <a:t>malformed_
+envelope</a:t>
             </a:r>
           </a:p>
         </p:txBody>
@@ -4806,7 +4811,7 @@
           <p:cNvPr id="32" name="Shape-84">
             <a:extLst xmlns:a="http://schemas.openxmlformats.org/drawingml/2006/main">
               <a:ext uri="{FF2B5EF4-FFF2-40B4-BE49-F238E27FC236}">
-                <a16:creationId xmlns:a16="http://schemas.microsoft.com/office/drawing/2014/main" id="{FAFFAFFF-B8B1-4D68-8C2D-9F77EC945077}"/>
+                <a16:creationId xmlns:a16="http://schemas.microsoft.com/office/drawing/2014/main" id="{48F0F66B-CD8D-40D7-A8C9-2A67515FDE72}"/>
               </a:ext>
             </a:extLst>
           </p:cNvPr>
@@ -4833,7 +4838,7 @@
           <p:cNvPr id="33" name="Text-85">
             <a:extLst xmlns:a="http://schemas.openxmlformats.org/drawingml/2006/main">
               <a:ext uri="{FF2B5EF4-FFF2-40B4-BE49-F238E27FC236}">
-                <a16:creationId xmlns:a16="http://schemas.microsoft.com/office/drawing/2014/main" id="{D58750A4-CFEB-48DE-B988-3F951C8D0946}"/>
+                <a16:creationId xmlns:a16="http://schemas.microsoft.com/office/drawing/2014/main" id="{82D466E6-2E90-42D9-BE77-BECFB02A65E8}"/>
               </a:ext>
             </a:extLst>
           </p:cNvPr>
@@ -4853,12 +4858,12 @@
         </p:spPr>
         <p:txBody>
           <a:bodyPr xmlns:a="http://schemas.openxmlformats.org/drawingml/2006/main" lIns="0" tIns="0" rIns="0" bIns="0" anchor="t">
-            <a:normAutofit fontScale="100000"/>
+            <a:normAutofit fontScale="98485"/>
           </a:bodyPr>
           <a:lstStyle xmlns:a="http://schemas.openxmlformats.org/drawingml/2006/main"/>
           <a:p xmlns:a="http://schemas.openxmlformats.org/drawingml/2006/main">
             <a:pPr algn="l">
-              <a:defRPr sz="1050" b="1">
+              <a:defRPr sz="1650" b="1">
                 <a:solidFill>
                   <a:srgbClr val="1F5EFF"/>
                 </a:solidFill>
@@ -4878,7 +4883,7 @@
           <p:cNvPr id="34" name="Text-86">
             <a:extLst xmlns:a="http://schemas.openxmlformats.org/drawingml/2006/main">
               <a:ext uri="{FF2B5EF4-FFF2-40B4-BE49-F238E27FC236}">
-                <a16:creationId xmlns:a16="http://schemas.microsoft.com/office/drawing/2014/main" id="{E4F55864-DA1F-4E33-9418-72EDAD09F8BC}"/>
+                <a16:creationId xmlns:a16="http://schemas.microsoft.com/office/drawing/2014/main" id="{5A365536-0330-4A31-8E4C-BE6414181DE7}"/>
               </a:ext>
             </a:extLst>
           </p:cNvPr>
@@ -4923,23 +4928,23 @@
           <p:cNvPr id="35" name="Shape-87">
             <a:extLst xmlns:a="http://schemas.openxmlformats.org/drawingml/2006/main">
               <a:ext uri="{FF2B5EF4-FFF2-40B4-BE49-F238E27FC236}">
-                <a16:creationId xmlns:a16="http://schemas.microsoft.com/office/drawing/2014/main" id="{D4BCBAD7-CC93-4DAB-A2AB-95BDCF7D353D}"/>
-              </a:ext>
-            </a:extLst>
-          </p:cNvPr>
-          <p:cNvSpPr>
-            <a:spLocks xmlns:a="http://schemas.openxmlformats.org/drawingml/2006/main" noGrp="1"/>
-          </p:cNvSpPr>
-          <p:nvPr/>
-        </p:nvSpPr>
-        <p:spPr>
-          <a:xfrm xmlns:a="http://schemas.openxmlformats.org/drawingml/2006/main">
-            <a:off x="8115300" y="3200400"/>
-            <a:ext cx="1714500" cy="342900"/>
+                <a16:creationId xmlns:a16="http://schemas.microsoft.com/office/drawing/2014/main" id="{78A58E95-E7EF-4ED8-8680-F91E95323BCF}"/>
+              </a:ext>
+            </a:extLst>
+          </p:cNvPr>
+          <p:cNvSpPr>
+            <a:spLocks xmlns:a="http://schemas.openxmlformats.org/drawingml/2006/main" noGrp="1"/>
+          </p:cNvSpPr>
+          <p:nvPr/>
+        </p:nvSpPr>
+        <p:spPr>
+          <a:xfrm xmlns:a="http://schemas.openxmlformats.org/drawingml/2006/main">
+            <a:off x="8115300" y="3124200"/>
+            <a:ext cx="1714500" cy="609600"/>
           </a:xfrm>
           <a:prstGeom xmlns:a="http://schemas.openxmlformats.org/drawingml/2006/main" prst="roundRect">
             <a:avLst>
-              <a:gd name="adj" fmla="val 22222"/>
+              <a:gd name="adj" fmla="val 12500"/>
             </a:avLst>
           </a:prstGeom>
           <a:solidFill xmlns:a="http://schemas.openxmlformats.org/drawingml/2006/main">
@@ -4952,19 +4957,19 @@
           <p:cNvPr id="36" name="Text-88">
             <a:extLst xmlns:a="http://schemas.openxmlformats.org/drawingml/2006/main">
               <a:ext uri="{FF2B5EF4-FFF2-40B4-BE49-F238E27FC236}">
-                <a16:creationId xmlns:a16="http://schemas.microsoft.com/office/drawing/2014/main" id="{E976A105-6642-48AB-91E2-627BEBCB8BBF}"/>
-              </a:ext>
-            </a:extLst>
-          </p:cNvPr>
-          <p:cNvSpPr>
-            <a:spLocks xmlns:a="http://schemas.openxmlformats.org/drawingml/2006/main" noGrp="1"/>
-          </p:cNvSpPr>
-          <p:nvPr/>
-        </p:nvSpPr>
-        <p:spPr>
-          <a:xfrm xmlns:a="http://schemas.openxmlformats.org/drawingml/2006/main">
-            <a:off x="8229600" y="3276600"/>
-            <a:ext cx="1485900" cy="228600"/>
+                <a16:creationId xmlns:a16="http://schemas.microsoft.com/office/drawing/2014/main" id="{857059A6-4576-4188-A3E3-4E6E55236F79}"/>
+              </a:ext>
+            </a:extLst>
+          </p:cNvPr>
+          <p:cNvSpPr>
+            <a:spLocks xmlns:a="http://schemas.openxmlformats.org/drawingml/2006/main" noGrp="1"/>
+          </p:cNvSpPr>
+          <p:nvPr/>
+        </p:nvSpPr>
+        <p:spPr>
+          <a:xfrm xmlns:a="http://schemas.openxmlformats.org/drawingml/2006/main">
+            <a:off x="8153400" y="3200400"/>
+            <a:ext cx="1638300" cy="495300"/>
           </a:xfrm>
           <a:prstGeom xmlns:a="http://schemas.openxmlformats.org/drawingml/2006/main" prst="rect">
             <a:avLst/>
@@ -4977,7 +4982,7 @@
           <a:lstStyle xmlns:a="http://schemas.openxmlformats.org/drawingml/2006/main"/>
           <a:p xmlns:a="http://schemas.openxmlformats.org/drawingml/2006/main">
             <a:pPr algn="ctr">
-              <a:defRPr sz="975" b="1">
+              <a:defRPr sz="1650" b="1">
                 <a:solidFill>
                   <a:srgbClr val="C33A32"/>
                 </a:solidFill>
@@ -4997,7 +5002,7 @@
           <p:cNvPr id="37" name="Shape-89">
             <a:extLst xmlns:a="http://schemas.openxmlformats.org/drawingml/2006/main">
               <a:ext uri="{FF2B5EF4-FFF2-40B4-BE49-F238E27FC236}">
-                <a16:creationId xmlns:a16="http://schemas.microsoft.com/office/drawing/2014/main" id="{0D699FF0-3C44-4EFA-9940-C2AC87B3D950}"/>
+                <a16:creationId xmlns:a16="http://schemas.microsoft.com/office/drawing/2014/main" id="{06BD884E-1492-4319-9700-A9A9AFF368F0}"/>
               </a:ext>
             </a:extLst>
           </p:cNvPr>
@@ -5024,7 +5029,7 @@
           <p:cNvPr id="38" name="Text-90">
             <a:extLst xmlns:a="http://schemas.openxmlformats.org/drawingml/2006/main">
               <a:ext uri="{FF2B5EF4-FFF2-40B4-BE49-F238E27FC236}">
-                <a16:creationId xmlns:a16="http://schemas.microsoft.com/office/drawing/2014/main" id="{50BF7170-08F7-406D-A457-243EA59544A3}"/>
+                <a16:creationId xmlns:a16="http://schemas.microsoft.com/office/drawing/2014/main" id="{C08F1377-1FCB-41D1-90E0-7989CF749D66}"/>
               </a:ext>
             </a:extLst>
           </p:cNvPr>
@@ -5044,12 +5049,12 @@
         </p:spPr>
         <p:txBody>
           <a:bodyPr xmlns:a="http://schemas.openxmlformats.org/drawingml/2006/main" lIns="0" tIns="0" rIns="0" bIns="0" anchor="t">
-            <a:normAutofit fontScale="100000"/>
+            <a:normAutofit fontScale="98485"/>
           </a:bodyPr>
           <a:lstStyle xmlns:a="http://schemas.openxmlformats.org/drawingml/2006/main"/>
           <a:p xmlns:a="http://schemas.openxmlformats.org/drawingml/2006/main">
             <a:pPr algn="l">
-              <a:defRPr sz="1050" b="1">
+              <a:defRPr sz="1650" b="1">
                 <a:solidFill>
                   <a:srgbClr val="1F5EFF"/>
                 </a:solidFill>
@@ -5069,7 +5074,7 @@
           <p:cNvPr id="39" name="Text-91">
             <a:extLst xmlns:a="http://schemas.openxmlformats.org/drawingml/2006/main">
               <a:ext uri="{FF2B5EF4-FFF2-40B4-BE49-F238E27FC236}">
-                <a16:creationId xmlns:a16="http://schemas.microsoft.com/office/drawing/2014/main" id="{E3D25B6D-B6D3-42DC-8FE0-8C5BB766142E}"/>
+                <a16:creationId xmlns:a16="http://schemas.microsoft.com/office/drawing/2014/main" id="{1B91CC09-6FE0-4551-867B-57E54514CF56}"/>
               </a:ext>
             </a:extLst>
           </p:cNvPr>
@@ -5114,23 +5119,23 @@
           <p:cNvPr id="40" name="Shape-92">
             <a:extLst xmlns:a="http://schemas.openxmlformats.org/drawingml/2006/main">
               <a:ext uri="{FF2B5EF4-FFF2-40B4-BE49-F238E27FC236}">
-                <a16:creationId xmlns:a16="http://schemas.microsoft.com/office/drawing/2014/main" id="{B5DE03AB-0F5F-4224-82EC-BFFF9BC16D62}"/>
-              </a:ext>
-            </a:extLst>
-          </p:cNvPr>
-          <p:cNvSpPr>
-            <a:spLocks xmlns:a="http://schemas.openxmlformats.org/drawingml/2006/main" noGrp="1"/>
-          </p:cNvSpPr>
-          <p:nvPr/>
-        </p:nvSpPr>
-        <p:spPr>
-          <a:xfrm xmlns:a="http://schemas.openxmlformats.org/drawingml/2006/main">
-            <a:off x="10029825" y="3200400"/>
-            <a:ext cx="1714500" cy="342900"/>
+                <a16:creationId xmlns:a16="http://schemas.microsoft.com/office/drawing/2014/main" id="{0C1717DB-A3F3-4EFB-89C6-0BAFF9DF43FA}"/>
+              </a:ext>
+            </a:extLst>
+          </p:cNvPr>
+          <p:cNvSpPr>
+            <a:spLocks xmlns:a="http://schemas.openxmlformats.org/drawingml/2006/main" noGrp="1"/>
+          </p:cNvSpPr>
+          <p:nvPr/>
+        </p:nvSpPr>
+        <p:spPr>
+          <a:xfrm xmlns:a="http://schemas.openxmlformats.org/drawingml/2006/main">
+            <a:off x="10029825" y="3124200"/>
+            <a:ext cx="1714500" cy="609600"/>
           </a:xfrm>
           <a:prstGeom xmlns:a="http://schemas.openxmlformats.org/drawingml/2006/main" prst="roundRect">
             <a:avLst>
-              <a:gd name="adj" fmla="val 22222"/>
+              <a:gd name="adj" fmla="val 12500"/>
             </a:avLst>
           </a:prstGeom>
           <a:solidFill xmlns:a="http://schemas.openxmlformats.org/drawingml/2006/main">
@@ -5143,32 +5148,32 @@
           <p:cNvPr id="41" name="Text-93">
             <a:extLst xmlns:a="http://schemas.openxmlformats.org/drawingml/2006/main">
               <a:ext uri="{FF2B5EF4-FFF2-40B4-BE49-F238E27FC236}">
-                <a16:creationId xmlns:a16="http://schemas.microsoft.com/office/drawing/2014/main" id="{A26F0228-4BE1-4A9E-9A04-F0046FA6B150}"/>
-              </a:ext>
-            </a:extLst>
-          </p:cNvPr>
-          <p:cNvSpPr>
-            <a:spLocks xmlns:a="http://schemas.openxmlformats.org/drawingml/2006/main" noGrp="1"/>
-          </p:cNvSpPr>
-          <p:nvPr/>
-        </p:nvSpPr>
-        <p:spPr>
-          <a:xfrm xmlns:a="http://schemas.openxmlformats.org/drawingml/2006/main">
-            <a:off x="10144125" y="3276600"/>
-            <a:ext cx="1485900" cy="228600"/>
-          </a:xfrm>
-          <a:prstGeom xmlns:a="http://schemas.openxmlformats.org/drawingml/2006/main" prst="rect">
-            <a:avLst/>
-          </a:prstGeom>
-        </p:spPr>
-        <p:txBody>
-          <a:bodyPr xmlns:a="http://schemas.openxmlformats.org/drawingml/2006/main" lIns="0" tIns="0" rIns="0" bIns="0" anchor="t">
-            <a:normAutofit fontScale="100000"/>
+                <a16:creationId xmlns:a16="http://schemas.microsoft.com/office/drawing/2014/main" id="{979FB03A-6913-4C20-BFF9-86BE2DCBE493}"/>
+              </a:ext>
+            </a:extLst>
+          </p:cNvPr>
+          <p:cNvSpPr>
+            <a:spLocks xmlns:a="http://schemas.openxmlformats.org/drawingml/2006/main" noGrp="1"/>
+          </p:cNvSpPr>
+          <p:nvPr/>
+        </p:nvSpPr>
+        <p:spPr>
+          <a:xfrm xmlns:a="http://schemas.openxmlformats.org/drawingml/2006/main">
+            <a:off x="10067925" y="3200400"/>
+            <a:ext cx="1638300" cy="495300"/>
+          </a:xfrm>
+          <a:prstGeom xmlns:a="http://schemas.openxmlformats.org/drawingml/2006/main" prst="rect">
+            <a:avLst/>
+          </a:prstGeom>
+        </p:spPr>
+        <p:txBody>
+          <a:bodyPr xmlns:a="http://schemas.openxmlformats.org/drawingml/2006/main" lIns="0" tIns="0" rIns="0" bIns="0" anchor="t">
+            <a:normAutofit fontScale="98485"/>
           </a:bodyPr>
           <a:lstStyle xmlns:a="http://schemas.openxmlformats.org/drawingml/2006/main"/>
           <a:p xmlns:a="http://schemas.openxmlformats.org/drawingml/2006/main">
             <a:pPr algn="ctr">
-              <a:defRPr sz="975" b="1">
+              <a:defRPr sz="1650" b="1">
                 <a:solidFill>
                   <a:srgbClr val="C33A32"/>
                 </a:solidFill>
@@ -5178,7 +5183,8 @@
               </a:defRPr>
             </a:pPr>
             <a:r>
-              <a:t>invalid_payload</a:t>
+              <a:t>invalid_
+payload</a:t>
             </a:r>
           </a:p>
         </p:txBody>
@@ -5188,23 +5194,23 @@
           <p:cNvPr id="42" name="Shape-94">
             <a:extLst xmlns:a="http://schemas.openxmlformats.org/drawingml/2006/main">
               <a:ext uri="{FF2B5EF4-FFF2-40B4-BE49-F238E27FC236}">
-                <a16:creationId xmlns:a16="http://schemas.microsoft.com/office/drawing/2014/main" id="{3C16836D-CDF0-4221-A07D-759C4576D765}"/>
-              </a:ext>
-            </a:extLst>
-          </p:cNvPr>
-          <p:cNvSpPr>
-            <a:spLocks xmlns:a="http://schemas.openxmlformats.org/drawingml/2006/main" noGrp="1"/>
-          </p:cNvSpPr>
-          <p:nvPr/>
-        </p:nvSpPr>
-        <p:spPr>
-          <a:xfrm xmlns:a="http://schemas.openxmlformats.org/drawingml/2006/main">
-            <a:off x="457200" y="4286250"/>
-            <a:ext cx="11277600" cy="1066800"/>
+                <a16:creationId xmlns:a16="http://schemas.microsoft.com/office/drawing/2014/main" id="{B4932B57-EEEF-43BE-AD88-09975FBAE95D}"/>
+              </a:ext>
+            </a:extLst>
+          </p:cNvPr>
+          <p:cNvSpPr>
+            <a:spLocks xmlns:a="http://schemas.openxmlformats.org/drawingml/2006/main" noGrp="1"/>
+          </p:cNvSpPr>
+          <p:nvPr/>
+        </p:nvSpPr>
+        <p:spPr>
+          <a:xfrm xmlns:a="http://schemas.openxmlformats.org/drawingml/2006/main">
+            <a:off x="457200" y="4095750"/>
+            <a:ext cx="11277600" cy="1257300"/>
           </a:xfrm>
           <a:prstGeom xmlns:a="http://schemas.openxmlformats.org/drawingml/2006/main" prst="roundRect">
             <a:avLst>
-              <a:gd name="adj" fmla="val 7143"/>
+              <a:gd name="adj" fmla="val 6061"/>
             </a:avLst>
           </a:prstGeom>
           <a:solidFill xmlns:a="http://schemas.openxmlformats.org/drawingml/2006/main">
@@ -5217,19 +5223,19 @@
           <p:cNvPr id="43" name="Text-95">
             <a:extLst xmlns:a="http://schemas.openxmlformats.org/drawingml/2006/main">
               <a:ext uri="{FF2B5EF4-FFF2-40B4-BE49-F238E27FC236}">
-                <a16:creationId xmlns:a16="http://schemas.microsoft.com/office/drawing/2014/main" id="{5689EA5F-49CF-4395-A02E-F735194F214D}"/>
-              </a:ext>
-            </a:extLst>
-          </p:cNvPr>
-          <p:cNvSpPr>
-            <a:spLocks xmlns:a="http://schemas.openxmlformats.org/drawingml/2006/main" noGrp="1"/>
-          </p:cNvSpPr>
-          <p:nvPr/>
-        </p:nvSpPr>
-        <p:spPr>
-          <a:xfrm xmlns:a="http://schemas.openxmlformats.org/drawingml/2006/main">
-            <a:off x="685800" y="4495800"/>
-            <a:ext cx="2095500" cy="228600"/>
+                <a16:creationId xmlns:a16="http://schemas.microsoft.com/office/drawing/2014/main" id="{E0468F1B-1FDD-43F3-8D90-2EB98BFCC219}"/>
+              </a:ext>
+            </a:extLst>
+          </p:cNvPr>
+          <p:cNvSpPr>
+            <a:spLocks xmlns:a="http://schemas.openxmlformats.org/drawingml/2006/main" noGrp="1"/>
+          </p:cNvSpPr>
+          <p:nvPr/>
+        </p:nvSpPr>
+        <p:spPr>
+          <a:xfrm xmlns:a="http://schemas.openxmlformats.org/drawingml/2006/main">
+            <a:off x="685800" y="4267200"/>
+            <a:ext cx="2667000" cy="266700"/>
           </a:xfrm>
           <a:prstGeom xmlns:a="http://schemas.openxmlformats.org/drawingml/2006/main" prst="rect">
             <a:avLst/>
@@ -5242,7 +5248,7 @@
           <a:lstStyle xmlns:a="http://schemas.openxmlformats.org/drawingml/2006/main"/>
           <a:p xmlns:a="http://schemas.openxmlformats.org/drawingml/2006/main">
             <a:pPr algn="l">
-              <a:defRPr sz="1125" b="1">
+              <a:defRPr sz="1650" b="1">
                 <a:solidFill>
                   <a:srgbClr val="1F5EFF"/>
                 </a:solidFill>
@@ -5262,19 +5268,19 @@
           <p:cNvPr id="44" name="Text-96">
             <a:extLst xmlns:a="http://schemas.openxmlformats.org/drawingml/2006/main">
               <a:ext uri="{FF2B5EF4-FFF2-40B4-BE49-F238E27FC236}">
-                <a16:creationId xmlns:a16="http://schemas.microsoft.com/office/drawing/2014/main" id="{87AA7419-CEFE-4F48-AC81-EFFD7EC264F2}"/>
-              </a:ext>
-            </a:extLst>
-          </p:cNvPr>
-          <p:cNvSpPr>
-            <a:spLocks xmlns:a="http://schemas.openxmlformats.org/drawingml/2006/main" noGrp="1"/>
-          </p:cNvSpPr>
-          <p:nvPr/>
-        </p:nvSpPr>
-        <p:spPr>
-          <a:xfrm xmlns:a="http://schemas.openxmlformats.org/drawingml/2006/main">
-            <a:off x="685800" y="4810125"/>
-            <a:ext cx="10382250" cy="323850"/>
+                <a16:creationId xmlns:a16="http://schemas.microsoft.com/office/drawing/2014/main" id="{EDE9D740-621C-4902-972C-F9878ECD89E0}"/>
+              </a:ext>
+            </a:extLst>
+          </p:cNvPr>
+          <p:cNvSpPr>
+            <a:spLocks xmlns:a="http://schemas.openxmlformats.org/drawingml/2006/main" noGrp="1"/>
+          </p:cNvSpPr>
+          <p:nvPr/>
+        </p:nvSpPr>
+        <p:spPr>
+          <a:xfrm xmlns:a="http://schemas.openxmlformats.org/drawingml/2006/main">
+            <a:off x="685800" y="4591050"/>
+            <a:ext cx="10382250" cy="285750"/>
           </a:xfrm>
           <a:prstGeom xmlns:a="http://schemas.openxmlformats.org/drawingml/2006/main" prst="rect">
             <a:avLst/>
@@ -5287,7 +5293,52 @@
           <a:lstStyle xmlns:a="http://schemas.openxmlformats.org/drawingml/2006/main"/>
           <a:p xmlns:a="http://schemas.openxmlformats.org/drawingml/2006/main">
             <a:pPr algn="l">
-              <a:defRPr sz="1725" b="1">
+              <a:defRPr sz="1650" b="0">
+                <a:solidFill>
+                  <a:srgbClr val="123DAE"/>
+                </a:solidFill>
+                <a:latin typeface="Courier New"/>
+                <a:ea typeface="Courier New"/>
+                <a:cs typeface="Courier New"/>
+              </a:defRPr>
+            </a:pPr>
+            <a:r>
+              <a:t>unsupported_version is rejected before version-1 fields are trusted.</a:t>
+            </a:r>
+          </a:p>
+        </p:txBody>
+      </p:sp>
+      <p:sp>
+        <p:nvSpPr>
+          <p:cNvPr id="45" name="Text-97">
+            <a:extLst xmlns:a="http://schemas.openxmlformats.org/drawingml/2006/main">
+              <a:ext uri="{FF2B5EF4-FFF2-40B4-BE49-F238E27FC236}">
+                <a16:creationId xmlns:a16="http://schemas.microsoft.com/office/drawing/2014/main" id="{E505B486-BD63-404F-8704-35615D885F21}"/>
+              </a:ext>
+            </a:extLst>
+          </p:cNvPr>
+          <p:cNvSpPr>
+            <a:spLocks xmlns:a="http://schemas.openxmlformats.org/drawingml/2006/main" noGrp="1"/>
+          </p:cNvSpPr>
+          <p:nvPr/>
+        </p:nvSpPr>
+        <p:spPr>
+          <a:xfrm xmlns:a="http://schemas.openxmlformats.org/drawingml/2006/main">
+            <a:off x="685800" y="4953000"/>
+            <a:ext cx="10382250" cy="285750"/>
+          </a:xfrm>
+          <a:prstGeom xmlns:a="http://schemas.openxmlformats.org/drawingml/2006/main" prst="rect">
+            <a:avLst/>
+          </a:prstGeom>
+        </p:spPr>
+        <p:txBody>
+          <a:bodyPr xmlns:a="http://schemas.openxmlformats.org/drawingml/2006/main" lIns="0" tIns="0" rIns="0" bIns="0" anchor="t">
+            <a:normAutofit fontScale="100000"/>
+          </a:bodyPr>
+          <a:lstStyle xmlns:a="http://schemas.openxmlformats.org/drawingml/2006/main"/>
+          <a:p xmlns:a="http://schemas.openxmlformats.org/drawingml/2006/main">
+            <a:pPr algn="l">
+              <a:defRPr sz="1650" b="1">
                 <a:solidFill>
                   <a:srgbClr val="123DAE"/>
                 </a:solidFill>
@@ -5304,7 +5355,7 @@
       </p:sp>
       <p:cxnSp>
         <p:nvCxnSpPr>
-          <p:cNvPr id="92" name="Rule-97"/>
+          <p:cNvPr id="94" name="Rule-98"/>
           <p:cNvCxnSpPr/>
           <p:nvPr/>
         </p:nvCxnSpPr>
@@ -5326,10 +5377,10 @@
       </p:cxnSp>
       <p:sp>
         <p:nvSpPr>
-          <p:cNvPr id="46" name="Text-98">
-            <a:extLst xmlns:a="http://schemas.openxmlformats.org/drawingml/2006/main">
-              <a:ext uri="{FF2B5EF4-FFF2-40B4-BE49-F238E27FC236}">
-                <a16:creationId xmlns:a16="http://schemas.microsoft.com/office/drawing/2014/main" id="{7146B6C7-8C39-4844-9270-A106F183F6C5}"/>
+          <p:cNvPr id="47" name="Text-99">
+            <a:extLst xmlns:a="http://schemas.openxmlformats.org/drawingml/2006/main">
+              <a:ext uri="{FF2B5EF4-FFF2-40B4-BE49-F238E27FC236}">
+                <a16:creationId xmlns:a16="http://schemas.microsoft.com/office/drawing/2014/main" id="{1062A409-390C-4F27-93C5-B492F52B815D}"/>
               </a:ext>
             </a:extLst>
           </p:cNvPr>
@@ -5364,17 +5415,17 @@
               </a:defRPr>
             </a:pPr>
             <a:r>
-              <a:t>protocol/README.md · MAX_LINE_BYTES = 65,536 excluding LF</a:t>
-            </a:r>
-          </a:p>
-        </p:txBody>
-      </p:sp>
-      <p:sp>
-        <p:nvSpPr>
-          <p:cNvPr id="47" name="Text-99">
-            <a:extLst xmlns:a="http://schemas.openxmlformats.org/drawingml/2006/main">
-              <a:ext uri="{FF2B5EF4-FFF2-40B4-BE49-F238E27FC236}">
-                <a16:creationId xmlns:a16="http://schemas.microsoft.com/office/drawing/2014/main" id="{58BC476D-8D69-4076-9B4E-0581553FD5BA}"/>
+              <a:t>protocol/README.md · MAX_PROTOCOL_LINE_BYTES = 65,536 excluding LF</a:t>
+            </a:r>
+          </a:p>
+        </p:txBody>
+      </p:sp>
+      <p:sp>
+        <p:nvSpPr>
+          <p:cNvPr id="48" name="Text-100">
+            <a:extLst xmlns:a="http://schemas.openxmlformats.org/drawingml/2006/main">
+              <a:ext uri="{FF2B5EF4-FFF2-40B4-BE49-F238E27FC236}">
+                <a16:creationId xmlns:a16="http://schemas.microsoft.com/office/drawing/2014/main" id="{3BE62CEE-8DDD-41AC-9A02-ABEA84347C33}"/>
               </a:ext>
             </a:extLst>
           </p:cNvPr>
@@ -5417,7 +5468,7 @@
     </p:spTree>
     <p:extLst>
       <p:ext uri="{BB962C8B-B14F-4D97-AF65-F5344CB8AC3E}">
-        <p14:creationId xmlns:p14="http://schemas.microsoft.com/office/powerpoint/2010/main" val="759998663"/>
+        <p14:creationId xmlns:p14="http://schemas.microsoft.com/office/powerpoint/2010/main" val="1554869430"/>
       </p:ext>
     </p:extLst>
   </p:cSld>
@@ -5438,10 +5489,10 @@
       </p:grpSpPr>
       <p:sp>
         <p:nvSpPr>
-          <p:cNvPr id="1" name="Shape-138">
-            <a:extLst xmlns:a="http://schemas.openxmlformats.org/drawingml/2006/main">
-              <a:ext uri="{FF2B5EF4-FFF2-40B4-BE49-F238E27FC236}">
-                <a16:creationId xmlns:a16="http://schemas.microsoft.com/office/drawing/2014/main" id="{E0B19D0B-7173-4E1F-ABFF-B3FD6F9453F5}"/>
+          <p:cNvPr id="1" name="Shape-139">
+            <a:extLst xmlns:a="http://schemas.openxmlformats.org/drawingml/2006/main">
+              <a:ext uri="{FF2B5EF4-FFF2-40B4-BE49-F238E27FC236}">
+                <a16:creationId xmlns:a16="http://schemas.microsoft.com/office/drawing/2014/main" id="{C1AF94BF-8A2D-4899-9458-C4232D64A46B}"/>
               </a:ext>
             </a:extLst>
           </p:cNvPr>
@@ -5465,10 +5516,10 @@
       </p:sp>
       <p:sp>
         <p:nvSpPr>
-          <p:cNvPr id="2" name="Text-101">
-            <a:extLst xmlns:a="http://schemas.openxmlformats.org/drawingml/2006/main">
-              <a:ext uri="{FF2B5EF4-FFF2-40B4-BE49-F238E27FC236}">
-                <a16:creationId xmlns:a16="http://schemas.microsoft.com/office/drawing/2014/main" id="{085FE6F5-A5F7-4FC7-867E-596C016DDE22}"/>
+          <p:cNvPr id="2" name="Text-102">
+            <a:extLst xmlns:a="http://schemas.openxmlformats.org/drawingml/2006/main">
+              <a:ext uri="{FF2B5EF4-FFF2-40B4-BE49-F238E27FC236}">
+                <a16:creationId xmlns:a16="http://schemas.microsoft.com/office/drawing/2014/main" id="{3DFE44C4-2D31-4305-B69B-F2BBF4603D0F}"/>
               </a:ext>
             </a:extLst>
           </p:cNvPr>
@@ -5510,10 +5561,10 @@
       </p:sp>
       <p:sp>
         <p:nvSpPr>
-          <p:cNvPr id="3" name="Shape-102">
-            <a:extLst xmlns:a="http://schemas.openxmlformats.org/drawingml/2006/main">
-              <a:ext uri="{FF2B5EF4-FFF2-40B4-BE49-F238E27FC236}">
-                <a16:creationId xmlns:a16="http://schemas.microsoft.com/office/drawing/2014/main" id="{1A3A4B33-B3DC-4FB7-AD91-8C910B8CDCCB}"/>
+          <p:cNvPr id="3" name="Shape-103">
+            <a:extLst xmlns:a="http://schemas.openxmlformats.org/drawingml/2006/main">
+              <a:ext uri="{FF2B5EF4-FFF2-40B4-BE49-F238E27FC236}">
+                <a16:creationId xmlns:a16="http://schemas.microsoft.com/office/drawing/2014/main" id="{AA1A3D58-BB55-4134-A2DA-CD2D9A7DF641}"/>
               </a:ext>
             </a:extLst>
           </p:cNvPr>
@@ -5539,10 +5590,10 @@
       </p:sp>
       <p:sp>
         <p:nvSpPr>
-          <p:cNvPr id="4" name="Shape-103">
-            <a:extLst xmlns:a="http://schemas.openxmlformats.org/drawingml/2006/main">
-              <a:ext uri="{FF2B5EF4-FFF2-40B4-BE49-F238E27FC236}">
-                <a16:creationId xmlns:a16="http://schemas.microsoft.com/office/drawing/2014/main" id="{4759DD81-3D55-4840-8B9E-0797F4379CF5}"/>
+          <p:cNvPr id="4" name="Shape-104">
+            <a:extLst xmlns:a="http://schemas.openxmlformats.org/drawingml/2006/main">
+              <a:ext uri="{FF2B5EF4-FFF2-40B4-BE49-F238E27FC236}">
+                <a16:creationId xmlns:a16="http://schemas.microsoft.com/office/drawing/2014/main" id="{BC932E3B-35F6-44AB-AAF0-4E4C44A69920}"/>
               </a:ext>
             </a:extLst>
           </p:cNvPr>
@@ -5566,10 +5617,10 @@
       </p:sp>
       <p:sp>
         <p:nvSpPr>
-          <p:cNvPr id="5" name="Text-104">
-            <a:extLst xmlns:a="http://schemas.openxmlformats.org/drawingml/2006/main">
-              <a:ext uri="{FF2B5EF4-FFF2-40B4-BE49-F238E27FC236}">
-                <a16:creationId xmlns:a16="http://schemas.microsoft.com/office/drawing/2014/main" id="{BAD34892-E487-45C8-942E-E963E5123A5F}"/>
+          <p:cNvPr id="5" name="Text-105">
+            <a:extLst xmlns:a="http://schemas.openxmlformats.org/drawingml/2006/main">
+              <a:ext uri="{FF2B5EF4-FFF2-40B4-BE49-F238E27FC236}">
+                <a16:creationId xmlns:a16="http://schemas.microsoft.com/office/drawing/2014/main" id="{15A78934-EA2E-40DB-A65B-40F49989AB32}"/>
               </a:ext>
             </a:extLst>
           </p:cNvPr>
@@ -5581,7 +5632,7 @@
         <p:spPr>
           <a:xfrm xmlns:a="http://schemas.openxmlformats.org/drawingml/2006/main">
             <a:off x="628650" y="1790700"/>
-            <a:ext cx="1695450" cy="495300"/>
+            <a:ext cx="1695450" cy="552450"/>
           </a:xfrm>
           <a:prstGeom xmlns:a="http://schemas.openxmlformats.org/drawingml/2006/main" prst="rect">
             <a:avLst/>
@@ -5594,7 +5645,7 @@
           <a:lstStyle xmlns:a="http://schemas.openxmlformats.org/drawingml/2006/main"/>
           <a:p xmlns:a="http://schemas.openxmlformats.org/drawingml/2006/main">
             <a:pPr algn="l">
-              <a:defRPr sz="1575" b="1">
+              <a:defRPr sz="1650" b="1">
                 <a:solidFill>
                   <a:srgbClr val="0B0D12"/>
                 </a:solidFill>
@@ -5611,10 +5662,10 @@
       </p:sp>
       <p:sp>
         <p:nvSpPr>
-          <p:cNvPr id="6" name="Text-105">
-            <a:extLst xmlns:a="http://schemas.openxmlformats.org/drawingml/2006/main">
-              <a:ext uri="{FF2B5EF4-FFF2-40B4-BE49-F238E27FC236}">
-                <a16:creationId xmlns:a16="http://schemas.microsoft.com/office/drawing/2014/main" id="{14CB9A6E-1AF0-49FA-817D-33EE9DD9010E}"/>
+          <p:cNvPr id="6" name="Text-106">
+            <a:extLst xmlns:a="http://schemas.openxmlformats.org/drawingml/2006/main">
+              <a:ext uri="{FF2B5EF4-FFF2-40B4-BE49-F238E27FC236}">
+                <a16:creationId xmlns:a16="http://schemas.microsoft.com/office/drawing/2014/main" id="{8143E91E-0F9C-4107-9034-2A3431A49260}"/>
               </a:ext>
             </a:extLst>
           </p:cNvPr>
@@ -5656,7 +5707,7 @@
       </p:sp>
       <p:cxnSp>
         <p:nvCxnSpPr>
-          <p:cNvPr id="45" name="Rule-106"/>
+          <p:cNvPr id="45" name="Rule-107"/>
           <p:cNvCxnSpPr/>
           <p:nvPr/>
         </p:nvCxnSpPr>
@@ -5678,10 +5729,10 @@
       </p:cxnSp>
       <p:sp>
         <p:nvSpPr>
-          <p:cNvPr id="8" name="Text-107">
-            <a:extLst xmlns:a="http://schemas.openxmlformats.org/drawingml/2006/main">
-              <a:ext uri="{FF2B5EF4-FFF2-40B4-BE49-F238E27FC236}">
-                <a16:creationId xmlns:a16="http://schemas.microsoft.com/office/drawing/2014/main" id="{E28C8987-EAED-43EF-B6C6-1BBF765BD381}"/>
+          <p:cNvPr id="8" name="Text-108">
+            <a:extLst xmlns:a="http://schemas.openxmlformats.org/drawingml/2006/main">
+              <a:ext uri="{FF2B5EF4-FFF2-40B4-BE49-F238E27FC236}">
+                <a16:creationId xmlns:a16="http://schemas.microsoft.com/office/drawing/2014/main" id="{9504490A-5142-4BB6-9594-F4325054FEA9}"/>
               </a:ext>
             </a:extLst>
           </p:cNvPr>
@@ -5693,7 +5744,7 @@
         <p:spPr>
           <a:xfrm xmlns:a="http://schemas.openxmlformats.org/drawingml/2006/main">
             <a:off x="628650" y="3762375"/>
-            <a:ext cx="1695450" cy="723900"/>
+            <a:ext cx="1695450" cy="781050"/>
           </a:xfrm>
           <a:prstGeom xmlns:a="http://schemas.openxmlformats.org/drawingml/2006/main" prst="rect">
             <a:avLst/>
@@ -5706,7 +5757,7 @@
           <a:lstStyle xmlns:a="http://schemas.openxmlformats.org/drawingml/2006/main"/>
           <a:p xmlns:a="http://schemas.openxmlformats.org/drawingml/2006/main">
             <a:pPr algn="l">
-              <a:defRPr sz="1350" b="0">
+              <a:defRPr sz="1650" b="0">
                 <a:solidFill>
                   <a:srgbClr val="5B6472"/>
                 </a:solidFill>
@@ -5723,10 +5774,10 @@
       </p:sp>
       <p:sp>
         <p:nvSpPr>
-          <p:cNvPr id="9" name="Shape-108">
-            <a:extLst xmlns:a="http://schemas.openxmlformats.org/drawingml/2006/main">
-              <a:ext uri="{FF2B5EF4-FFF2-40B4-BE49-F238E27FC236}">
-                <a16:creationId xmlns:a16="http://schemas.microsoft.com/office/drawing/2014/main" id="{D5299CBA-8550-46F4-88E6-876328F1EFE2}"/>
+          <p:cNvPr id="9" name="Shape-109">
+            <a:extLst xmlns:a="http://schemas.openxmlformats.org/drawingml/2006/main">
+              <a:ext uri="{FF2B5EF4-FFF2-40B4-BE49-F238E27FC236}">
+                <a16:creationId xmlns:a16="http://schemas.microsoft.com/office/drawing/2014/main" id="{B582D5F7-633A-49EA-B1AB-490DA07C6B87}"/>
               </a:ext>
             </a:extLst>
           </p:cNvPr>
@@ -5752,10 +5803,10 @@
       </p:sp>
       <p:sp>
         <p:nvSpPr>
-          <p:cNvPr id="10" name="Shape-109">
-            <a:extLst xmlns:a="http://schemas.openxmlformats.org/drawingml/2006/main">
-              <a:ext uri="{FF2B5EF4-FFF2-40B4-BE49-F238E27FC236}">
-                <a16:creationId xmlns:a16="http://schemas.microsoft.com/office/drawing/2014/main" id="{B9B79F44-9AD3-46A2-87E2-6A375ACF640A}"/>
+          <p:cNvPr id="10" name="Shape-110">
+            <a:extLst xmlns:a="http://schemas.openxmlformats.org/drawingml/2006/main">
+              <a:ext uri="{FF2B5EF4-FFF2-40B4-BE49-F238E27FC236}">
+                <a16:creationId xmlns:a16="http://schemas.microsoft.com/office/drawing/2014/main" id="{E2FF7FCF-868E-4EBF-8630-01CBB88A6EDF}"/>
               </a:ext>
             </a:extLst>
           </p:cNvPr>
@@ -5779,10 +5830,10 @@
       </p:sp>
       <p:sp>
         <p:nvSpPr>
-          <p:cNvPr id="11" name="Text-110">
-            <a:extLst xmlns:a="http://schemas.openxmlformats.org/drawingml/2006/main">
-              <a:ext uri="{FF2B5EF4-FFF2-40B4-BE49-F238E27FC236}">
-                <a16:creationId xmlns:a16="http://schemas.microsoft.com/office/drawing/2014/main" id="{9D005547-6698-4622-B99B-C1F5D82FAC79}"/>
+          <p:cNvPr id="11" name="Text-111">
+            <a:extLst xmlns:a="http://schemas.openxmlformats.org/drawingml/2006/main">
+              <a:ext uri="{FF2B5EF4-FFF2-40B4-BE49-F238E27FC236}">
+                <a16:creationId xmlns:a16="http://schemas.microsoft.com/office/drawing/2014/main" id="{447CB354-86CF-4178-A45E-5E3500997621}"/>
               </a:ext>
             </a:extLst>
           </p:cNvPr>
@@ -5794,7 +5845,7 @@
         <p:spPr>
           <a:xfrm xmlns:a="http://schemas.openxmlformats.org/drawingml/2006/main">
             <a:off x="2895600" y="1790700"/>
-            <a:ext cx="1695450" cy="495300"/>
+            <a:ext cx="1695450" cy="552450"/>
           </a:xfrm>
           <a:prstGeom xmlns:a="http://schemas.openxmlformats.org/drawingml/2006/main" prst="rect">
             <a:avLst/>
@@ -5807,7 +5858,7 @@
           <a:lstStyle xmlns:a="http://schemas.openxmlformats.org/drawingml/2006/main"/>
           <a:p xmlns:a="http://schemas.openxmlformats.org/drawingml/2006/main">
             <a:pPr algn="l">
-              <a:defRPr sz="1350" b="1">
+              <a:defRPr sz="1650" b="1">
                 <a:solidFill>
                   <a:srgbClr val="0B0D12"/>
                 </a:solidFill>
@@ -5817,17 +5868,18 @@
               </a:defRPr>
             </a:pPr>
             <a:r>
-              <a:t>correlation_id</a:t>
-            </a:r>
-          </a:p>
-        </p:txBody>
-      </p:sp>
-      <p:sp>
-        <p:nvSpPr>
-          <p:cNvPr id="12" name="Text-111">
-            <a:extLst xmlns:a="http://schemas.openxmlformats.org/drawingml/2006/main">
-              <a:ext uri="{FF2B5EF4-FFF2-40B4-BE49-F238E27FC236}">
-                <a16:creationId xmlns:a16="http://schemas.microsoft.com/office/drawing/2014/main" id="{4BDF200C-6DF7-4E09-A1FC-5DF25313228B}"/>
+              <a:t>correlation_
+id</a:t>
+            </a:r>
+          </a:p>
+        </p:txBody>
+      </p:sp>
+      <p:sp>
+        <p:nvSpPr>
+          <p:cNvPr id="12" name="Text-112">
+            <a:extLst xmlns:a="http://schemas.openxmlformats.org/drawingml/2006/main">
+              <a:ext uri="{FF2B5EF4-FFF2-40B4-BE49-F238E27FC236}">
+                <a16:creationId xmlns:a16="http://schemas.microsoft.com/office/drawing/2014/main" id="{CB03E544-2CA2-403D-99A5-6FF48A18F784}"/>
               </a:ext>
             </a:extLst>
           </p:cNvPr>
@@ -5869,7 +5921,7 @@
       </p:sp>
       <p:cxnSp>
         <p:nvCxnSpPr>
-          <p:cNvPr id="51" name="Rule-112"/>
+          <p:cNvPr id="51" name="Rule-113"/>
           <p:cNvCxnSpPr/>
           <p:nvPr/>
         </p:nvCxnSpPr>
@@ -5891,10 +5943,10 @@
       </p:cxnSp>
       <p:sp>
         <p:nvSpPr>
-          <p:cNvPr id="14" name="Text-113">
-            <a:extLst xmlns:a="http://schemas.openxmlformats.org/drawingml/2006/main">
-              <a:ext uri="{FF2B5EF4-FFF2-40B4-BE49-F238E27FC236}">
-                <a16:creationId xmlns:a16="http://schemas.microsoft.com/office/drawing/2014/main" id="{F8267BD9-3A91-4399-B6EC-B263F3C03EFD}"/>
+          <p:cNvPr id="14" name="Text-114">
+            <a:extLst xmlns:a="http://schemas.openxmlformats.org/drawingml/2006/main">
+              <a:ext uri="{FF2B5EF4-FFF2-40B4-BE49-F238E27FC236}">
+                <a16:creationId xmlns:a16="http://schemas.microsoft.com/office/drawing/2014/main" id="{207A1A0C-DA3E-485E-8E20-D8741194CE00}"/>
               </a:ext>
             </a:extLst>
           </p:cNvPr>
@@ -5906,7 +5958,7 @@
         <p:spPr>
           <a:xfrm xmlns:a="http://schemas.openxmlformats.org/drawingml/2006/main">
             <a:off x="2895600" y="3762375"/>
-            <a:ext cx="1695450" cy="723900"/>
+            <a:ext cx="1695450" cy="781050"/>
           </a:xfrm>
           <a:prstGeom xmlns:a="http://schemas.openxmlformats.org/drawingml/2006/main" prst="rect">
             <a:avLst/>
@@ -5919,7 +5971,7 @@
           <a:lstStyle xmlns:a="http://schemas.openxmlformats.org/drawingml/2006/main"/>
           <a:p xmlns:a="http://schemas.openxmlformats.org/drawingml/2006/main">
             <a:pPr algn="l">
-              <a:defRPr sz="1350" b="0">
+              <a:defRPr sz="1650" b="0">
                 <a:solidFill>
                   <a:srgbClr val="5B6472"/>
                 </a:solidFill>
@@ -5936,10 +5988,10 @@
       </p:sp>
       <p:sp>
         <p:nvSpPr>
-          <p:cNvPr id="15" name="Shape-114">
-            <a:extLst xmlns:a="http://schemas.openxmlformats.org/drawingml/2006/main">
-              <a:ext uri="{FF2B5EF4-FFF2-40B4-BE49-F238E27FC236}">
-                <a16:creationId xmlns:a16="http://schemas.microsoft.com/office/drawing/2014/main" id="{42537D51-501C-48E9-B511-F02A1ECB49BE}"/>
+          <p:cNvPr id="15" name="Shape-115">
+            <a:extLst xmlns:a="http://schemas.openxmlformats.org/drawingml/2006/main">
+              <a:ext uri="{FF2B5EF4-FFF2-40B4-BE49-F238E27FC236}">
+                <a16:creationId xmlns:a16="http://schemas.microsoft.com/office/drawing/2014/main" id="{B8449B21-3E7F-4F69-A812-F0E8E467391F}"/>
               </a:ext>
             </a:extLst>
           </p:cNvPr>
@@ -5965,10 +6017,10 @@
       </p:sp>
       <p:sp>
         <p:nvSpPr>
-          <p:cNvPr id="16" name="Shape-115">
-            <a:extLst xmlns:a="http://schemas.openxmlformats.org/drawingml/2006/main">
-              <a:ext uri="{FF2B5EF4-FFF2-40B4-BE49-F238E27FC236}">
-                <a16:creationId xmlns:a16="http://schemas.microsoft.com/office/drawing/2014/main" id="{87D65414-7B02-4BEC-A014-20668E8D22EC}"/>
+          <p:cNvPr id="16" name="Shape-116">
+            <a:extLst xmlns:a="http://schemas.openxmlformats.org/drawingml/2006/main">
+              <a:ext uri="{FF2B5EF4-FFF2-40B4-BE49-F238E27FC236}">
+                <a16:creationId xmlns:a16="http://schemas.microsoft.com/office/drawing/2014/main" id="{C6200D66-B649-4DD4-927C-19925BD5A173}"/>
               </a:ext>
             </a:extLst>
           </p:cNvPr>
@@ -5992,10 +6044,10 @@
       </p:sp>
       <p:sp>
         <p:nvSpPr>
-          <p:cNvPr id="17" name="Text-116">
-            <a:extLst xmlns:a="http://schemas.openxmlformats.org/drawingml/2006/main">
-              <a:ext uri="{FF2B5EF4-FFF2-40B4-BE49-F238E27FC236}">
-                <a16:creationId xmlns:a16="http://schemas.microsoft.com/office/drawing/2014/main" id="{8FC7964F-913B-4ABE-9DEB-652AA3058180}"/>
+          <p:cNvPr id="17" name="Text-117">
+            <a:extLst xmlns:a="http://schemas.openxmlformats.org/drawingml/2006/main">
+              <a:ext uri="{FF2B5EF4-FFF2-40B4-BE49-F238E27FC236}">
+                <a16:creationId xmlns:a16="http://schemas.microsoft.com/office/drawing/2014/main" id="{2B901D66-8484-442D-A7A4-5917DB11D00C}"/>
               </a:ext>
             </a:extLst>
           </p:cNvPr>
@@ -6007,7 +6059,7 @@
         <p:spPr>
           <a:xfrm xmlns:a="http://schemas.openxmlformats.org/drawingml/2006/main">
             <a:off x="5162550" y="1790700"/>
-            <a:ext cx="1695450" cy="495300"/>
+            <a:ext cx="1695450" cy="552450"/>
           </a:xfrm>
           <a:prstGeom xmlns:a="http://schemas.openxmlformats.org/drawingml/2006/main" prst="rect">
             <a:avLst/>
@@ -6020,7 +6072,7 @@
           <a:lstStyle xmlns:a="http://schemas.openxmlformats.org/drawingml/2006/main"/>
           <a:p xmlns:a="http://schemas.openxmlformats.org/drawingml/2006/main">
             <a:pPr algn="l">
-              <a:defRPr sz="1575" b="1">
+              <a:defRPr sz="1650" b="1">
                 <a:solidFill>
                   <a:srgbClr val="0B0D12"/>
                 </a:solidFill>
@@ -6037,10 +6089,10 @@
       </p:sp>
       <p:sp>
         <p:nvSpPr>
-          <p:cNvPr id="18" name="Text-117">
-            <a:extLst xmlns:a="http://schemas.openxmlformats.org/drawingml/2006/main">
-              <a:ext uri="{FF2B5EF4-FFF2-40B4-BE49-F238E27FC236}">
-                <a16:creationId xmlns:a16="http://schemas.microsoft.com/office/drawing/2014/main" id="{A4DDAA89-E5A7-4BCD-8592-B84764BFE860}"/>
+          <p:cNvPr id="18" name="Text-118">
+            <a:extLst xmlns:a="http://schemas.openxmlformats.org/drawingml/2006/main">
+              <a:ext uri="{FF2B5EF4-FFF2-40B4-BE49-F238E27FC236}">
+                <a16:creationId xmlns:a16="http://schemas.microsoft.com/office/drawing/2014/main" id="{DAEBF512-3795-4EC1-8534-BF4DE0A8F274}"/>
               </a:ext>
             </a:extLst>
           </p:cNvPr>
@@ -6082,7 +6134,7 @@
       </p:sp>
       <p:cxnSp>
         <p:nvCxnSpPr>
-          <p:cNvPr id="57" name="Rule-118"/>
+          <p:cNvPr id="57" name="Rule-119"/>
           <p:cNvCxnSpPr/>
           <p:nvPr/>
         </p:nvCxnSpPr>
@@ -6104,10 +6156,10 @@
       </p:cxnSp>
       <p:sp>
         <p:nvSpPr>
-          <p:cNvPr id="20" name="Text-119">
-            <a:extLst xmlns:a="http://schemas.openxmlformats.org/drawingml/2006/main">
-              <a:ext uri="{FF2B5EF4-FFF2-40B4-BE49-F238E27FC236}">
-                <a16:creationId xmlns:a16="http://schemas.microsoft.com/office/drawing/2014/main" id="{A7728611-E9A0-4403-BFC6-0D314A4BD823}"/>
+          <p:cNvPr id="20" name="Text-120">
+            <a:extLst xmlns:a="http://schemas.openxmlformats.org/drawingml/2006/main">
+              <a:ext uri="{FF2B5EF4-FFF2-40B4-BE49-F238E27FC236}">
+                <a16:creationId xmlns:a16="http://schemas.microsoft.com/office/drawing/2014/main" id="{B4BA79BC-047E-47EF-B9A7-0F2A83CD2F8F}"/>
               </a:ext>
             </a:extLst>
           </p:cNvPr>
@@ -6119,7 +6171,7 @@
         <p:spPr>
           <a:xfrm xmlns:a="http://schemas.openxmlformats.org/drawingml/2006/main">
             <a:off x="5162550" y="3762375"/>
-            <a:ext cx="1695450" cy="723900"/>
+            <a:ext cx="1695450" cy="781050"/>
           </a:xfrm>
           <a:prstGeom xmlns:a="http://schemas.openxmlformats.org/drawingml/2006/main" prst="rect">
             <a:avLst/>
@@ -6132,7 +6184,7 @@
           <a:lstStyle xmlns:a="http://schemas.openxmlformats.org/drawingml/2006/main"/>
           <a:p xmlns:a="http://schemas.openxmlformats.org/drawingml/2006/main">
             <a:pPr algn="l">
-              <a:defRPr sz="1350" b="0">
+              <a:defRPr sz="1650" b="0">
                 <a:solidFill>
                   <a:srgbClr val="5B6472"/>
                 </a:solidFill>
@@ -6149,10 +6201,10 @@
       </p:sp>
       <p:sp>
         <p:nvSpPr>
-          <p:cNvPr id="21" name="Shape-120">
-            <a:extLst xmlns:a="http://schemas.openxmlformats.org/drawingml/2006/main">
-              <a:ext uri="{FF2B5EF4-FFF2-40B4-BE49-F238E27FC236}">
-                <a16:creationId xmlns:a16="http://schemas.microsoft.com/office/drawing/2014/main" id="{E4A71279-B236-43CE-AB39-4CEFA72734EC}"/>
+          <p:cNvPr id="21" name="Shape-121">
+            <a:extLst xmlns:a="http://schemas.openxmlformats.org/drawingml/2006/main">
+              <a:ext uri="{FF2B5EF4-FFF2-40B4-BE49-F238E27FC236}">
+                <a16:creationId xmlns:a16="http://schemas.microsoft.com/office/drawing/2014/main" id="{CF3C8794-4DBE-4E0A-A810-7FE876A0DD43}"/>
               </a:ext>
             </a:extLst>
           </p:cNvPr>
@@ -6178,10 +6230,10 @@
       </p:sp>
       <p:sp>
         <p:nvSpPr>
-          <p:cNvPr id="22" name="Shape-121">
-            <a:extLst xmlns:a="http://schemas.openxmlformats.org/drawingml/2006/main">
-              <a:ext uri="{FF2B5EF4-FFF2-40B4-BE49-F238E27FC236}">
-                <a16:creationId xmlns:a16="http://schemas.microsoft.com/office/drawing/2014/main" id="{6A360B70-6C61-4D4D-AF15-19A17DF5551F}"/>
+          <p:cNvPr id="22" name="Shape-122">
+            <a:extLst xmlns:a="http://schemas.openxmlformats.org/drawingml/2006/main">
+              <a:ext uri="{FF2B5EF4-FFF2-40B4-BE49-F238E27FC236}">
+                <a16:creationId xmlns:a16="http://schemas.microsoft.com/office/drawing/2014/main" id="{19DA7474-2285-440A-A6FF-ACEDA4297918}"/>
               </a:ext>
             </a:extLst>
           </p:cNvPr>
@@ -6205,10 +6257,10 @@
       </p:sp>
       <p:sp>
         <p:nvSpPr>
-          <p:cNvPr id="23" name="Text-122">
-            <a:extLst xmlns:a="http://schemas.openxmlformats.org/drawingml/2006/main">
-              <a:ext uri="{FF2B5EF4-FFF2-40B4-BE49-F238E27FC236}">
-                <a16:creationId xmlns:a16="http://schemas.microsoft.com/office/drawing/2014/main" id="{A1F7485E-FD09-45A5-8A3C-BB2A2AC2E464}"/>
+          <p:cNvPr id="23" name="Text-123">
+            <a:extLst xmlns:a="http://schemas.openxmlformats.org/drawingml/2006/main">
+              <a:ext uri="{FF2B5EF4-FFF2-40B4-BE49-F238E27FC236}">
+                <a16:creationId xmlns:a16="http://schemas.microsoft.com/office/drawing/2014/main" id="{0B843CCD-06F7-4166-A557-924CAB463C0B}"/>
               </a:ext>
             </a:extLst>
           </p:cNvPr>
@@ -6220,7 +6272,7 @@
         <p:spPr>
           <a:xfrm xmlns:a="http://schemas.openxmlformats.org/drawingml/2006/main">
             <a:off x="7429500" y="1790700"/>
-            <a:ext cx="1695450" cy="495300"/>
+            <a:ext cx="1695450" cy="552450"/>
           </a:xfrm>
           <a:prstGeom xmlns:a="http://schemas.openxmlformats.org/drawingml/2006/main" prst="rect">
             <a:avLst/>
@@ -6233,7 +6285,7 @@
           <a:lstStyle xmlns:a="http://schemas.openxmlformats.org/drawingml/2006/main"/>
           <a:p xmlns:a="http://schemas.openxmlformats.org/drawingml/2006/main">
             <a:pPr algn="l">
-              <a:defRPr sz="1575" b="1">
+              <a:defRPr sz="1650" b="1">
                 <a:solidFill>
                   <a:srgbClr val="123DAE"/>
                 </a:solidFill>
@@ -6250,10 +6302,10 @@
       </p:sp>
       <p:sp>
         <p:nvSpPr>
-          <p:cNvPr id="24" name="Text-123">
-            <a:extLst xmlns:a="http://schemas.openxmlformats.org/drawingml/2006/main">
-              <a:ext uri="{FF2B5EF4-FFF2-40B4-BE49-F238E27FC236}">
-                <a16:creationId xmlns:a16="http://schemas.microsoft.com/office/drawing/2014/main" id="{2046F485-C570-41FC-A2E9-27D3FC2C5BBC}"/>
+          <p:cNvPr id="24" name="Text-124">
+            <a:extLst xmlns:a="http://schemas.openxmlformats.org/drawingml/2006/main">
+              <a:ext uri="{FF2B5EF4-FFF2-40B4-BE49-F238E27FC236}">
+                <a16:creationId xmlns:a16="http://schemas.microsoft.com/office/drawing/2014/main" id="{FEFEE5B4-8D4A-46A9-83DA-B6EBD7A66CC4}"/>
               </a:ext>
             </a:extLst>
           </p:cNvPr>
@@ -6295,7 +6347,7 @@
       </p:sp>
       <p:cxnSp>
         <p:nvCxnSpPr>
-          <p:cNvPr id="63" name="Rule-124"/>
+          <p:cNvPr id="63" name="Rule-125"/>
           <p:cNvCxnSpPr/>
           <p:nvPr/>
         </p:nvCxnSpPr>
@@ -6317,10 +6369,10 @@
       </p:cxnSp>
       <p:sp>
         <p:nvSpPr>
-          <p:cNvPr id="26" name="Text-125">
-            <a:extLst xmlns:a="http://schemas.openxmlformats.org/drawingml/2006/main">
-              <a:ext uri="{FF2B5EF4-FFF2-40B4-BE49-F238E27FC236}">
-                <a16:creationId xmlns:a16="http://schemas.microsoft.com/office/drawing/2014/main" id="{1042CAC8-F3BF-4DB9-93A7-E026B322F82F}"/>
+          <p:cNvPr id="26" name="Text-126">
+            <a:extLst xmlns:a="http://schemas.openxmlformats.org/drawingml/2006/main">
+              <a:ext uri="{FF2B5EF4-FFF2-40B4-BE49-F238E27FC236}">
+                <a16:creationId xmlns:a16="http://schemas.microsoft.com/office/drawing/2014/main" id="{C9A15A2E-8440-45A3-A1B5-FC7B54758F04}"/>
               </a:ext>
             </a:extLst>
           </p:cNvPr>
@@ -6332,7 +6384,7 @@
         <p:spPr>
           <a:xfrm xmlns:a="http://schemas.openxmlformats.org/drawingml/2006/main">
             <a:off x="7429500" y="3762375"/>
-            <a:ext cx="1695450" cy="723900"/>
+            <a:ext cx="1695450" cy="781050"/>
           </a:xfrm>
           <a:prstGeom xmlns:a="http://schemas.openxmlformats.org/drawingml/2006/main" prst="rect">
             <a:avLst/>
@@ -6345,7 +6397,7 @@
           <a:lstStyle xmlns:a="http://schemas.openxmlformats.org/drawingml/2006/main"/>
           <a:p xmlns:a="http://schemas.openxmlformats.org/drawingml/2006/main">
             <a:pPr algn="l">
-              <a:defRPr sz="1350" b="0">
+              <a:defRPr sz="1650" b="0">
                 <a:solidFill>
                   <a:srgbClr val="5B6472"/>
                 </a:solidFill>
@@ -6355,17 +6407,17 @@
               </a:defRPr>
             </a:pPr>
             <a:r>
-              <a:t>Starts at 1; strictly increases</a:t>
-            </a:r>
-          </a:p>
-        </p:txBody>
-      </p:sp>
-      <p:sp>
-        <p:nvSpPr>
-          <p:cNvPr id="27" name="Shape-126">
-            <a:extLst xmlns:a="http://schemas.openxmlformats.org/drawingml/2006/main">
-              <a:ext uri="{FF2B5EF4-FFF2-40B4-BE49-F238E27FC236}">
-                <a16:creationId xmlns:a16="http://schemas.microsoft.com/office/drawing/2014/main" id="{FDE1FB84-AC54-448E-B092-EDA53D42BEB3}"/>
+              <a:t>Per session: starts at 1; strictly increases</a:t>
+            </a:r>
+          </a:p>
+        </p:txBody>
+      </p:sp>
+      <p:sp>
+        <p:nvSpPr>
+          <p:cNvPr id="27" name="Shape-127">
+            <a:extLst xmlns:a="http://schemas.openxmlformats.org/drawingml/2006/main">
+              <a:ext uri="{FF2B5EF4-FFF2-40B4-BE49-F238E27FC236}">
+                <a16:creationId xmlns:a16="http://schemas.microsoft.com/office/drawing/2014/main" id="{01520915-FEE1-4C62-A114-EAE63E18592C}"/>
               </a:ext>
             </a:extLst>
           </p:cNvPr>
@@ -6391,10 +6443,10 @@
       </p:sp>
       <p:sp>
         <p:nvSpPr>
-          <p:cNvPr id="28" name="Shape-127">
-            <a:extLst xmlns:a="http://schemas.openxmlformats.org/drawingml/2006/main">
-              <a:ext uri="{FF2B5EF4-FFF2-40B4-BE49-F238E27FC236}">
-                <a16:creationId xmlns:a16="http://schemas.microsoft.com/office/drawing/2014/main" id="{E4D09854-BD8B-4E93-AD03-A6E7A0649D4A}"/>
+          <p:cNvPr id="28" name="Shape-128">
+            <a:extLst xmlns:a="http://schemas.openxmlformats.org/drawingml/2006/main">
+              <a:ext uri="{FF2B5EF4-FFF2-40B4-BE49-F238E27FC236}">
+                <a16:creationId xmlns:a16="http://schemas.microsoft.com/office/drawing/2014/main" id="{416CE162-0ED8-4795-AF7A-B3BA98E91E54}"/>
               </a:ext>
             </a:extLst>
           </p:cNvPr>
@@ -6418,10 +6470,10 @@
       </p:sp>
       <p:sp>
         <p:nvSpPr>
-          <p:cNvPr id="29" name="Text-128">
-            <a:extLst xmlns:a="http://schemas.openxmlformats.org/drawingml/2006/main">
-              <a:ext uri="{FF2B5EF4-FFF2-40B4-BE49-F238E27FC236}">
-                <a16:creationId xmlns:a16="http://schemas.microsoft.com/office/drawing/2014/main" id="{7B6B819C-7212-4977-A981-8249D888CD77}"/>
+          <p:cNvPr id="29" name="Text-129">
+            <a:extLst xmlns:a="http://schemas.openxmlformats.org/drawingml/2006/main">
+              <a:ext uri="{FF2B5EF4-FFF2-40B4-BE49-F238E27FC236}">
+                <a16:creationId xmlns:a16="http://schemas.microsoft.com/office/drawing/2014/main" id="{1CDB8BAF-47E8-4DBA-894C-35750D371B29}"/>
               </a:ext>
             </a:extLst>
           </p:cNvPr>
@@ -6433,7 +6485,7 @@
         <p:spPr>
           <a:xfrm xmlns:a="http://schemas.openxmlformats.org/drawingml/2006/main">
             <a:off x="9696450" y="1790700"/>
-            <a:ext cx="1695450" cy="495300"/>
+            <a:ext cx="1695450" cy="552450"/>
           </a:xfrm>
           <a:prstGeom xmlns:a="http://schemas.openxmlformats.org/drawingml/2006/main" prst="rect">
             <a:avLst/>
@@ -6446,7 +6498,7 @@
           <a:lstStyle xmlns:a="http://schemas.openxmlformats.org/drawingml/2006/main"/>
           <a:p xmlns:a="http://schemas.openxmlformats.org/drawingml/2006/main">
             <a:pPr algn="l">
-              <a:defRPr sz="1575" b="1">
+              <a:defRPr sz="1650" b="1">
                 <a:solidFill>
                   <a:srgbClr val="0B0D12"/>
                 </a:solidFill>
@@ -6463,10 +6515,10 @@
       </p:sp>
       <p:sp>
         <p:nvSpPr>
-          <p:cNvPr id="30" name="Text-129">
-            <a:extLst xmlns:a="http://schemas.openxmlformats.org/drawingml/2006/main">
-              <a:ext uri="{FF2B5EF4-FFF2-40B4-BE49-F238E27FC236}">
-                <a16:creationId xmlns:a16="http://schemas.microsoft.com/office/drawing/2014/main" id="{74B8043B-0015-42B5-B043-319310C987D2}"/>
+          <p:cNvPr id="30" name="Text-130">
+            <a:extLst xmlns:a="http://schemas.openxmlformats.org/drawingml/2006/main">
+              <a:ext uri="{FF2B5EF4-FFF2-40B4-BE49-F238E27FC236}">
+                <a16:creationId xmlns:a16="http://schemas.microsoft.com/office/drawing/2014/main" id="{BE245184-6AB7-43BE-861B-CB2763B1FD52}"/>
               </a:ext>
             </a:extLst>
           </p:cNvPr>
@@ -6508,7 +6560,7 @@
       </p:sp>
       <p:cxnSp>
         <p:nvCxnSpPr>
-          <p:cNvPr id="69" name="Rule-130"/>
+          <p:cNvPr id="69" name="Rule-131"/>
           <p:cNvCxnSpPr/>
           <p:nvPr/>
         </p:nvCxnSpPr>
@@ -6530,10 +6582,10 @@
       </p:cxnSp>
       <p:sp>
         <p:nvSpPr>
-          <p:cNvPr id="32" name="Text-131">
-            <a:extLst xmlns:a="http://schemas.openxmlformats.org/drawingml/2006/main">
-              <a:ext uri="{FF2B5EF4-FFF2-40B4-BE49-F238E27FC236}">
-                <a16:creationId xmlns:a16="http://schemas.microsoft.com/office/drawing/2014/main" id="{8A86A0AF-21FB-4DB6-926C-4067AA84F60F}"/>
+          <p:cNvPr id="32" name="Text-132">
+            <a:extLst xmlns:a="http://schemas.openxmlformats.org/drawingml/2006/main">
+              <a:ext uri="{FF2B5EF4-FFF2-40B4-BE49-F238E27FC236}">
+                <a16:creationId xmlns:a16="http://schemas.microsoft.com/office/drawing/2014/main" id="{DD118FE8-97D0-4163-BB4C-DAA4B8BD2748}"/>
               </a:ext>
             </a:extLst>
           </p:cNvPr>
@@ -6545,7 +6597,7 @@
         <p:spPr>
           <a:xfrm xmlns:a="http://schemas.openxmlformats.org/drawingml/2006/main">
             <a:off x="9696450" y="3762375"/>
-            <a:ext cx="1695450" cy="723900"/>
+            <a:ext cx="1695450" cy="781050"/>
           </a:xfrm>
           <a:prstGeom xmlns:a="http://schemas.openxmlformats.org/drawingml/2006/main" prst="rect">
             <a:avLst/>
@@ -6558,7 +6610,7 @@
           <a:lstStyle xmlns:a="http://schemas.openxmlformats.org/drawingml/2006/main"/>
           <a:p xmlns:a="http://schemas.openxmlformats.org/drawingml/2006/main">
             <a:pPr algn="l">
-              <a:defRPr sz="1350" b="0">
+              <a:defRPr sz="1650" b="0">
                 <a:solidFill>
                   <a:srgbClr val="5B6472"/>
                 </a:solidFill>
@@ -6575,10 +6627,10 @@
       </p:sp>
       <p:sp>
         <p:nvSpPr>
-          <p:cNvPr id="33" name="Shape-132">
-            <a:extLst xmlns:a="http://schemas.openxmlformats.org/drawingml/2006/main">
-              <a:ext uri="{FF2B5EF4-FFF2-40B4-BE49-F238E27FC236}">
-                <a16:creationId xmlns:a16="http://schemas.microsoft.com/office/drawing/2014/main" id="{CF3C5595-3A89-4FF0-9945-F2B5AFC35DCD}"/>
+          <p:cNvPr id="33" name="Shape-133">
+            <a:extLst xmlns:a="http://schemas.openxmlformats.org/drawingml/2006/main">
+              <a:ext uri="{FF2B5EF4-FFF2-40B4-BE49-F238E27FC236}">
+                <a16:creationId xmlns:a16="http://schemas.microsoft.com/office/drawing/2014/main" id="{B6A02C0C-A89E-46B1-B2A3-EF4B48914CE0}"/>
               </a:ext>
             </a:extLst>
           </p:cNvPr>
@@ -6604,10 +6656,10 @@
       </p:sp>
       <p:sp>
         <p:nvSpPr>
-          <p:cNvPr id="34" name="Text-133">
-            <a:extLst xmlns:a="http://schemas.openxmlformats.org/drawingml/2006/main">
-              <a:ext uri="{FF2B5EF4-FFF2-40B4-BE49-F238E27FC236}">
-                <a16:creationId xmlns:a16="http://schemas.microsoft.com/office/drawing/2014/main" id="{321BAEEB-D8CE-47FE-BA1E-07BEE1012363}"/>
+          <p:cNvPr id="34" name="Text-134">
+            <a:extLst xmlns:a="http://schemas.openxmlformats.org/drawingml/2006/main">
+              <a:ext uri="{FF2B5EF4-FFF2-40B4-BE49-F238E27FC236}">
+                <a16:creationId xmlns:a16="http://schemas.microsoft.com/office/drawing/2014/main" id="{9C16D1E5-6D27-478A-92C1-1AE6B85874E1}"/>
               </a:ext>
             </a:extLst>
           </p:cNvPr>
@@ -6649,10 +6701,10 @@
       </p:sp>
       <p:sp>
         <p:nvSpPr>
-          <p:cNvPr id="35" name="Text-134">
-            <a:extLst xmlns:a="http://schemas.openxmlformats.org/drawingml/2006/main">
-              <a:ext uri="{FF2B5EF4-FFF2-40B4-BE49-F238E27FC236}">
-                <a16:creationId xmlns:a16="http://schemas.microsoft.com/office/drawing/2014/main" id="{868591F8-184A-4FEA-AF45-186942ACC05C}"/>
+          <p:cNvPr id="35" name="Text-135">
+            <a:extLst xmlns:a="http://schemas.openxmlformats.org/drawingml/2006/main">
+              <a:ext uri="{FF2B5EF4-FFF2-40B4-BE49-F238E27FC236}">
+                <a16:creationId xmlns:a16="http://schemas.microsoft.com/office/drawing/2014/main" id="{84ED0136-AED3-4D8D-9DAB-2DEDB6E243BB}"/>
               </a:ext>
             </a:extLst>
           </p:cNvPr>
@@ -6677,7 +6729,7 @@
           <a:lstStyle xmlns:a="http://schemas.openxmlformats.org/drawingml/2006/main"/>
           <a:p xmlns:a="http://schemas.openxmlformats.org/drawingml/2006/main">
             <a:pPr algn="r">
-              <a:defRPr sz="1275" b="0">
+              <a:defRPr sz="1500" b="0">
                 <a:solidFill>
                   <a:srgbClr val="EAF0FF"/>
                 </a:solidFill>
@@ -6694,7 +6746,7 @@
       </p:sp>
       <p:cxnSp>
         <p:nvCxnSpPr>
-          <p:cNvPr id="74" name="Rule-135"/>
+          <p:cNvPr id="74" name="Rule-136"/>
           <p:cNvCxnSpPr/>
           <p:nvPr/>
         </p:nvCxnSpPr>
@@ -6716,10 +6768,10 @@
       </p:cxnSp>
       <p:sp>
         <p:nvSpPr>
-          <p:cNvPr id="37" name="Text-136">
-            <a:extLst xmlns:a="http://schemas.openxmlformats.org/drawingml/2006/main">
-              <a:ext uri="{FF2B5EF4-FFF2-40B4-BE49-F238E27FC236}">
-                <a16:creationId xmlns:a16="http://schemas.microsoft.com/office/drawing/2014/main" id="{369F1CE8-0EEB-4CBE-8D87-A81A7A6D1F3C}"/>
+          <p:cNvPr id="37" name="Text-137">
+            <a:extLst xmlns:a="http://schemas.openxmlformats.org/drawingml/2006/main">
+              <a:ext uri="{FF2B5EF4-FFF2-40B4-BE49-F238E27FC236}">
+                <a16:creationId xmlns:a16="http://schemas.microsoft.com/office/drawing/2014/main" id="{0C9A1ED6-3E09-4E90-8208-5D935CAE17D4}"/>
               </a:ext>
             </a:extLst>
           </p:cNvPr>
@@ -6761,10 +6813,10 @@
       </p:sp>
       <p:sp>
         <p:nvSpPr>
-          <p:cNvPr id="38" name="Text-137">
-            <a:extLst xmlns:a="http://schemas.openxmlformats.org/drawingml/2006/main">
-              <a:ext uri="{FF2B5EF4-FFF2-40B4-BE49-F238E27FC236}">
-                <a16:creationId xmlns:a16="http://schemas.microsoft.com/office/drawing/2014/main" id="{97B68E18-5E36-413B-A583-2E617BB0D8A4}"/>
+          <p:cNvPr id="38" name="Text-138">
+            <a:extLst xmlns:a="http://schemas.openxmlformats.org/drawingml/2006/main">
+              <a:ext uri="{FF2B5EF4-FFF2-40B4-BE49-F238E27FC236}">
+                <a16:creationId xmlns:a16="http://schemas.microsoft.com/office/drawing/2014/main" id="{D2D1F822-5A39-4109-9EF3-E9FBAA197325}"/>
               </a:ext>
             </a:extLst>
           </p:cNvPr>
@@ -6807,7 +6859,7 @@
     </p:spTree>
     <p:extLst>
       <p:ext uri="{BB962C8B-B14F-4D97-AF65-F5344CB8AC3E}">
-        <p14:creationId xmlns:p14="http://schemas.microsoft.com/office/powerpoint/2010/main" val="787630157"/>
+        <p14:creationId xmlns:p14="http://schemas.microsoft.com/office/powerpoint/2010/main" val="1488462018"/>
       </p:ext>
     </p:extLst>
   </p:cSld>
@@ -6828,10 +6880,10 @@
       </p:grpSpPr>
       <p:sp>
         <p:nvSpPr>
-          <p:cNvPr id="1" name="Shape-169">
-            <a:extLst xmlns:a="http://schemas.openxmlformats.org/drawingml/2006/main">
-              <a:ext uri="{FF2B5EF4-FFF2-40B4-BE49-F238E27FC236}">
-                <a16:creationId xmlns:a16="http://schemas.microsoft.com/office/drawing/2014/main" id="{282D6EFB-CEF2-4656-9BF0-23CA9B5C8852}"/>
+          <p:cNvPr id="1" name="Shape-171">
+            <a:extLst xmlns:a="http://schemas.openxmlformats.org/drawingml/2006/main">
+              <a:ext uri="{FF2B5EF4-FFF2-40B4-BE49-F238E27FC236}">
+                <a16:creationId xmlns:a16="http://schemas.microsoft.com/office/drawing/2014/main" id="{1F55C922-0D5B-4D59-B739-5F9AA80ABA4F}"/>
               </a:ext>
             </a:extLst>
           </p:cNvPr>
@@ -6855,10 +6907,10 @@
       </p:sp>
       <p:sp>
         <p:nvSpPr>
-          <p:cNvPr id="2" name="Text-139">
-            <a:extLst xmlns:a="http://schemas.openxmlformats.org/drawingml/2006/main">
-              <a:ext uri="{FF2B5EF4-FFF2-40B4-BE49-F238E27FC236}">
-                <a16:creationId xmlns:a16="http://schemas.microsoft.com/office/drawing/2014/main" id="{0BCAFD08-CF01-433F-816D-B4C3E1EAF680}"/>
+          <p:cNvPr id="2" name="Text-140">
+            <a:extLst xmlns:a="http://schemas.openxmlformats.org/drawingml/2006/main">
+              <a:ext uri="{FF2B5EF4-FFF2-40B4-BE49-F238E27FC236}">
+                <a16:creationId xmlns:a16="http://schemas.microsoft.com/office/drawing/2014/main" id="{5F4AB114-CA73-4A7B-B893-92D7F1B94CD4}"/>
               </a:ext>
             </a:extLst>
           </p:cNvPr>
@@ -6900,10 +6952,10 @@
       </p:sp>
       <p:sp>
         <p:nvSpPr>
-          <p:cNvPr id="3" name="Text-140">
-            <a:extLst xmlns:a="http://schemas.openxmlformats.org/drawingml/2006/main">
-              <a:ext uri="{FF2B5EF4-FFF2-40B4-BE49-F238E27FC236}">
-                <a16:creationId xmlns:a16="http://schemas.microsoft.com/office/drawing/2014/main" id="{43E6CBAD-8FC0-42EB-9730-A5DB5B67371B}"/>
+          <p:cNvPr id="3" name="Text-141">
+            <a:extLst xmlns:a="http://schemas.openxmlformats.org/drawingml/2006/main">
+              <a:ext uri="{FF2B5EF4-FFF2-40B4-BE49-F238E27FC236}">
+                <a16:creationId xmlns:a16="http://schemas.microsoft.com/office/drawing/2014/main" id="{AF4AE2E2-AB66-4CBF-9000-47F421E9A2C1}"/>
               </a:ext>
             </a:extLst>
           </p:cNvPr>
@@ -6945,10 +6997,10 @@
       </p:sp>
       <p:sp>
         <p:nvSpPr>
-          <p:cNvPr id="4" name="Shape-141">
-            <a:extLst xmlns:a="http://schemas.openxmlformats.org/drawingml/2006/main">
-              <a:ext uri="{FF2B5EF4-FFF2-40B4-BE49-F238E27FC236}">
-                <a16:creationId xmlns:a16="http://schemas.microsoft.com/office/drawing/2014/main" id="{3E491EB0-3005-4B81-8214-E24EF4AD9306}"/>
+          <p:cNvPr id="4" name="Shape-142">
+            <a:extLst xmlns:a="http://schemas.openxmlformats.org/drawingml/2006/main">
+              <a:ext uri="{FF2B5EF4-FFF2-40B4-BE49-F238E27FC236}">
+                <a16:creationId xmlns:a16="http://schemas.microsoft.com/office/drawing/2014/main" id="{F7F7BD34-0712-482A-934F-073BB5FB0E5C}"/>
               </a:ext>
             </a:extLst>
           </p:cNvPr>
@@ -6974,10 +7026,10 @@
       </p:sp>
       <p:sp>
         <p:nvSpPr>
-          <p:cNvPr id="5" name="Text-142">
-            <a:extLst xmlns:a="http://schemas.openxmlformats.org/drawingml/2006/main">
-              <a:ext uri="{FF2B5EF4-FFF2-40B4-BE49-F238E27FC236}">
-                <a16:creationId xmlns:a16="http://schemas.microsoft.com/office/drawing/2014/main" id="{2619B86A-A44D-4F5E-81FE-C7E243C7F3F6}"/>
+          <p:cNvPr id="5" name="Text-143">
+            <a:extLst xmlns:a="http://schemas.openxmlformats.org/drawingml/2006/main">
+              <a:ext uri="{FF2B5EF4-FFF2-40B4-BE49-F238E27FC236}">
+                <a16:creationId xmlns:a16="http://schemas.microsoft.com/office/drawing/2014/main" id="{47427C3F-3DE3-4BEF-A88D-FF72B2336FA0}"/>
               </a:ext>
             </a:extLst>
           </p:cNvPr>
@@ -6997,12 +7049,12 @@
         </p:spPr>
         <p:txBody>
           <a:bodyPr xmlns:a="http://schemas.openxmlformats.org/drawingml/2006/main" lIns="0" tIns="0" rIns="0" bIns="0" anchor="t">
-            <a:normAutofit fontScale="100000"/>
+            <a:normAutofit fontScale="90909"/>
           </a:bodyPr>
           <a:lstStyle xmlns:a="http://schemas.openxmlformats.org/drawingml/2006/main"/>
           <a:p xmlns:a="http://schemas.openxmlformats.org/drawingml/2006/main">
             <a:pPr algn="ctr">
-              <a:defRPr sz="1200" b="1">
+              <a:defRPr sz="1650" b="1">
                 <a:solidFill>
                   <a:srgbClr val="B96800"/>
                 </a:solidFill>
@@ -7019,7 +7071,7 @@
       </p:sp>
       <p:cxnSp>
         <p:nvCxnSpPr>
-          <p:cNvPr id="37" name="Rule-143"/>
+          <p:cNvPr id="38" name="Rule-144"/>
           <p:cNvCxnSpPr/>
           <p:nvPr/>
         </p:nvCxnSpPr>
@@ -7041,14 +7093,14 @@
       </p:cxnSp>
       <p:cxnSp>
         <p:nvCxnSpPr>
-          <p:cNvPr id="38" name="Rule-144"/>
+          <p:cNvPr id="39" name="Rule-145"/>
           <p:cNvCxnSpPr/>
           <p:nvPr/>
         </p:nvCxnSpPr>
         <p:spPr>
           <a:xfrm xmlns:a="http://schemas.openxmlformats.org/drawingml/2006/main">
-            <a:off x="6962775" y="3943350"/>
-            <a:ext cx="95" cy="571500"/>
+            <a:off x="6781800" y="3000375"/>
+            <a:ext cx="1962150" cy="95"/>
           </a:xfrm>
           <a:prstGeom xmlns:a="http://schemas.openxmlformats.org/drawingml/2006/main" prst="straightConnector1">
             <a:avLst/>
@@ -7061,24 +7113,46 @@
           </a:ln>
         </p:spPr>
       </p:cxnSp>
-      <p:sp>
-        <p:nvSpPr>
-          <p:cNvPr id="8" name="Shape-145">
-            <a:extLst xmlns:a="http://schemas.openxmlformats.org/drawingml/2006/main">
-              <a:ext uri="{FF2B5EF4-FFF2-40B4-BE49-F238E27FC236}">
-                <a16:creationId xmlns:a16="http://schemas.microsoft.com/office/drawing/2014/main" id="{E2784E2B-5E75-4768-83CC-526738BCC9A0}"/>
-              </a:ext>
-            </a:extLst>
-          </p:cNvPr>
-          <p:cNvSpPr>
-            <a:spLocks xmlns:a="http://schemas.openxmlformats.org/drawingml/2006/main" noGrp="1"/>
-          </p:cNvSpPr>
-          <p:nvPr/>
-        </p:nvSpPr>
-        <p:spPr>
-          <a:xfrm xmlns:a="http://schemas.openxmlformats.org/drawingml/2006/main">
-            <a:off x="981075" y="2752725"/>
-            <a:ext cx="247650" cy="247650"/>
+      <p:cxnSp>
+        <p:nvCxnSpPr>
+          <p:cNvPr id="40" name="Rule-146"/>
+          <p:cNvCxnSpPr/>
+          <p:nvPr/>
+        </p:nvCxnSpPr>
+        <p:spPr>
+          <a:xfrm xmlns:a="http://schemas.openxmlformats.org/drawingml/2006/main">
+            <a:off x="8743950" y="3000375"/>
+            <a:ext cx="95" cy="1400175"/>
+          </a:xfrm>
+          <a:prstGeom xmlns:a="http://schemas.openxmlformats.org/drawingml/2006/main" prst="straightConnector1">
+            <a:avLst/>
+          </a:prstGeom>
+          <a:ln xmlns:a="http://schemas.openxmlformats.org/drawingml/2006/main" w="28575">
+            <a:solidFill>
+              <a:srgbClr val="C33A32"/>
+            </a:solidFill>
+            <a:prstDash val="solid"/>
+          </a:ln>
+        </p:spPr>
+      </p:cxnSp>
+      <p:sp>
+        <p:nvSpPr>
+          <p:cNvPr id="9" name="Shape-147">
+            <a:extLst xmlns:a="http://schemas.openxmlformats.org/drawingml/2006/main">
+              <a:ext uri="{FF2B5EF4-FFF2-40B4-BE49-F238E27FC236}">
+                <a16:creationId xmlns:a16="http://schemas.microsoft.com/office/drawing/2014/main" id="{78A547B1-426B-41DB-B795-2B01D2735F04}"/>
+              </a:ext>
+            </a:extLst>
+          </p:cNvPr>
+          <p:cNvSpPr>
+            <a:spLocks xmlns:a="http://schemas.openxmlformats.org/drawingml/2006/main" noGrp="1"/>
+          </p:cNvSpPr>
+          <p:nvPr/>
+        </p:nvSpPr>
+        <p:spPr>
+          <a:xfrm xmlns:a="http://schemas.openxmlformats.org/drawingml/2006/main">
+            <a:off x="962025" y="2733675"/>
+            <a:ext cx="285750" cy="285750"/>
           </a:xfrm>
           <a:prstGeom xmlns:a="http://schemas.openxmlformats.org/drawingml/2006/main" prst="ellipse">
             <a:avLst/>
@@ -7090,35 +7164,35 @@
       </p:sp>
       <p:sp>
         <p:nvSpPr>
-          <p:cNvPr id="9" name="Text-146">
-            <a:extLst xmlns:a="http://schemas.openxmlformats.org/drawingml/2006/main">
-              <a:ext uri="{FF2B5EF4-FFF2-40B4-BE49-F238E27FC236}">
-                <a16:creationId xmlns:a16="http://schemas.microsoft.com/office/drawing/2014/main" id="{8E79E7A6-DA6E-4998-AE4A-D2B8F7ADE03F}"/>
-              </a:ext>
-            </a:extLst>
-          </p:cNvPr>
-          <p:cNvSpPr>
-            <a:spLocks xmlns:a="http://schemas.openxmlformats.org/drawingml/2006/main" noGrp="1"/>
-          </p:cNvSpPr>
-          <p:nvPr/>
-        </p:nvSpPr>
-        <p:spPr>
-          <a:xfrm xmlns:a="http://schemas.openxmlformats.org/drawingml/2006/main">
-            <a:off x="1047750" y="2790825"/>
-            <a:ext cx="114300" cy="152400"/>
-          </a:xfrm>
-          <a:prstGeom xmlns:a="http://schemas.openxmlformats.org/drawingml/2006/main" prst="rect">
-            <a:avLst/>
-          </a:prstGeom>
-        </p:spPr>
-        <p:txBody>
-          <a:bodyPr xmlns:a="http://schemas.openxmlformats.org/drawingml/2006/main" lIns="0" tIns="0" rIns="0" bIns="0" anchor="t">
-            <a:normAutofit fontScale="100000"/>
+          <p:cNvPr id="10" name="Text-148">
+            <a:extLst xmlns:a="http://schemas.openxmlformats.org/drawingml/2006/main">
+              <a:ext uri="{FF2B5EF4-FFF2-40B4-BE49-F238E27FC236}">
+                <a16:creationId xmlns:a16="http://schemas.microsoft.com/office/drawing/2014/main" id="{10702414-8D26-4428-B770-9F1C6E5E5A73}"/>
+              </a:ext>
+            </a:extLst>
+          </p:cNvPr>
+          <p:cNvSpPr>
+            <a:spLocks xmlns:a="http://schemas.openxmlformats.org/drawingml/2006/main" noGrp="1"/>
+          </p:cNvSpPr>
+          <p:nvPr/>
+        </p:nvSpPr>
+        <p:spPr>
+          <a:xfrm xmlns:a="http://schemas.openxmlformats.org/drawingml/2006/main">
+            <a:off x="1028700" y="2781300"/>
+            <a:ext cx="152400" cy="190500"/>
+          </a:xfrm>
+          <a:prstGeom xmlns:a="http://schemas.openxmlformats.org/drawingml/2006/main" prst="rect">
+            <a:avLst/>
+          </a:prstGeom>
+        </p:spPr>
+        <p:txBody>
+          <a:bodyPr xmlns:a="http://schemas.openxmlformats.org/drawingml/2006/main" lIns="0" tIns="0" rIns="0" bIns="0" anchor="t">
+            <a:normAutofit fontScale="92593"/>
           </a:bodyPr>
           <a:lstStyle xmlns:a="http://schemas.openxmlformats.org/drawingml/2006/main"/>
           <a:p xmlns:a="http://schemas.openxmlformats.org/drawingml/2006/main">
             <a:pPr algn="ctr">
-              <a:defRPr sz="825" b="1">
+              <a:defRPr sz="1350" b="1">
                 <a:solidFill>
                   <a:srgbClr val="FFFFFF"/>
                 </a:solidFill>
@@ -7135,10 +7209,10 @@
       </p:sp>
       <p:sp>
         <p:nvSpPr>
-          <p:cNvPr id="10" name="Text-147">
-            <a:extLst xmlns:a="http://schemas.openxmlformats.org/drawingml/2006/main">
-              <a:ext uri="{FF2B5EF4-FFF2-40B4-BE49-F238E27FC236}">
-                <a16:creationId xmlns:a16="http://schemas.microsoft.com/office/drawing/2014/main" id="{59E0CBBA-0646-4F63-87EA-7329D2C9EED0}"/>
+          <p:cNvPr id="11" name="Text-149">
+            <a:extLst xmlns:a="http://schemas.openxmlformats.org/drawingml/2006/main">
+              <a:ext uri="{FF2B5EF4-FFF2-40B4-BE49-F238E27FC236}">
+                <a16:creationId xmlns:a16="http://schemas.microsoft.com/office/drawing/2014/main" id="{3965B641-816D-4D75-A9EA-86FA51972466}"/>
               </a:ext>
             </a:extLst>
           </p:cNvPr>
@@ -7163,7 +7237,7 @@
           <a:lstStyle xmlns:a="http://schemas.openxmlformats.org/drawingml/2006/main"/>
           <a:p xmlns:a="http://schemas.openxmlformats.org/drawingml/2006/main">
             <a:pPr algn="l">
-              <a:defRPr sz="1875" b="1">
+              <a:defRPr sz="1650" b="1">
                 <a:solidFill>
                   <a:srgbClr val="0B0D12"/>
                 </a:solidFill>
@@ -7180,10 +7254,10 @@
       </p:sp>
       <p:sp>
         <p:nvSpPr>
-          <p:cNvPr id="11" name="Text-148">
-            <a:extLst xmlns:a="http://schemas.openxmlformats.org/drawingml/2006/main">
-              <a:ext uri="{FF2B5EF4-FFF2-40B4-BE49-F238E27FC236}">
-                <a16:creationId xmlns:a16="http://schemas.microsoft.com/office/drawing/2014/main" id="{4ED87E04-4783-4F45-9972-D4F360A0BC5B}"/>
+          <p:cNvPr id="12" name="Text-150">
+            <a:extLst xmlns:a="http://schemas.openxmlformats.org/drawingml/2006/main">
+              <a:ext uri="{FF2B5EF4-FFF2-40B4-BE49-F238E27FC236}">
+                <a16:creationId xmlns:a16="http://schemas.microsoft.com/office/drawing/2014/main" id="{E5AC9C07-117A-49CE-BB97-C67EA1F17F22}"/>
               </a:ext>
             </a:extLst>
           </p:cNvPr>
@@ -7195,7 +7269,7 @@
         <p:spPr>
           <a:xfrm xmlns:a="http://schemas.openxmlformats.org/drawingml/2006/main">
             <a:off x="457200" y="3171825"/>
-            <a:ext cx="2381250" cy="647700"/>
+            <a:ext cx="2381250" cy="685800"/>
           </a:xfrm>
           <a:prstGeom xmlns:a="http://schemas.openxmlformats.org/drawingml/2006/main" prst="rect">
             <a:avLst/>
@@ -7208,7 +7282,7 @@
           <a:lstStyle xmlns:a="http://schemas.openxmlformats.org/drawingml/2006/main"/>
           <a:p xmlns:a="http://schemas.openxmlformats.org/drawingml/2006/main">
             <a:pPr algn="l">
-              <a:defRPr sz="1350" b="0">
+              <a:defRPr sz="1650" b="0">
                 <a:solidFill>
                   <a:srgbClr val="5B6472"/>
                 </a:solidFill>
@@ -7225,22 +7299,22 @@
       </p:sp>
       <p:sp>
         <p:nvSpPr>
-          <p:cNvPr id="12" name="Shape-149">
-            <a:extLst xmlns:a="http://schemas.openxmlformats.org/drawingml/2006/main">
-              <a:ext uri="{FF2B5EF4-FFF2-40B4-BE49-F238E27FC236}">
-                <a16:creationId xmlns:a16="http://schemas.microsoft.com/office/drawing/2014/main" id="{36366F85-3B99-47F2-8A2A-3ED545CEA700}"/>
-              </a:ext>
-            </a:extLst>
-          </p:cNvPr>
-          <p:cNvSpPr>
-            <a:spLocks xmlns:a="http://schemas.openxmlformats.org/drawingml/2006/main" noGrp="1"/>
-          </p:cNvSpPr>
-          <p:nvPr/>
-        </p:nvSpPr>
-        <p:spPr>
-          <a:xfrm xmlns:a="http://schemas.openxmlformats.org/drawingml/2006/main">
-            <a:off x="3819525" y="2752725"/>
-            <a:ext cx="247650" cy="247650"/>
+          <p:cNvPr id="13" name="Shape-151">
+            <a:extLst xmlns:a="http://schemas.openxmlformats.org/drawingml/2006/main">
+              <a:ext uri="{FF2B5EF4-FFF2-40B4-BE49-F238E27FC236}">
+                <a16:creationId xmlns:a16="http://schemas.microsoft.com/office/drawing/2014/main" id="{016B222B-2FA1-4114-978B-08AA6C67D74A}"/>
+              </a:ext>
+            </a:extLst>
+          </p:cNvPr>
+          <p:cNvSpPr>
+            <a:spLocks xmlns:a="http://schemas.openxmlformats.org/drawingml/2006/main" noGrp="1"/>
+          </p:cNvSpPr>
+          <p:nvPr/>
+        </p:nvSpPr>
+        <p:spPr>
+          <a:xfrm xmlns:a="http://schemas.openxmlformats.org/drawingml/2006/main">
+            <a:off x="3800475" y="2733675"/>
+            <a:ext cx="285750" cy="285750"/>
           </a:xfrm>
           <a:prstGeom xmlns:a="http://schemas.openxmlformats.org/drawingml/2006/main" prst="ellipse">
             <a:avLst/>
@@ -7252,35 +7326,35 @@
       </p:sp>
       <p:sp>
         <p:nvSpPr>
-          <p:cNvPr id="13" name="Text-150">
-            <a:extLst xmlns:a="http://schemas.openxmlformats.org/drawingml/2006/main">
-              <a:ext uri="{FF2B5EF4-FFF2-40B4-BE49-F238E27FC236}">
-                <a16:creationId xmlns:a16="http://schemas.microsoft.com/office/drawing/2014/main" id="{18C81702-B04A-4C1A-A653-811302FA2BD5}"/>
-              </a:ext>
-            </a:extLst>
-          </p:cNvPr>
-          <p:cNvSpPr>
-            <a:spLocks xmlns:a="http://schemas.openxmlformats.org/drawingml/2006/main" noGrp="1"/>
-          </p:cNvSpPr>
-          <p:nvPr/>
-        </p:nvSpPr>
-        <p:spPr>
-          <a:xfrm xmlns:a="http://schemas.openxmlformats.org/drawingml/2006/main">
-            <a:off x="3886200" y="2790825"/>
-            <a:ext cx="114300" cy="152400"/>
-          </a:xfrm>
-          <a:prstGeom xmlns:a="http://schemas.openxmlformats.org/drawingml/2006/main" prst="rect">
-            <a:avLst/>
-          </a:prstGeom>
-        </p:spPr>
-        <p:txBody>
-          <a:bodyPr xmlns:a="http://schemas.openxmlformats.org/drawingml/2006/main" lIns="0" tIns="0" rIns="0" bIns="0" anchor="t">
-            <a:normAutofit fontScale="100000"/>
+          <p:cNvPr id="14" name="Text-152">
+            <a:extLst xmlns:a="http://schemas.openxmlformats.org/drawingml/2006/main">
+              <a:ext uri="{FF2B5EF4-FFF2-40B4-BE49-F238E27FC236}">
+                <a16:creationId xmlns:a16="http://schemas.microsoft.com/office/drawing/2014/main" id="{FC68E4A3-EBEE-44CC-80A2-1905FA5995F7}"/>
+              </a:ext>
+            </a:extLst>
+          </p:cNvPr>
+          <p:cNvSpPr>
+            <a:spLocks xmlns:a="http://schemas.openxmlformats.org/drawingml/2006/main" noGrp="1"/>
+          </p:cNvSpPr>
+          <p:nvPr/>
+        </p:nvSpPr>
+        <p:spPr>
+          <a:xfrm xmlns:a="http://schemas.openxmlformats.org/drawingml/2006/main">
+            <a:off x="3867150" y="2781300"/>
+            <a:ext cx="152400" cy="190500"/>
+          </a:xfrm>
+          <a:prstGeom xmlns:a="http://schemas.openxmlformats.org/drawingml/2006/main" prst="rect">
+            <a:avLst/>
+          </a:prstGeom>
+        </p:spPr>
+        <p:txBody>
+          <a:bodyPr xmlns:a="http://schemas.openxmlformats.org/drawingml/2006/main" lIns="0" tIns="0" rIns="0" bIns="0" anchor="t">
+            <a:normAutofit fontScale="92593"/>
           </a:bodyPr>
           <a:lstStyle xmlns:a="http://schemas.openxmlformats.org/drawingml/2006/main"/>
           <a:p xmlns:a="http://schemas.openxmlformats.org/drawingml/2006/main">
             <a:pPr algn="ctr">
-              <a:defRPr sz="825" b="1">
+              <a:defRPr sz="1350" b="1">
                 <a:solidFill>
                   <a:srgbClr val="FFFFFF"/>
                 </a:solidFill>
@@ -7297,10 +7371,10 @@
       </p:sp>
       <p:sp>
         <p:nvSpPr>
-          <p:cNvPr id="14" name="Text-151">
-            <a:extLst xmlns:a="http://schemas.openxmlformats.org/drawingml/2006/main">
-              <a:ext uri="{FF2B5EF4-FFF2-40B4-BE49-F238E27FC236}">
-                <a16:creationId xmlns:a16="http://schemas.microsoft.com/office/drawing/2014/main" id="{7B4E978D-C860-4478-BAEC-A4134925E975}"/>
+          <p:cNvPr id="15" name="Text-153">
+            <a:extLst xmlns:a="http://schemas.openxmlformats.org/drawingml/2006/main">
+              <a:ext uri="{FF2B5EF4-FFF2-40B4-BE49-F238E27FC236}">
+                <a16:creationId xmlns:a16="http://schemas.microsoft.com/office/drawing/2014/main" id="{6C2B412E-603A-40F1-83E6-844B575DA8BA}"/>
               </a:ext>
             </a:extLst>
           </p:cNvPr>
@@ -7325,7 +7399,7 @@
           <a:lstStyle xmlns:a="http://schemas.openxmlformats.org/drawingml/2006/main"/>
           <a:p xmlns:a="http://schemas.openxmlformats.org/drawingml/2006/main">
             <a:pPr algn="l">
-              <a:defRPr sz="1500" b="1">
+              <a:defRPr sz="1650" b="1">
                 <a:solidFill>
                   <a:srgbClr val="0B0D12"/>
                 </a:solidFill>
@@ -7342,10 +7416,10 @@
       </p:sp>
       <p:sp>
         <p:nvSpPr>
-          <p:cNvPr id="15" name="Text-152">
-            <a:extLst xmlns:a="http://schemas.openxmlformats.org/drawingml/2006/main">
-              <a:ext uri="{FF2B5EF4-FFF2-40B4-BE49-F238E27FC236}">
-                <a16:creationId xmlns:a16="http://schemas.microsoft.com/office/drawing/2014/main" id="{B0448027-562E-4563-A5EB-52CBD7A47BA0}"/>
+          <p:cNvPr id="16" name="Text-154">
+            <a:extLst xmlns:a="http://schemas.openxmlformats.org/drawingml/2006/main">
+              <a:ext uri="{FF2B5EF4-FFF2-40B4-BE49-F238E27FC236}">
+                <a16:creationId xmlns:a16="http://schemas.microsoft.com/office/drawing/2014/main" id="{A9116899-1ED6-4A67-908E-FBBEAD3BFFA0}"/>
               </a:ext>
             </a:extLst>
           </p:cNvPr>
@@ -7357,7 +7431,7 @@
         <p:spPr>
           <a:xfrm xmlns:a="http://schemas.openxmlformats.org/drawingml/2006/main">
             <a:off x="3295650" y="3171825"/>
-            <a:ext cx="2381250" cy="647700"/>
+            <a:ext cx="2381250" cy="685800"/>
           </a:xfrm>
           <a:prstGeom xmlns:a="http://schemas.openxmlformats.org/drawingml/2006/main" prst="rect">
             <a:avLst/>
@@ -7370,7 +7444,7 @@
           <a:lstStyle xmlns:a="http://schemas.openxmlformats.org/drawingml/2006/main"/>
           <a:p xmlns:a="http://schemas.openxmlformats.org/drawingml/2006/main">
             <a:pPr algn="l">
-              <a:defRPr sz="1350" b="0">
+              <a:defRPr sz="1650" b="0">
                 <a:solidFill>
                   <a:srgbClr val="5B6472"/>
                 </a:solidFill>
@@ -7387,22 +7461,22 @@
       </p:sp>
       <p:sp>
         <p:nvSpPr>
-          <p:cNvPr id="16" name="Shape-153">
-            <a:extLst xmlns:a="http://schemas.openxmlformats.org/drawingml/2006/main">
-              <a:ext uri="{FF2B5EF4-FFF2-40B4-BE49-F238E27FC236}">
-                <a16:creationId xmlns:a16="http://schemas.microsoft.com/office/drawing/2014/main" id="{276B02EB-B959-4BD9-81B0-5459A4C877FF}"/>
-              </a:ext>
-            </a:extLst>
-          </p:cNvPr>
-          <p:cNvSpPr>
-            <a:spLocks xmlns:a="http://schemas.openxmlformats.org/drawingml/2006/main" noGrp="1"/>
-          </p:cNvSpPr>
-          <p:nvPr/>
-        </p:nvSpPr>
-        <p:spPr>
-          <a:xfrm xmlns:a="http://schemas.openxmlformats.org/drawingml/2006/main">
-            <a:off x="6657975" y="2752725"/>
-            <a:ext cx="247650" cy="247650"/>
+          <p:cNvPr id="17" name="Shape-155">
+            <a:extLst xmlns:a="http://schemas.openxmlformats.org/drawingml/2006/main">
+              <a:ext uri="{FF2B5EF4-FFF2-40B4-BE49-F238E27FC236}">
+                <a16:creationId xmlns:a16="http://schemas.microsoft.com/office/drawing/2014/main" id="{CF3804E1-434D-42CB-A580-0C129F5D313F}"/>
+              </a:ext>
+            </a:extLst>
+          </p:cNvPr>
+          <p:cNvSpPr>
+            <a:spLocks xmlns:a="http://schemas.openxmlformats.org/drawingml/2006/main" noGrp="1"/>
+          </p:cNvSpPr>
+          <p:nvPr/>
+        </p:nvSpPr>
+        <p:spPr>
+          <a:xfrm xmlns:a="http://schemas.openxmlformats.org/drawingml/2006/main">
+            <a:off x="6638925" y="2733675"/>
+            <a:ext cx="285750" cy="285750"/>
           </a:xfrm>
           <a:prstGeom xmlns:a="http://schemas.openxmlformats.org/drawingml/2006/main" prst="ellipse">
             <a:avLst/>
@@ -7414,35 +7488,35 @@
       </p:sp>
       <p:sp>
         <p:nvSpPr>
-          <p:cNvPr id="17" name="Text-154">
-            <a:extLst xmlns:a="http://schemas.openxmlformats.org/drawingml/2006/main">
-              <a:ext uri="{FF2B5EF4-FFF2-40B4-BE49-F238E27FC236}">
-                <a16:creationId xmlns:a16="http://schemas.microsoft.com/office/drawing/2014/main" id="{6BD91283-25BD-4136-8854-C8B59A6F33F7}"/>
-              </a:ext>
-            </a:extLst>
-          </p:cNvPr>
-          <p:cNvSpPr>
-            <a:spLocks xmlns:a="http://schemas.openxmlformats.org/drawingml/2006/main" noGrp="1"/>
-          </p:cNvSpPr>
-          <p:nvPr/>
-        </p:nvSpPr>
-        <p:spPr>
-          <a:xfrm xmlns:a="http://schemas.openxmlformats.org/drawingml/2006/main">
-            <a:off x="6724650" y="2790825"/>
-            <a:ext cx="114300" cy="152400"/>
-          </a:xfrm>
-          <a:prstGeom xmlns:a="http://schemas.openxmlformats.org/drawingml/2006/main" prst="rect">
-            <a:avLst/>
-          </a:prstGeom>
-        </p:spPr>
-        <p:txBody>
-          <a:bodyPr xmlns:a="http://schemas.openxmlformats.org/drawingml/2006/main" lIns="0" tIns="0" rIns="0" bIns="0" anchor="t">
-            <a:normAutofit fontScale="100000"/>
+          <p:cNvPr id="18" name="Text-156">
+            <a:extLst xmlns:a="http://schemas.openxmlformats.org/drawingml/2006/main">
+              <a:ext uri="{FF2B5EF4-FFF2-40B4-BE49-F238E27FC236}">
+                <a16:creationId xmlns:a16="http://schemas.microsoft.com/office/drawing/2014/main" id="{84F8B50A-093C-4F9C-B56F-B8CE9A29B42D}"/>
+              </a:ext>
+            </a:extLst>
+          </p:cNvPr>
+          <p:cNvSpPr>
+            <a:spLocks xmlns:a="http://schemas.openxmlformats.org/drawingml/2006/main" noGrp="1"/>
+          </p:cNvSpPr>
+          <p:nvPr/>
+        </p:nvSpPr>
+        <p:spPr>
+          <a:xfrm xmlns:a="http://schemas.openxmlformats.org/drawingml/2006/main">
+            <a:off x="6705600" y="2781300"/>
+            <a:ext cx="152400" cy="190500"/>
+          </a:xfrm>
+          <a:prstGeom xmlns:a="http://schemas.openxmlformats.org/drawingml/2006/main" prst="rect">
+            <a:avLst/>
+          </a:prstGeom>
+        </p:spPr>
+        <p:txBody>
+          <a:bodyPr xmlns:a="http://schemas.openxmlformats.org/drawingml/2006/main" lIns="0" tIns="0" rIns="0" bIns="0" anchor="t">
+            <a:normAutofit fontScale="92593"/>
           </a:bodyPr>
           <a:lstStyle xmlns:a="http://schemas.openxmlformats.org/drawingml/2006/main"/>
           <a:p xmlns:a="http://schemas.openxmlformats.org/drawingml/2006/main">
             <a:pPr algn="ctr">
-              <a:defRPr sz="825" b="1">
+              <a:defRPr sz="1350" b="1">
                 <a:solidFill>
                   <a:srgbClr val="FFFFFF"/>
                 </a:solidFill>
@@ -7459,10 +7533,10 @@
       </p:sp>
       <p:sp>
         <p:nvSpPr>
-          <p:cNvPr id="18" name="Text-155">
-            <a:extLst xmlns:a="http://schemas.openxmlformats.org/drawingml/2006/main">
-              <a:ext uri="{FF2B5EF4-FFF2-40B4-BE49-F238E27FC236}">
-                <a16:creationId xmlns:a16="http://schemas.microsoft.com/office/drawing/2014/main" id="{F8F58059-1F66-4683-A9E7-EC4B313D7DFC}"/>
+          <p:cNvPr id="19" name="Text-157">
+            <a:extLst xmlns:a="http://schemas.openxmlformats.org/drawingml/2006/main">
+              <a:ext uri="{FF2B5EF4-FFF2-40B4-BE49-F238E27FC236}">
+                <a16:creationId xmlns:a16="http://schemas.microsoft.com/office/drawing/2014/main" id="{DE9A26D0-9C65-4394-AD63-16F5E0B9AD47}"/>
               </a:ext>
             </a:extLst>
           </p:cNvPr>
@@ -7487,7 +7561,7 @@
           <a:lstStyle xmlns:a="http://schemas.openxmlformats.org/drawingml/2006/main"/>
           <a:p xmlns:a="http://schemas.openxmlformats.org/drawingml/2006/main">
             <a:pPr algn="l">
-              <a:defRPr sz="1500" b="1">
+              <a:defRPr sz="1650" b="1">
                 <a:solidFill>
                   <a:srgbClr val="0B0D12"/>
                 </a:solidFill>
@@ -7504,10 +7578,10 @@
       </p:sp>
       <p:sp>
         <p:nvSpPr>
-          <p:cNvPr id="19" name="Text-156">
-            <a:extLst xmlns:a="http://schemas.openxmlformats.org/drawingml/2006/main">
-              <a:ext uri="{FF2B5EF4-FFF2-40B4-BE49-F238E27FC236}">
-                <a16:creationId xmlns:a16="http://schemas.microsoft.com/office/drawing/2014/main" id="{C45E51D3-1E73-4489-9687-79F8AFE60042}"/>
+          <p:cNvPr id="20" name="Text-158">
+            <a:extLst xmlns:a="http://schemas.openxmlformats.org/drawingml/2006/main">
+              <a:ext uri="{FF2B5EF4-FFF2-40B4-BE49-F238E27FC236}">
+                <a16:creationId xmlns:a16="http://schemas.microsoft.com/office/drawing/2014/main" id="{61029B9A-37B5-4396-BFBE-12F43B876D62}"/>
               </a:ext>
             </a:extLst>
           </p:cNvPr>
@@ -7519,20 +7593,20 @@
         <p:spPr>
           <a:xfrm xmlns:a="http://schemas.openxmlformats.org/drawingml/2006/main">
             <a:off x="6134100" y="3171825"/>
-            <a:ext cx="2381250" cy="647700"/>
-          </a:xfrm>
-          <a:prstGeom xmlns:a="http://schemas.openxmlformats.org/drawingml/2006/main" prst="rect">
-            <a:avLst/>
-          </a:prstGeom>
-        </p:spPr>
-        <p:txBody>
-          <a:bodyPr xmlns:a="http://schemas.openxmlformats.org/drawingml/2006/main" lIns="0" tIns="0" rIns="0" bIns="0" anchor="t">
-            <a:normAutofit fontScale="100000"/>
+            <a:ext cx="2381250" cy="685800"/>
+          </a:xfrm>
+          <a:prstGeom xmlns:a="http://schemas.openxmlformats.org/drawingml/2006/main" prst="rect">
+            <a:avLst/>
+          </a:prstGeom>
+        </p:spPr>
+        <p:txBody>
+          <a:bodyPr xmlns:a="http://schemas.openxmlformats.org/drawingml/2006/main" lIns="0" tIns="0" rIns="0" bIns="0" anchor="t">
+            <a:normAutofit fontScale="99661"/>
           </a:bodyPr>
           <a:lstStyle xmlns:a="http://schemas.openxmlformats.org/drawingml/2006/main"/>
           <a:p xmlns:a="http://schemas.openxmlformats.org/drawingml/2006/main">
             <a:pPr algn="l">
-              <a:defRPr sz="1350" b="0">
+              <a:defRPr sz="1650" b="0">
                 <a:solidFill>
                   <a:srgbClr val="5B6472"/>
                 </a:solidFill>
@@ -7550,22 +7624,22 @@
       </p:sp>
       <p:sp>
         <p:nvSpPr>
-          <p:cNvPr id="20" name="Shape-157">
-            <a:extLst xmlns:a="http://schemas.openxmlformats.org/drawingml/2006/main">
-              <a:ext uri="{FF2B5EF4-FFF2-40B4-BE49-F238E27FC236}">
-                <a16:creationId xmlns:a16="http://schemas.microsoft.com/office/drawing/2014/main" id="{9768276C-EFC1-4591-8E13-59F9B174CE9F}"/>
-              </a:ext>
-            </a:extLst>
-          </p:cNvPr>
-          <p:cNvSpPr>
-            <a:spLocks xmlns:a="http://schemas.openxmlformats.org/drawingml/2006/main" noGrp="1"/>
-          </p:cNvSpPr>
-          <p:nvPr/>
-        </p:nvSpPr>
-        <p:spPr>
-          <a:xfrm xmlns:a="http://schemas.openxmlformats.org/drawingml/2006/main">
-            <a:off x="9496425" y="2752725"/>
-            <a:ext cx="247650" cy="247650"/>
+          <p:cNvPr id="21" name="Shape-159">
+            <a:extLst xmlns:a="http://schemas.openxmlformats.org/drawingml/2006/main">
+              <a:ext uri="{FF2B5EF4-FFF2-40B4-BE49-F238E27FC236}">
+                <a16:creationId xmlns:a16="http://schemas.microsoft.com/office/drawing/2014/main" id="{90F29DBC-C68C-40FD-B45C-A64FEE956330}"/>
+              </a:ext>
+            </a:extLst>
+          </p:cNvPr>
+          <p:cNvSpPr>
+            <a:spLocks xmlns:a="http://schemas.openxmlformats.org/drawingml/2006/main" noGrp="1"/>
+          </p:cNvSpPr>
+          <p:nvPr/>
+        </p:nvSpPr>
+        <p:spPr>
+          <a:xfrm xmlns:a="http://schemas.openxmlformats.org/drawingml/2006/main">
+            <a:off x="9477375" y="2733675"/>
+            <a:ext cx="285750" cy="285750"/>
           </a:xfrm>
           <a:prstGeom xmlns:a="http://schemas.openxmlformats.org/drawingml/2006/main" prst="ellipse">
             <a:avLst/>
@@ -7577,35 +7651,35 @@
       </p:sp>
       <p:sp>
         <p:nvSpPr>
-          <p:cNvPr id="21" name="Text-158">
-            <a:extLst xmlns:a="http://schemas.openxmlformats.org/drawingml/2006/main">
-              <a:ext uri="{FF2B5EF4-FFF2-40B4-BE49-F238E27FC236}">
-                <a16:creationId xmlns:a16="http://schemas.microsoft.com/office/drawing/2014/main" id="{7BDED977-6699-4E33-8A9D-9058A472B71E}"/>
-              </a:ext>
-            </a:extLst>
-          </p:cNvPr>
-          <p:cNvSpPr>
-            <a:spLocks xmlns:a="http://schemas.openxmlformats.org/drawingml/2006/main" noGrp="1"/>
-          </p:cNvSpPr>
-          <p:nvPr/>
-        </p:nvSpPr>
-        <p:spPr>
-          <a:xfrm xmlns:a="http://schemas.openxmlformats.org/drawingml/2006/main">
-            <a:off x="9563100" y="2790825"/>
-            <a:ext cx="114300" cy="152400"/>
-          </a:xfrm>
-          <a:prstGeom xmlns:a="http://schemas.openxmlformats.org/drawingml/2006/main" prst="rect">
-            <a:avLst/>
-          </a:prstGeom>
-        </p:spPr>
-        <p:txBody>
-          <a:bodyPr xmlns:a="http://schemas.openxmlformats.org/drawingml/2006/main" lIns="0" tIns="0" rIns="0" bIns="0" anchor="t">
-            <a:normAutofit fontScale="100000"/>
+          <p:cNvPr id="22" name="Text-160">
+            <a:extLst xmlns:a="http://schemas.openxmlformats.org/drawingml/2006/main">
+              <a:ext uri="{FF2B5EF4-FFF2-40B4-BE49-F238E27FC236}">
+                <a16:creationId xmlns:a16="http://schemas.microsoft.com/office/drawing/2014/main" id="{E1F1D326-DFC5-4EDD-8D95-386EA724D391}"/>
+              </a:ext>
+            </a:extLst>
+          </p:cNvPr>
+          <p:cNvSpPr>
+            <a:spLocks xmlns:a="http://schemas.openxmlformats.org/drawingml/2006/main" noGrp="1"/>
+          </p:cNvSpPr>
+          <p:nvPr/>
+        </p:nvSpPr>
+        <p:spPr>
+          <a:xfrm xmlns:a="http://schemas.openxmlformats.org/drawingml/2006/main">
+            <a:off x="9544050" y="2781300"/>
+            <a:ext cx="152400" cy="190500"/>
+          </a:xfrm>
+          <a:prstGeom xmlns:a="http://schemas.openxmlformats.org/drawingml/2006/main" prst="rect">
+            <a:avLst/>
+          </a:prstGeom>
+        </p:spPr>
+        <p:txBody>
+          <a:bodyPr xmlns:a="http://schemas.openxmlformats.org/drawingml/2006/main" lIns="0" tIns="0" rIns="0" bIns="0" anchor="t">
+            <a:normAutofit fontScale="92593"/>
           </a:bodyPr>
           <a:lstStyle xmlns:a="http://schemas.openxmlformats.org/drawingml/2006/main"/>
           <a:p xmlns:a="http://schemas.openxmlformats.org/drawingml/2006/main">
             <a:pPr algn="ctr">
-              <a:defRPr sz="825" b="1">
+              <a:defRPr sz="1350" b="1">
                 <a:solidFill>
                   <a:srgbClr val="FFFFFF"/>
                 </a:solidFill>
@@ -7622,10 +7696,10 @@
       </p:sp>
       <p:sp>
         <p:nvSpPr>
-          <p:cNvPr id="22" name="Text-159">
-            <a:extLst xmlns:a="http://schemas.openxmlformats.org/drawingml/2006/main">
-              <a:ext uri="{FF2B5EF4-FFF2-40B4-BE49-F238E27FC236}">
-                <a16:creationId xmlns:a16="http://schemas.microsoft.com/office/drawing/2014/main" id="{599D4484-1E11-46BF-BA73-A976F95FDDF8}"/>
+          <p:cNvPr id="23" name="Text-161">
+            <a:extLst xmlns:a="http://schemas.openxmlformats.org/drawingml/2006/main">
+              <a:ext uri="{FF2B5EF4-FFF2-40B4-BE49-F238E27FC236}">
+                <a16:creationId xmlns:a16="http://schemas.microsoft.com/office/drawing/2014/main" id="{4BE9D8C7-143D-43DF-8049-17C9298DDD3F}"/>
               </a:ext>
             </a:extLst>
           </p:cNvPr>
@@ -7650,7 +7724,7 @@
           <a:lstStyle xmlns:a="http://schemas.openxmlformats.org/drawingml/2006/main"/>
           <a:p xmlns:a="http://schemas.openxmlformats.org/drawingml/2006/main">
             <a:pPr algn="l">
-              <a:defRPr sz="1875" b="1">
+              <a:defRPr sz="1650" b="1">
                 <a:solidFill>
                   <a:srgbClr val="0B0D12"/>
                 </a:solidFill>
@@ -7667,10 +7741,10 @@
       </p:sp>
       <p:sp>
         <p:nvSpPr>
-          <p:cNvPr id="23" name="Text-160">
-            <a:extLst xmlns:a="http://schemas.openxmlformats.org/drawingml/2006/main">
-              <a:ext uri="{FF2B5EF4-FFF2-40B4-BE49-F238E27FC236}">
-                <a16:creationId xmlns:a16="http://schemas.microsoft.com/office/drawing/2014/main" id="{90FA5566-92B7-47C0-895A-8EAE0BC2D6BA}"/>
+          <p:cNvPr id="24" name="Text-162">
+            <a:extLst xmlns:a="http://schemas.openxmlformats.org/drawingml/2006/main">
+              <a:ext uri="{FF2B5EF4-FFF2-40B4-BE49-F238E27FC236}">
+                <a16:creationId xmlns:a16="http://schemas.microsoft.com/office/drawing/2014/main" id="{A7713638-3CA7-488F-9DE3-34AEBAA58BBF}"/>
               </a:ext>
             </a:extLst>
           </p:cNvPr>
@@ -7682,7 +7756,7 @@
         <p:spPr>
           <a:xfrm xmlns:a="http://schemas.openxmlformats.org/drawingml/2006/main">
             <a:off x="8972550" y="3171825"/>
-            <a:ext cx="2381250" cy="647700"/>
+            <a:ext cx="2381250" cy="685800"/>
           </a:xfrm>
           <a:prstGeom xmlns:a="http://schemas.openxmlformats.org/drawingml/2006/main" prst="rect">
             <a:avLst/>
@@ -7695,7 +7769,7 @@
           <a:lstStyle xmlns:a="http://schemas.openxmlformats.org/drawingml/2006/main"/>
           <a:p xmlns:a="http://schemas.openxmlformats.org/drawingml/2006/main">
             <a:pPr algn="l">
-              <a:defRPr sz="1350" b="0">
+              <a:defRPr sz="1650" b="0">
                 <a:solidFill>
                   <a:srgbClr val="5B6472"/>
                 </a:solidFill>
@@ -7712,26 +7786,26 @@
       </p:sp>
       <p:sp>
         <p:nvSpPr>
-          <p:cNvPr id="24" name="Shape-161">
-            <a:extLst xmlns:a="http://schemas.openxmlformats.org/drawingml/2006/main">
-              <a:ext uri="{FF2B5EF4-FFF2-40B4-BE49-F238E27FC236}">
-                <a16:creationId xmlns:a16="http://schemas.microsoft.com/office/drawing/2014/main" id="{55B04840-974B-4E19-A647-A46EE5FF6C90}"/>
-              </a:ext>
-            </a:extLst>
-          </p:cNvPr>
-          <p:cNvSpPr>
-            <a:spLocks xmlns:a="http://schemas.openxmlformats.org/drawingml/2006/main" noGrp="1"/>
-          </p:cNvSpPr>
-          <p:nvPr/>
-        </p:nvSpPr>
-        <p:spPr>
-          <a:xfrm xmlns:a="http://schemas.openxmlformats.org/drawingml/2006/main">
-            <a:off x="5572125" y="4514850"/>
-            <a:ext cx="2800350" cy="723900"/>
+          <p:cNvPr id="25" name="Shape-163">
+            <a:extLst xmlns:a="http://schemas.openxmlformats.org/drawingml/2006/main">
+              <a:ext uri="{FF2B5EF4-FFF2-40B4-BE49-F238E27FC236}">
+                <a16:creationId xmlns:a16="http://schemas.microsoft.com/office/drawing/2014/main" id="{7E579BA2-B495-478F-AC52-1FC8680B035B}"/>
+              </a:ext>
+            </a:extLst>
+          </p:cNvPr>
+          <p:cNvSpPr>
+            <a:spLocks xmlns:a="http://schemas.openxmlformats.org/drawingml/2006/main" noGrp="1"/>
+          </p:cNvSpPr>
+          <p:nvPr/>
+        </p:nvSpPr>
+        <p:spPr>
+          <a:xfrm xmlns:a="http://schemas.openxmlformats.org/drawingml/2006/main">
+            <a:off x="7029450" y="4400550"/>
+            <a:ext cx="3429000" cy="990600"/>
           </a:xfrm>
           <a:prstGeom xmlns:a="http://schemas.openxmlformats.org/drawingml/2006/main" prst="roundRect">
             <a:avLst>
-              <a:gd name="adj" fmla="val 10526"/>
+              <a:gd name="adj" fmla="val 7692"/>
             </a:avLst>
           </a:prstGeom>
           <a:solidFill xmlns:a="http://schemas.openxmlformats.org/drawingml/2006/main">
@@ -7747,22 +7821,22 @@
       </p:sp>
       <p:sp>
         <p:nvSpPr>
-          <p:cNvPr id="25" name="Text-162">
-            <a:extLst xmlns:a="http://schemas.openxmlformats.org/drawingml/2006/main">
-              <a:ext uri="{FF2B5EF4-FFF2-40B4-BE49-F238E27FC236}">
-                <a16:creationId xmlns:a16="http://schemas.microsoft.com/office/drawing/2014/main" id="{4602B5A4-F424-4761-B593-D187374E7E07}"/>
-              </a:ext>
-            </a:extLst>
-          </p:cNvPr>
-          <p:cNvSpPr>
-            <a:spLocks xmlns:a="http://schemas.openxmlformats.org/drawingml/2006/main" noGrp="1"/>
-          </p:cNvSpPr>
-          <p:nvPr/>
-        </p:nvSpPr>
-        <p:spPr>
-          <a:xfrm xmlns:a="http://schemas.openxmlformats.org/drawingml/2006/main">
-            <a:off x="5810250" y="4657725"/>
-            <a:ext cx="2324100" cy="266700"/>
+          <p:cNvPr id="26" name="Text-164">
+            <a:extLst xmlns:a="http://schemas.openxmlformats.org/drawingml/2006/main">
+              <a:ext uri="{FF2B5EF4-FFF2-40B4-BE49-F238E27FC236}">
+                <a16:creationId xmlns:a16="http://schemas.microsoft.com/office/drawing/2014/main" id="{05731C78-8289-4C50-A270-582724A459DF}"/>
+              </a:ext>
+            </a:extLst>
+          </p:cNvPr>
+          <p:cNvSpPr>
+            <a:spLocks xmlns:a="http://schemas.openxmlformats.org/drawingml/2006/main" noGrp="1"/>
+          </p:cNvSpPr>
+          <p:nvPr/>
+        </p:nvSpPr>
+        <p:spPr>
+          <a:xfrm xmlns:a="http://schemas.openxmlformats.org/drawingml/2006/main">
+            <a:off x="7219950" y="4552950"/>
+            <a:ext cx="3048000" cy="304800"/>
           </a:xfrm>
           <a:prstGeom xmlns:a="http://schemas.openxmlformats.org/drawingml/2006/main" prst="rect">
             <a:avLst/>
@@ -7775,7 +7849,7 @@
           <a:lstStyle xmlns:a="http://schemas.openxmlformats.org/drawingml/2006/main"/>
           <a:p xmlns:a="http://schemas.openxmlformats.org/drawingml/2006/main">
             <a:pPr algn="ctr">
-              <a:defRPr sz="1650" b="1">
+              <a:defRPr sz="1800" b="1">
                 <a:solidFill>
                   <a:srgbClr val="C33A32"/>
                 </a:solidFill>
@@ -7792,22 +7866,22 @@
       </p:sp>
       <p:sp>
         <p:nvSpPr>
-          <p:cNvPr id="26" name="Text-163">
-            <a:extLst xmlns:a="http://schemas.openxmlformats.org/drawingml/2006/main">
-              <a:ext uri="{FF2B5EF4-FFF2-40B4-BE49-F238E27FC236}">
-                <a16:creationId xmlns:a16="http://schemas.microsoft.com/office/drawing/2014/main" id="{1886D376-6967-46A4-B62C-C0ADBDD4BB77}"/>
-              </a:ext>
-            </a:extLst>
-          </p:cNvPr>
-          <p:cNvSpPr>
-            <a:spLocks xmlns:a="http://schemas.openxmlformats.org/drawingml/2006/main" noGrp="1"/>
-          </p:cNvSpPr>
-          <p:nvPr/>
-        </p:nvSpPr>
-        <p:spPr>
-          <a:xfrm xmlns:a="http://schemas.openxmlformats.org/drawingml/2006/main">
-            <a:off x="5810250" y="4953000"/>
-            <a:ext cx="2324100" cy="171450"/>
+          <p:cNvPr id="27" name="Text-165">
+            <a:extLst xmlns:a="http://schemas.openxmlformats.org/drawingml/2006/main">
+              <a:ext uri="{FF2B5EF4-FFF2-40B4-BE49-F238E27FC236}">
+                <a16:creationId xmlns:a16="http://schemas.microsoft.com/office/drawing/2014/main" id="{DAF270AC-B451-49B7-9ABB-8B9778467447}"/>
+              </a:ext>
+            </a:extLst>
+          </p:cNvPr>
+          <p:cNvSpPr>
+            <a:spLocks xmlns:a="http://schemas.openxmlformats.org/drawingml/2006/main" noGrp="1"/>
+          </p:cNvSpPr>
+          <p:nvPr/>
+        </p:nvSpPr>
+        <p:spPr>
+          <a:xfrm xmlns:a="http://schemas.openxmlformats.org/drawingml/2006/main">
+            <a:off x="7219950" y="4953000"/>
+            <a:ext cx="3048000" cy="266700"/>
           </a:xfrm>
           <a:prstGeom xmlns:a="http://schemas.openxmlformats.org/drawingml/2006/main" prst="rect">
             <a:avLst/>
@@ -7820,7 +7894,7 @@
           <a:lstStyle xmlns:a="http://schemas.openxmlformats.org/drawingml/2006/main"/>
           <a:p xmlns:a="http://schemas.openxmlformats.org/drawingml/2006/main">
             <a:pPr algn="ctr">
-              <a:defRPr sz="975" b="0">
+              <a:defRPr sz="1650" b="0">
                 <a:solidFill>
                   <a:srgbClr val="C33A32"/>
                 </a:solidFill>
@@ -7830,17 +7904,17 @@
               </a:defRPr>
             </a:pPr>
             <a:r>
-              <a:t>mismatched · unexpected · late</a:t>
-            </a:r>
-          </a:p>
-        </p:txBody>
-      </p:sp>
-      <p:sp>
-        <p:nvSpPr>
-          <p:cNvPr id="27" name="Text-164">
-            <a:extLst xmlns:a="http://schemas.openxmlformats.org/drawingml/2006/main">
-              <a:ext uri="{FF2B5EF4-FFF2-40B4-BE49-F238E27FC236}">
-                <a16:creationId xmlns:a16="http://schemas.microsoft.com/office/drawing/2014/main" id="{4BB48886-F694-4904-806D-59F05858EAF9}"/>
+              <a:t>mismatch · unexpected · late</a:t>
+            </a:r>
+          </a:p>
+        </p:txBody>
+      </p:sp>
+      <p:sp>
+        <p:nvSpPr>
+          <p:cNvPr id="28" name="Text-166">
+            <a:extLst xmlns:a="http://schemas.openxmlformats.org/drawingml/2006/main">
+              <a:ext uri="{FF2B5EF4-FFF2-40B4-BE49-F238E27FC236}">
+                <a16:creationId xmlns:a16="http://schemas.microsoft.com/office/drawing/2014/main" id="{B591DF69-8D2F-479E-8636-142BE0A5262D}"/>
               </a:ext>
             </a:extLst>
           </p:cNvPr>
@@ -7852,7 +7926,7 @@
         <p:spPr>
           <a:xfrm xmlns:a="http://schemas.openxmlformats.org/drawingml/2006/main">
             <a:off x="457200" y="5581650"/>
-            <a:ext cx="4476750" cy="247650"/>
+            <a:ext cx="4476750" cy="266700"/>
           </a:xfrm>
           <a:prstGeom xmlns:a="http://schemas.openxmlformats.org/drawingml/2006/main" prst="rect">
             <a:avLst/>
@@ -7865,7 +7939,7 @@
           <a:lstStyle xmlns:a="http://schemas.openxmlformats.org/drawingml/2006/main"/>
           <a:p xmlns:a="http://schemas.openxmlformats.org/drawingml/2006/main">
             <a:pPr algn="l">
-              <a:defRPr sz="1275" b="0">
+              <a:defRPr sz="1650" b="0">
                 <a:solidFill>
                   <a:srgbClr val="5B6472"/>
                 </a:solidFill>
@@ -7882,22 +7956,22 @@
       </p:sp>
       <p:sp>
         <p:nvSpPr>
-          <p:cNvPr id="28" name="Text-165">
-            <a:extLst xmlns:a="http://schemas.openxmlformats.org/drawingml/2006/main">
-              <a:ext uri="{FF2B5EF4-FFF2-40B4-BE49-F238E27FC236}">
-                <a16:creationId xmlns:a16="http://schemas.microsoft.com/office/drawing/2014/main" id="{0234FBBA-E6C3-4F3E-AD00-0F12D95152BA}"/>
-              </a:ext>
-            </a:extLst>
-          </p:cNvPr>
-          <p:cNvSpPr>
-            <a:spLocks xmlns:a="http://schemas.openxmlformats.org/drawingml/2006/main" noGrp="1"/>
-          </p:cNvSpPr>
-          <p:nvPr/>
-        </p:nvSpPr>
-        <p:spPr>
-          <a:xfrm xmlns:a="http://schemas.openxmlformats.org/drawingml/2006/main">
-            <a:off x="6858000" y="5581650"/>
-            <a:ext cx="4876800" cy="247650"/>
+          <p:cNvPr id="29" name="Text-167">
+            <a:extLst xmlns:a="http://schemas.openxmlformats.org/drawingml/2006/main">
+              <a:ext uri="{FF2B5EF4-FFF2-40B4-BE49-F238E27FC236}">
+                <a16:creationId xmlns:a16="http://schemas.microsoft.com/office/drawing/2014/main" id="{81D20AEA-93D3-4739-8DA0-BE38C01F61BD}"/>
+              </a:ext>
+            </a:extLst>
+          </p:cNvPr>
+          <p:cNvSpPr>
+            <a:spLocks xmlns:a="http://schemas.openxmlformats.org/drawingml/2006/main" noGrp="1"/>
+          </p:cNvSpPr>
+          <p:nvPr/>
+        </p:nvSpPr>
+        <p:spPr>
+          <a:xfrm xmlns:a="http://schemas.openxmlformats.org/drawingml/2006/main">
+            <a:off x="6572250" y="5581650"/>
+            <a:ext cx="5162550" cy="266700"/>
           </a:xfrm>
           <a:prstGeom xmlns:a="http://schemas.openxmlformats.org/drawingml/2006/main" prst="rect">
             <a:avLst/>
@@ -7910,7 +7984,7 @@
           <a:lstStyle xmlns:a="http://schemas.openxmlformats.org/drawingml/2006/main"/>
           <a:p xmlns:a="http://schemas.openxmlformats.org/drawingml/2006/main">
             <a:pPr algn="r">
-              <a:defRPr sz="1275" b="0">
+              <a:defRPr sz="1650" b="0">
                 <a:solidFill>
                   <a:srgbClr val="5B6472"/>
                 </a:solidFill>
@@ -7920,14 +7994,14 @@
               </a:defRPr>
             </a:pPr>
             <a:r>
-              <a:t>Cleanup: runtime.shutdown before signal escalation</a:t>
+              <a:t>Cleanup: shutdown, then bounded signal escalation</a:t>
             </a:r>
           </a:p>
         </p:txBody>
       </p:sp>
       <p:cxnSp>
         <p:nvCxnSpPr>
-          <p:cNvPr id="60" name="Rule-166"/>
+          <p:cNvPr id="62" name="Rule-168"/>
           <p:cNvCxnSpPr/>
           <p:nvPr/>
         </p:nvCxnSpPr>
@@ -7949,10 +8023,10 @@
       </p:cxnSp>
       <p:sp>
         <p:nvSpPr>
-          <p:cNvPr id="30" name="Text-167">
-            <a:extLst xmlns:a="http://schemas.openxmlformats.org/drawingml/2006/main">
-              <a:ext uri="{FF2B5EF4-FFF2-40B4-BE49-F238E27FC236}">
-                <a16:creationId xmlns:a16="http://schemas.microsoft.com/office/drawing/2014/main" id="{14915913-229A-4265-9B0B-766D3736C2BB}"/>
+          <p:cNvPr id="31" name="Text-169">
+            <a:extLst xmlns:a="http://schemas.openxmlformats.org/drawingml/2006/main">
+              <a:ext uri="{FF2B5EF4-FFF2-40B4-BE49-F238E27FC236}">
+                <a16:creationId xmlns:a16="http://schemas.microsoft.com/office/drawing/2014/main" id="{72344B1E-5103-4B17-B9CD-30CB453C9C86}"/>
               </a:ext>
             </a:extLst>
           </p:cNvPr>
@@ -7987,17 +8061,17 @@
               </a:defRPr>
             </a:pPr>
             <a:r>
-              <a:t>tui/src/runtimeSupervisor.ts · runtime.py · test_runtime_boundary.ts</a:t>
-            </a:r>
-          </a:p>
-        </p:txBody>
-      </p:sp>
-      <p:sp>
-        <p:nvSpPr>
-          <p:cNvPr id="31" name="Text-168">
-            <a:extLst xmlns:a="http://schemas.openxmlformats.org/drawingml/2006/main">
-              <a:ext uri="{FF2B5EF4-FFF2-40B4-BE49-F238E27FC236}">
-                <a16:creationId xmlns:a16="http://schemas.microsoft.com/office/drawing/2014/main" id="{65F2E1D4-493C-4C86-99CD-B0928C24A10E}"/>
+              <a:t>tui/src/runtime-supervisor.ts · runtime.py · tui/test/runtime-boundary.test.ts</a:t>
+            </a:r>
+          </a:p>
+        </p:txBody>
+      </p:sp>
+      <p:sp>
+        <p:nvSpPr>
+          <p:cNvPr id="32" name="Text-170">
+            <a:extLst xmlns:a="http://schemas.openxmlformats.org/drawingml/2006/main">
+              <a:ext uri="{FF2B5EF4-FFF2-40B4-BE49-F238E27FC236}">
+                <a16:creationId xmlns:a16="http://schemas.microsoft.com/office/drawing/2014/main" id="{CFCC2770-D5D9-468C-A62D-3D464B7D78D5}"/>
               </a:ext>
             </a:extLst>
           </p:cNvPr>
@@ -8040,7 +8114,7 @@
     </p:spTree>
     <p:extLst>
       <p:ext uri="{BB962C8B-B14F-4D97-AF65-F5344CB8AC3E}">
-        <p14:creationId xmlns:p14="http://schemas.microsoft.com/office/powerpoint/2010/main" val="987289202"/>
+        <p14:creationId xmlns:p14="http://schemas.microsoft.com/office/powerpoint/2010/main" val="1819315919"/>
       </p:ext>
     </p:extLst>
   </p:cSld>
@@ -8061,10 +8135,10 @@
       </p:grpSpPr>
       <p:sp>
         <p:nvSpPr>
-          <p:cNvPr id="1" name="Shape-200">
-            <a:extLst xmlns:a="http://schemas.openxmlformats.org/drawingml/2006/main">
-              <a:ext uri="{FF2B5EF4-FFF2-40B4-BE49-F238E27FC236}">
-                <a16:creationId xmlns:a16="http://schemas.microsoft.com/office/drawing/2014/main" id="{1A27C578-25AE-4AD8-BED2-BF387925469B}"/>
+          <p:cNvPr id="1" name="Shape-202">
+            <a:extLst xmlns:a="http://schemas.openxmlformats.org/drawingml/2006/main">
+              <a:ext uri="{FF2B5EF4-FFF2-40B4-BE49-F238E27FC236}">
+                <a16:creationId xmlns:a16="http://schemas.microsoft.com/office/drawing/2014/main" id="{5A878398-7146-4F35-8939-4AF234265ABA}"/>
               </a:ext>
             </a:extLst>
           </p:cNvPr>
@@ -8088,10 +8162,10 @@
       </p:sp>
       <p:sp>
         <p:nvSpPr>
-          <p:cNvPr id="2" name="Text-170">
-            <a:extLst xmlns:a="http://schemas.openxmlformats.org/drawingml/2006/main">
-              <a:ext uri="{FF2B5EF4-FFF2-40B4-BE49-F238E27FC236}">
-                <a16:creationId xmlns:a16="http://schemas.microsoft.com/office/drawing/2014/main" id="{FFE85A5E-A3B3-430E-B141-9565F6623045}"/>
+          <p:cNvPr id="2" name="Text-172">
+            <a:extLst xmlns:a="http://schemas.openxmlformats.org/drawingml/2006/main">
+              <a:ext uri="{FF2B5EF4-FFF2-40B4-BE49-F238E27FC236}">
+                <a16:creationId xmlns:a16="http://schemas.microsoft.com/office/drawing/2014/main" id="{EBC02F85-207B-446D-897A-18C2C1201D41}"/>
               </a:ext>
             </a:extLst>
           </p:cNvPr>
@@ -8133,10 +8207,10 @@
       </p:sp>
       <p:sp>
         <p:nvSpPr>
-          <p:cNvPr id="3" name="Text-171">
-            <a:extLst xmlns:a="http://schemas.openxmlformats.org/drawingml/2006/main">
-              <a:ext uri="{FF2B5EF4-FFF2-40B4-BE49-F238E27FC236}">
-                <a16:creationId xmlns:a16="http://schemas.microsoft.com/office/drawing/2014/main" id="{ABD64220-82B4-47D1-981A-BDC8B34C4C4D}"/>
+          <p:cNvPr id="3" name="Text-173">
+            <a:extLst xmlns:a="http://schemas.openxmlformats.org/drawingml/2006/main">
+              <a:ext uri="{FF2B5EF4-FFF2-40B4-BE49-F238E27FC236}">
+                <a16:creationId xmlns:a16="http://schemas.microsoft.com/office/drawing/2014/main" id="{DE717E38-E553-4BA2-B343-B61062687CB4}"/>
               </a:ext>
             </a:extLst>
           </p:cNvPr>
@@ -8161,7 +8235,7 @@
           <a:lstStyle xmlns:a="http://schemas.openxmlformats.org/drawingml/2006/main"/>
           <a:p xmlns:a="http://schemas.openxmlformats.org/drawingml/2006/main">
             <a:pPr algn="l">
-              <a:defRPr sz="1575" b="0">
+              <a:defRPr sz="1725" b="0">
                 <a:solidFill>
                   <a:srgbClr val="5B6472"/>
                 </a:solidFill>
@@ -8178,10 +8252,10 @@
       </p:sp>
       <p:sp>
         <p:nvSpPr>
-          <p:cNvPr id="4" name="Shape-172">
-            <a:extLst xmlns:a="http://schemas.openxmlformats.org/drawingml/2006/main">
-              <a:ext uri="{FF2B5EF4-FFF2-40B4-BE49-F238E27FC236}">
-                <a16:creationId xmlns:a16="http://schemas.microsoft.com/office/drawing/2014/main" id="{ECDAEFFE-6995-4CFE-9C3E-C8F37648B2BB}"/>
+          <p:cNvPr id="4" name="Shape-174">
+            <a:extLst xmlns:a="http://schemas.openxmlformats.org/drawingml/2006/main">
+              <a:ext uri="{FF2B5EF4-FFF2-40B4-BE49-F238E27FC236}">
+                <a16:creationId xmlns:a16="http://schemas.microsoft.com/office/drawing/2014/main" id="{79E2E68C-B0B2-463C-859B-D1B7EF9BA174}"/>
               </a:ext>
             </a:extLst>
           </p:cNvPr>
@@ -8207,10 +8281,10 @@
       </p:sp>
       <p:sp>
         <p:nvSpPr>
-          <p:cNvPr id="5" name="Shape-173">
-            <a:extLst xmlns:a="http://schemas.openxmlformats.org/drawingml/2006/main">
-              <a:ext uri="{FF2B5EF4-FFF2-40B4-BE49-F238E27FC236}">
-                <a16:creationId xmlns:a16="http://schemas.microsoft.com/office/drawing/2014/main" id="{2330F3B2-24CA-4C54-9CFD-FF0E5ECE95D4}"/>
+          <p:cNvPr id="5" name="Shape-175">
+            <a:extLst xmlns:a="http://schemas.openxmlformats.org/drawingml/2006/main">
+              <a:ext uri="{FF2B5EF4-FFF2-40B4-BE49-F238E27FC236}">
+                <a16:creationId xmlns:a16="http://schemas.microsoft.com/office/drawing/2014/main" id="{628D5826-16DB-4133-9564-2B92B0D52D93}"/>
               </a:ext>
             </a:extLst>
           </p:cNvPr>
@@ -8236,10 +8310,10 @@
       </p:sp>
       <p:sp>
         <p:nvSpPr>
-          <p:cNvPr id="6" name="Text-174">
-            <a:extLst xmlns:a="http://schemas.openxmlformats.org/drawingml/2006/main">
-              <a:ext uri="{FF2B5EF4-FFF2-40B4-BE49-F238E27FC236}">
-                <a16:creationId xmlns:a16="http://schemas.microsoft.com/office/drawing/2014/main" id="{1D9D1ABD-F4A7-4094-ABAD-4A9E2C520C5E}"/>
+          <p:cNvPr id="6" name="Text-176">
+            <a:extLst xmlns:a="http://schemas.openxmlformats.org/drawingml/2006/main">
+              <a:ext uri="{FF2B5EF4-FFF2-40B4-BE49-F238E27FC236}">
+                <a16:creationId xmlns:a16="http://schemas.microsoft.com/office/drawing/2014/main" id="{94A1D218-7532-4579-9F2F-C1C5C5FA42DF}"/>
               </a:ext>
             </a:extLst>
           </p:cNvPr>
@@ -8251,20 +8325,20 @@
         <p:spPr>
           <a:xfrm xmlns:a="http://schemas.openxmlformats.org/drawingml/2006/main">
             <a:off x="666750" y="1752600"/>
-            <a:ext cx="2076450" cy="228600"/>
-          </a:xfrm>
-          <a:prstGeom xmlns:a="http://schemas.openxmlformats.org/drawingml/2006/main" prst="rect">
-            <a:avLst/>
-          </a:prstGeom>
-        </p:spPr>
-        <p:txBody>
-          <a:bodyPr xmlns:a="http://schemas.openxmlformats.org/drawingml/2006/main" lIns="0" tIns="0" rIns="0" bIns="0" anchor="t">
-            <a:normAutofit fontScale="100000"/>
+            <a:ext cx="2076450" cy="285750"/>
+          </a:xfrm>
+          <a:prstGeom xmlns:a="http://schemas.openxmlformats.org/drawingml/2006/main" prst="rect">
+            <a:avLst/>
+          </a:prstGeom>
+        </p:spPr>
+        <p:txBody>
+          <a:bodyPr xmlns:a="http://schemas.openxmlformats.org/drawingml/2006/main" lIns="0" tIns="0" rIns="0" bIns="0" anchor="t">
+            <a:normAutofit fontScale="97161"/>
           </a:bodyPr>
           <a:lstStyle xmlns:a="http://schemas.openxmlformats.org/drawingml/2006/main"/>
           <a:p xmlns:a="http://schemas.openxmlformats.org/drawingml/2006/main">
             <a:pPr algn="l">
-              <a:defRPr sz="1125" b="1">
+              <a:defRPr sz="1650" b="1">
                 <a:solidFill>
                   <a:srgbClr val="123DAE"/>
                 </a:solidFill>
@@ -8281,10 +8355,10 @@
       </p:sp>
       <p:sp>
         <p:nvSpPr>
-          <p:cNvPr id="7" name="Text-175">
-            <a:extLst xmlns:a="http://schemas.openxmlformats.org/drawingml/2006/main">
-              <a:ext uri="{FF2B5EF4-FFF2-40B4-BE49-F238E27FC236}">
-                <a16:creationId xmlns:a16="http://schemas.microsoft.com/office/drawing/2014/main" id="{E618491A-E578-45CD-989F-5011990DF006}"/>
+          <p:cNvPr id="7" name="Text-177">
+            <a:extLst xmlns:a="http://schemas.openxmlformats.org/drawingml/2006/main">
+              <a:ext uri="{FF2B5EF4-FFF2-40B4-BE49-F238E27FC236}">
+                <a16:creationId xmlns:a16="http://schemas.microsoft.com/office/drawing/2014/main" id="{B63A99F4-FBA8-406C-BE88-B444C0AB03D7}"/>
               </a:ext>
             </a:extLst>
           </p:cNvPr>
@@ -8296,7 +8370,7 @@
         <p:spPr>
           <a:xfrm xmlns:a="http://schemas.openxmlformats.org/drawingml/2006/main">
             <a:off x="666750" y="3695700"/>
-            <a:ext cx="2076450" cy="228600"/>
+            <a:ext cx="2076450" cy="285750"/>
           </a:xfrm>
           <a:prstGeom xmlns:a="http://schemas.openxmlformats.org/drawingml/2006/main" prst="rect">
             <a:avLst/>
@@ -8309,7 +8383,7 @@
           <a:lstStyle xmlns:a="http://schemas.openxmlformats.org/drawingml/2006/main"/>
           <a:p xmlns:a="http://schemas.openxmlformats.org/drawingml/2006/main">
             <a:pPr algn="l">
-              <a:defRPr sz="1125" b="1">
+              <a:defRPr sz="1650" b="1">
                 <a:solidFill>
                   <a:srgbClr val="C33A32"/>
                 </a:solidFill>
@@ -8326,7 +8400,7 @@
       </p:sp>
       <p:cxnSp>
         <p:nvCxnSpPr>
-          <p:cNvPr id="39" name="Rule-176"/>
+          <p:cNvPr id="39" name="Rule-178"/>
           <p:cNvCxnSpPr/>
           <p:nvPr/>
         </p:nvCxnSpPr>
@@ -8348,7 +8422,7 @@
       </p:cxnSp>
       <p:cxnSp>
         <p:nvCxnSpPr>
-          <p:cNvPr id="40" name="Rule-177"/>
+          <p:cNvPr id="40" name="Rule-179"/>
           <p:cNvCxnSpPr/>
           <p:nvPr/>
         </p:nvCxnSpPr>
@@ -8370,10 +8444,10 @@
       </p:cxnSp>
       <p:sp>
         <p:nvSpPr>
-          <p:cNvPr id="10" name="Shape-178">
-            <a:extLst xmlns:a="http://schemas.openxmlformats.org/drawingml/2006/main">
-              <a:ext uri="{FF2B5EF4-FFF2-40B4-BE49-F238E27FC236}">
-                <a16:creationId xmlns:a16="http://schemas.microsoft.com/office/drawing/2014/main" id="{3A9709AF-BB77-4952-B9BD-C0C1F9E2A9E3}"/>
+          <p:cNvPr id="10" name="Shape-180">
+            <a:extLst xmlns:a="http://schemas.openxmlformats.org/drawingml/2006/main">
+              <a:ext uri="{FF2B5EF4-FFF2-40B4-BE49-F238E27FC236}">
+                <a16:creationId xmlns:a16="http://schemas.microsoft.com/office/drawing/2014/main" id="{1A7B23F8-C2CF-4F55-ACEB-C363D41CDFAB}"/>
               </a:ext>
             </a:extLst>
           </p:cNvPr>
@@ -8405,35 +8479,35 @@
       </p:sp>
       <p:sp>
         <p:nvSpPr>
-          <p:cNvPr id="11" name="Text-179">
-            <a:extLst xmlns:a="http://schemas.openxmlformats.org/drawingml/2006/main">
-              <a:ext uri="{FF2B5EF4-FFF2-40B4-BE49-F238E27FC236}">
-                <a16:creationId xmlns:a16="http://schemas.microsoft.com/office/drawing/2014/main" id="{C91FE876-7C27-465C-8EE1-3CD15D682EA0}"/>
-              </a:ext>
-            </a:extLst>
-          </p:cNvPr>
-          <p:cNvSpPr>
-            <a:spLocks xmlns:a="http://schemas.openxmlformats.org/drawingml/2006/main" noGrp="1"/>
-          </p:cNvSpPr>
-          <p:nvPr/>
-        </p:nvSpPr>
-        <p:spPr>
-          <a:xfrm xmlns:a="http://schemas.openxmlformats.org/drawingml/2006/main">
-            <a:off x="2838450" y="2238375"/>
-            <a:ext cx="1562100" cy="323850"/>
-          </a:xfrm>
-          <a:prstGeom xmlns:a="http://schemas.openxmlformats.org/drawingml/2006/main" prst="rect">
-            <a:avLst/>
-          </a:prstGeom>
-        </p:spPr>
-        <p:txBody>
-          <a:bodyPr xmlns:a="http://schemas.openxmlformats.org/drawingml/2006/main" lIns="0" tIns="0" rIns="0" bIns="0" anchor="t">
-            <a:normAutofit fontScale="100000"/>
+          <p:cNvPr id="11" name="Text-181">
+            <a:extLst xmlns:a="http://schemas.openxmlformats.org/drawingml/2006/main">
+              <a:ext uri="{FF2B5EF4-FFF2-40B4-BE49-F238E27FC236}">
+                <a16:creationId xmlns:a16="http://schemas.microsoft.com/office/drawing/2014/main" id="{3ECC45BE-48FE-4D1B-9AF8-21B227A1CA65}"/>
+              </a:ext>
+            </a:extLst>
+          </p:cNvPr>
+          <p:cNvSpPr>
+            <a:spLocks xmlns:a="http://schemas.openxmlformats.org/drawingml/2006/main" noGrp="1"/>
+          </p:cNvSpPr>
+          <p:nvPr/>
+        </p:nvSpPr>
+        <p:spPr>
+          <a:xfrm xmlns:a="http://schemas.openxmlformats.org/drawingml/2006/main">
+            <a:off x="2800350" y="2152650"/>
+            <a:ext cx="1638300" cy="495300"/>
+          </a:xfrm>
+          <a:prstGeom xmlns:a="http://schemas.openxmlformats.org/drawingml/2006/main" prst="rect">
+            <a:avLst/>
+          </a:prstGeom>
+        </p:spPr>
+        <p:txBody>
+          <a:bodyPr xmlns:a="http://schemas.openxmlformats.org/drawingml/2006/main" lIns="0" tIns="0" rIns="0" bIns="0" anchor="t">
+            <a:normAutofit fontScale="98485"/>
           </a:bodyPr>
           <a:lstStyle xmlns:a="http://schemas.openxmlformats.org/drawingml/2006/main"/>
           <a:p xmlns:a="http://schemas.openxmlformats.org/drawingml/2006/main">
             <a:pPr algn="ctr">
-              <a:defRPr sz="1350" b="1">
+              <a:defRPr sz="1650" b="1">
                 <a:solidFill>
                   <a:srgbClr val="123DAE"/>
                 </a:solidFill>
@@ -8443,17 +8517,18 @@
               </a:defRPr>
             </a:pPr>
             <a:r>
-              <a:t>unsafe bytes</a:t>
-            </a:r>
-          </a:p>
-        </p:txBody>
-      </p:sp>
-      <p:sp>
-        <p:nvSpPr>
-          <p:cNvPr id="12" name="Shape-180">
-            <a:extLst xmlns:a="http://schemas.openxmlformats.org/drawingml/2006/main">
-              <a:ext uri="{FF2B5EF4-FFF2-40B4-BE49-F238E27FC236}">
-                <a16:creationId xmlns:a16="http://schemas.microsoft.com/office/drawing/2014/main" id="{A8428FD2-D59C-4CDA-AB17-BE12FA65B5B5}"/>
+              <a:t>unsafe
+bytes</a:t>
+            </a:r>
+          </a:p>
+        </p:txBody>
+      </p:sp>
+      <p:sp>
+        <p:nvSpPr>
+          <p:cNvPr id="12" name="Shape-182">
+            <a:extLst xmlns:a="http://schemas.openxmlformats.org/drawingml/2006/main">
+              <a:ext uri="{FF2B5EF4-FFF2-40B4-BE49-F238E27FC236}">
+                <a16:creationId xmlns:a16="http://schemas.microsoft.com/office/drawing/2014/main" id="{16D982E7-C214-4F69-A183-41CCB9D2A079}"/>
               </a:ext>
             </a:extLst>
           </p:cNvPr>
@@ -8485,35 +8560,35 @@
       </p:sp>
       <p:sp>
         <p:nvSpPr>
-          <p:cNvPr id="13" name="Text-181">
-            <a:extLst xmlns:a="http://schemas.openxmlformats.org/drawingml/2006/main">
-              <a:ext uri="{FF2B5EF4-FFF2-40B4-BE49-F238E27FC236}">
-                <a16:creationId xmlns:a16="http://schemas.microsoft.com/office/drawing/2014/main" id="{13ECA59D-B288-4DEE-AF3A-7AACB757B2DF}"/>
-              </a:ext>
-            </a:extLst>
-          </p:cNvPr>
-          <p:cNvSpPr>
-            <a:spLocks xmlns:a="http://schemas.openxmlformats.org/drawingml/2006/main" noGrp="1"/>
-          </p:cNvSpPr>
-          <p:nvPr/>
-        </p:nvSpPr>
-        <p:spPr>
-          <a:xfrm xmlns:a="http://schemas.openxmlformats.org/drawingml/2006/main">
-            <a:off x="5010150" y="2238375"/>
-            <a:ext cx="1562100" cy="323850"/>
-          </a:xfrm>
-          <a:prstGeom xmlns:a="http://schemas.openxmlformats.org/drawingml/2006/main" prst="rect">
-            <a:avLst/>
-          </a:prstGeom>
-        </p:spPr>
-        <p:txBody>
-          <a:bodyPr xmlns:a="http://schemas.openxmlformats.org/drawingml/2006/main" lIns="0" tIns="0" rIns="0" bIns="0" anchor="t">
-            <a:normAutofit fontScale="100000"/>
+          <p:cNvPr id="13" name="Text-183">
+            <a:extLst xmlns:a="http://schemas.openxmlformats.org/drawingml/2006/main">
+              <a:ext uri="{FF2B5EF4-FFF2-40B4-BE49-F238E27FC236}">
+                <a16:creationId xmlns:a16="http://schemas.microsoft.com/office/drawing/2014/main" id="{0654388B-F1DA-4152-AA60-641F6C8B36C2}"/>
+              </a:ext>
+            </a:extLst>
+          </p:cNvPr>
+          <p:cNvSpPr>
+            <a:spLocks xmlns:a="http://schemas.openxmlformats.org/drawingml/2006/main" noGrp="1"/>
+          </p:cNvSpPr>
+          <p:nvPr/>
+        </p:nvSpPr>
+        <p:spPr>
+          <a:xfrm xmlns:a="http://schemas.openxmlformats.org/drawingml/2006/main">
+            <a:off x="4972050" y="2152650"/>
+            <a:ext cx="1638300" cy="495300"/>
+          </a:xfrm>
+          <a:prstGeom xmlns:a="http://schemas.openxmlformats.org/drawingml/2006/main" prst="rect">
+            <a:avLst/>
+          </a:prstGeom>
+        </p:spPr>
+        <p:txBody>
+          <a:bodyPr xmlns:a="http://schemas.openxmlformats.org/drawingml/2006/main" lIns="0" tIns="0" rIns="0" bIns="0" anchor="t">
+            <a:normAutofit fontScale="98485"/>
           </a:bodyPr>
           <a:lstStyle xmlns:a="http://schemas.openxmlformats.org/drawingml/2006/main"/>
           <a:p xmlns:a="http://schemas.openxmlformats.org/drawingml/2006/main">
             <a:pPr algn="ctr">
-              <a:defRPr sz="1350" b="1">
+              <a:defRPr sz="1650" b="1">
                 <a:solidFill>
                   <a:srgbClr val="123DAE"/>
                 </a:solidFill>
@@ -8523,17 +8598,18 @@
               </a:defRPr>
             </a:pPr>
             <a:r>
-              <a:t>classify safely</a:t>
-            </a:r>
-          </a:p>
-        </p:txBody>
-      </p:sp>
-      <p:sp>
-        <p:nvSpPr>
-          <p:cNvPr id="14" name="Shape-182">
-            <a:extLst xmlns:a="http://schemas.openxmlformats.org/drawingml/2006/main">
-              <a:ext uri="{FF2B5EF4-FFF2-40B4-BE49-F238E27FC236}">
-                <a16:creationId xmlns:a16="http://schemas.microsoft.com/office/drawing/2014/main" id="{14033D10-D172-4EB6-BDF3-9B9D76A59DC4}"/>
+              <a:t>classify
+safely</a:t>
+            </a:r>
+          </a:p>
+        </p:txBody>
+      </p:sp>
+      <p:sp>
+        <p:nvSpPr>
+          <p:cNvPr id="14" name="Shape-184">
+            <a:extLst xmlns:a="http://schemas.openxmlformats.org/drawingml/2006/main">
+              <a:ext uri="{FF2B5EF4-FFF2-40B4-BE49-F238E27FC236}">
+                <a16:creationId xmlns:a16="http://schemas.microsoft.com/office/drawing/2014/main" id="{D051F3BB-DE97-46AF-BE99-286D14D7ACF6}"/>
               </a:ext>
             </a:extLst>
           </p:cNvPr>
@@ -8565,22 +8641,22 @@
       </p:sp>
       <p:sp>
         <p:nvSpPr>
-          <p:cNvPr id="15" name="Text-183">
-            <a:extLst xmlns:a="http://schemas.openxmlformats.org/drawingml/2006/main">
-              <a:ext uri="{FF2B5EF4-FFF2-40B4-BE49-F238E27FC236}">
-                <a16:creationId xmlns:a16="http://schemas.microsoft.com/office/drawing/2014/main" id="{FBD8DD9D-BBDC-47E9-BDA8-79023707C2E2}"/>
-              </a:ext>
-            </a:extLst>
-          </p:cNvPr>
-          <p:cNvSpPr>
-            <a:spLocks xmlns:a="http://schemas.openxmlformats.org/drawingml/2006/main" noGrp="1"/>
-          </p:cNvSpPr>
-          <p:nvPr/>
-        </p:nvSpPr>
-        <p:spPr>
-          <a:xfrm xmlns:a="http://schemas.openxmlformats.org/drawingml/2006/main">
-            <a:off x="7181850" y="2238375"/>
-            <a:ext cx="1562100" cy="323850"/>
+          <p:cNvPr id="15" name="Text-185">
+            <a:extLst xmlns:a="http://schemas.openxmlformats.org/drawingml/2006/main">
+              <a:ext uri="{FF2B5EF4-FFF2-40B4-BE49-F238E27FC236}">
+                <a16:creationId xmlns:a16="http://schemas.microsoft.com/office/drawing/2014/main" id="{91942087-63C3-493E-A959-0770BBF75963}"/>
+              </a:ext>
+            </a:extLst>
+          </p:cNvPr>
+          <p:cNvSpPr>
+            <a:spLocks xmlns:a="http://schemas.openxmlformats.org/drawingml/2006/main" noGrp="1"/>
+          </p:cNvSpPr>
+          <p:nvPr/>
+        </p:nvSpPr>
+        <p:spPr>
+          <a:xfrm xmlns:a="http://schemas.openxmlformats.org/drawingml/2006/main">
+            <a:off x="7143750" y="2152650"/>
+            <a:ext cx="1638300" cy="495300"/>
           </a:xfrm>
           <a:prstGeom xmlns:a="http://schemas.openxmlformats.org/drawingml/2006/main" prst="rect">
             <a:avLst/>
@@ -8593,7 +8669,7 @@
           <a:lstStyle xmlns:a="http://schemas.openxmlformats.org/drawingml/2006/main"/>
           <a:p xmlns:a="http://schemas.openxmlformats.org/drawingml/2006/main">
             <a:pPr algn="ctr">
-              <a:defRPr sz="1350" b="1">
+              <a:defRPr sz="1650" b="1">
                 <a:solidFill>
                   <a:srgbClr val="123DAE"/>
                 </a:solidFill>
@@ -8610,10 +8686,10 @@
       </p:sp>
       <p:sp>
         <p:nvSpPr>
-          <p:cNvPr id="16" name="Shape-184">
-            <a:extLst xmlns:a="http://schemas.openxmlformats.org/drawingml/2006/main">
-              <a:ext uri="{FF2B5EF4-FFF2-40B4-BE49-F238E27FC236}">
-                <a16:creationId xmlns:a16="http://schemas.microsoft.com/office/drawing/2014/main" id="{291336D3-2E07-4E85-848A-40F26CB6E6F4}"/>
+          <p:cNvPr id="16" name="Shape-186">
+            <a:extLst xmlns:a="http://schemas.openxmlformats.org/drawingml/2006/main">
+              <a:ext uri="{FF2B5EF4-FFF2-40B4-BE49-F238E27FC236}">
+                <a16:creationId xmlns:a16="http://schemas.microsoft.com/office/drawing/2014/main" id="{FB596392-021B-4126-92C8-0C83688135AA}"/>
               </a:ext>
             </a:extLst>
           </p:cNvPr>
@@ -8645,35 +8721,35 @@
       </p:sp>
       <p:sp>
         <p:nvSpPr>
-          <p:cNvPr id="17" name="Text-185">
-            <a:extLst xmlns:a="http://schemas.openxmlformats.org/drawingml/2006/main">
-              <a:ext uri="{FF2B5EF4-FFF2-40B4-BE49-F238E27FC236}">
-                <a16:creationId xmlns:a16="http://schemas.microsoft.com/office/drawing/2014/main" id="{503AA23D-2ADB-496D-8B4C-07B00FB86DA2}"/>
-              </a:ext>
-            </a:extLst>
-          </p:cNvPr>
-          <p:cNvSpPr>
-            <a:spLocks xmlns:a="http://schemas.openxmlformats.org/drawingml/2006/main" noGrp="1"/>
-          </p:cNvSpPr>
-          <p:nvPr/>
-        </p:nvSpPr>
-        <p:spPr>
-          <a:xfrm xmlns:a="http://schemas.openxmlformats.org/drawingml/2006/main">
-            <a:off x="9353550" y="2238375"/>
-            <a:ext cx="1562100" cy="323850"/>
-          </a:xfrm>
-          <a:prstGeom xmlns:a="http://schemas.openxmlformats.org/drawingml/2006/main" prst="rect">
-            <a:avLst/>
-          </a:prstGeom>
-        </p:spPr>
-        <p:txBody>
-          <a:bodyPr xmlns:a="http://schemas.openxmlformats.org/drawingml/2006/main" lIns="0" tIns="0" rIns="0" bIns="0" anchor="t">
-            <a:normAutofit fontScale="100000"/>
+          <p:cNvPr id="17" name="Text-187">
+            <a:extLst xmlns:a="http://schemas.openxmlformats.org/drawingml/2006/main">
+              <a:ext uri="{FF2B5EF4-FFF2-40B4-BE49-F238E27FC236}">
+                <a16:creationId xmlns:a16="http://schemas.microsoft.com/office/drawing/2014/main" id="{66164952-7FF4-40E1-911E-00DBC443C936}"/>
+              </a:ext>
+            </a:extLst>
+          </p:cNvPr>
+          <p:cNvSpPr>
+            <a:spLocks xmlns:a="http://schemas.openxmlformats.org/drawingml/2006/main" noGrp="1"/>
+          </p:cNvSpPr>
+          <p:nvPr/>
+        </p:nvSpPr>
+        <p:spPr>
+          <a:xfrm xmlns:a="http://schemas.openxmlformats.org/drawingml/2006/main">
+            <a:off x="9315450" y="2152650"/>
+            <a:ext cx="1638300" cy="495300"/>
+          </a:xfrm>
+          <a:prstGeom xmlns:a="http://schemas.openxmlformats.org/drawingml/2006/main" prst="rect">
+            <a:avLst/>
+          </a:prstGeom>
+        </p:spPr>
+        <p:txBody>
+          <a:bodyPr xmlns:a="http://schemas.openxmlformats.org/drawingml/2006/main" lIns="0" tIns="0" rIns="0" bIns="0" anchor="t">
+            <a:normAutofit fontScale="98485"/>
           </a:bodyPr>
           <a:lstStyle xmlns:a="http://schemas.openxmlformats.org/drawingml/2006/main"/>
           <a:p xmlns:a="http://schemas.openxmlformats.org/drawingml/2006/main">
             <a:pPr algn="ctr">
-              <a:defRPr sz="1350" b="1">
+              <a:defRPr sz="1650" b="1">
                 <a:solidFill>
                   <a:srgbClr val="18794E"/>
                 </a:solidFill>
@@ -8683,17 +8759,18 @@
               </a:defRPr>
             </a:pPr>
             <a:r>
-              <a:t>resume next LF</a:t>
-            </a:r>
-          </a:p>
-        </p:txBody>
-      </p:sp>
-      <p:sp>
-        <p:nvSpPr>
-          <p:cNvPr id="18" name="Shape-186">
-            <a:extLst xmlns:a="http://schemas.openxmlformats.org/drawingml/2006/main">
-              <a:ext uri="{FF2B5EF4-FFF2-40B4-BE49-F238E27FC236}">
-                <a16:creationId xmlns:a16="http://schemas.microsoft.com/office/drawing/2014/main" id="{136D6269-BE1C-466A-9D16-32C63881CC96}"/>
+              <a:t>resume
+next LF</a:t>
+            </a:r>
+          </a:p>
+        </p:txBody>
+      </p:sp>
+      <p:sp>
+        <p:nvSpPr>
+          <p:cNvPr id="18" name="Shape-188">
+            <a:extLst xmlns:a="http://schemas.openxmlformats.org/drawingml/2006/main">
+              <a:ext uri="{FF2B5EF4-FFF2-40B4-BE49-F238E27FC236}">
+                <a16:creationId xmlns:a16="http://schemas.microsoft.com/office/drawing/2014/main" id="{298B1CC8-1EA0-451E-A835-D9CF69D14F3E}"/>
               </a:ext>
             </a:extLst>
           </p:cNvPr>
@@ -8725,35 +8802,35 @@
       </p:sp>
       <p:sp>
         <p:nvSpPr>
-          <p:cNvPr id="19" name="Text-187">
-            <a:extLst xmlns:a="http://schemas.openxmlformats.org/drawingml/2006/main">
-              <a:ext uri="{FF2B5EF4-FFF2-40B4-BE49-F238E27FC236}">
-                <a16:creationId xmlns:a16="http://schemas.microsoft.com/office/drawing/2014/main" id="{AB4640B2-CAD0-4D76-B683-EEB0A8B8A2EF}"/>
-              </a:ext>
-            </a:extLst>
-          </p:cNvPr>
-          <p:cNvSpPr>
-            <a:spLocks xmlns:a="http://schemas.openxmlformats.org/drawingml/2006/main" noGrp="1"/>
-          </p:cNvSpPr>
-          <p:nvPr/>
-        </p:nvSpPr>
-        <p:spPr>
-          <a:xfrm xmlns:a="http://schemas.openxmlformats.org/drawingml/2006/main">
-            <a:off x="2838450" y="4181475"/>
-            <a:ext cx="1562100" cy="323850"/>
-          </a:xfrm>
-          <a:prstGeom xmlns:a="http://schemas.openxmlformats.org/drawingml/2006/main" prst="rect">
-            <a:avLst/>
-          </a:prstGeom>
-        </p:spPr>
-        <p:txBody>
-          <a:bodyPr xmlns:a="http://schemas.openxmlformats.org/drawingml/2006/main" lIns="0" tIns="0" rIns="0" bIns="0" anchor="t">
-            <a:normAutofit fontScale="100000"/>
+          <p:cNvPr id="19" name="Text-189">
+            <a:extLst xmlns:a="http://schemas.openxmlformats.org/drawingml/2006/main">
+              <a:ext uri="{FF2B5EF4-FFF2-40B4-BE49-F238E27FC236}">
+                <a16:creationId xmlns:a16="http://schemas.microsoft.com/office/drawing/2014/main" id="{92B0FE4B-5770-471F-B0D4-25F553C8315A}"/>
+              </a:ext>
+            </a:extLst>
+          </p:cNvPr>
+          <p:cNvSpPr>
+            <a:spLocks xmlns:a="http://schemas.openxmlformats.org/drawingml/2006/main" noGrp="1"/>
+          </p:cNvSpPr>
+          <p:nvPr/>
+        </p:nvSpPr>
+        <p:spPr>
+          <a:xfrm xmlns:a="http://schemas.openxmlformats.org/drawingml/2006/main">
+            <a:off x="2800350" y="4095750"/>
+            <a:ext cx="1638300" cy="495300"/>
+          </a:xfrm>
+          <a:prstGeom xmlns:a="http://schemas.openxmlformats.org/drawingml/2006/main" prst="rect">
+            <a:avLst/>
+          </a:prstGeom>
+        </p:spPr>
+        <p:txBody>
+          <a:bodyPr xmlns:a="http://schemas.openxmlformats.org/drawingml/2006/main" lIns="0" tIns="0" rIns="0" bIns="0" anchor="t">
+            <a:normAutofit fontScale="98485"/>
           </a:bodyPr>
           <a:lstStyle xmlns:a="http://schemas.openxmlformats.org/drawingml/2006/main"/>
           <a:p xmlns:a="http://schemas.openxmlformats.org/drawingml/2006/main">
             <a:pPr algn="ctr">
-              <a:defRPr sz="1350" b="1">
+              <a:defRPr sz="1650" b="1">
                 <a:solidFill>
                   <a:srgbClr val="C33A32"/>
                 </a:solidFill>
@@ -8763,17 +8840,18 @@
               </a:defRPr>
             </a:pPr>
             <a:r>
-              <a:t>invalid event</a:t>
-            </a:r>
-          </a:p>
-        </p:txBody>
-      </p:sp>
-      <p:sp>
-        <p:nvSpPr>
-          <p:cNvPr id="20" name="Shape-188">
-            <a:extLst xmlns:a="http://schemas.openxmlformats.org/drawingml/2006/main">
-              <a:ext uri="{FF2B5EF4-FFF2-40B4-BE49-F238E27FC236}">
-                <a16:creationId xmlns:a16="http://schemas.microsoft.com/office/drawing/2014/main" id="{26A4D780-9292-4080-8F87-C7CE56034A53}"/>
+              <a:t>invalid
+event</a:t>
+            </a:r>
+          </a:p>
+        </p:txBody>
+      </p:sp>
+      <p:sp>
+        <p:nvSpPr>
+          <p:cNvPr id="20" name="Shape-190">
+            <a:extLst xmlns:a="http://schemas.openxmlformats.org/drawingml/2006/main">
+              <a:ext uri="{FF2B5EF4-FFF2-40B4-BE49-F238E27FC236}">
+                <a16:creationId xmlns:a16="http://schemas.microsoft.com/office/drawing/2014/main" id="{E735EE4A-E6EC-401D-B5AD-7CB87C0135F7}"/>
               </a:ext>
             </a:extLst>
           </p:cNvPr>
@@ -8805,35 +8883,35 @@
       </p:sp>
       <p:sp>
         <p:nvSpPr>
-          <p:cNvPr id="21" name="Text-189">
-            <a:extLst xmlns:a="http://schemas.openxmlformats.org/drawingml/2006/main">
-              <a:ext uri="{FF2B5EF4-FFF2-40B4-BE49-F238E27FC236}">
-                <a16:creationId xmlns:a16="http://schemas.microsoft.com/office/drawing/2014/main" id="{3A39FA1E-320B-4133-BFBA-2AEB4918D7B3}"/>
-              </a:ext>
-            </a:extLst>
-          </p:cNvPr>
-          <p:cNvSpPr>
-            <a:spLocks xmlns:a="http://schemas.openxmlformats.org/drawingml/2006/main" noGrp="1"/>
-          </p:cNvSpPr>
-          <p:nvPr/>
-        </p:nvSpPr>
-        <p:spPr>
-          <a:xfrm xmlns:a="http://schemas.openxmlformats.org/drawingml/2006/main">
-            <a:off x="5010150" y="4181475"/>
-            <a:ext cx="1562100" cy="323850"/>
-          </a:xfrm>
-          <a:prstGeom xmlns:a="http://schemas.openxmlformats.org/drawingml/2006/main" prst="rect">
-            <a:avLst/>
-          </a:prstGeom>
-        </p:spPr>
-        <p:txBody>
-          <a:bodyPr xmlns:a="http://schemas.openxmlformats.org/drawingml/2006/main" lIns="0" tIns="0" rIns="0" bIns="0" anchor="t">
-            <a:normAutofit fontScale="100000"/>
+          <p:cNvPr id="21" name="Text-191">
+            <a:extLst xmlns:a="http://schemas.openxmlformats.org/drawingml/2006/main">
+              <a:ext uri="{FF2B5EF4-FFF2-40B4-BE49-F238E27FC236}">
+                <a16:creationId xmlns:a16="http://schemas.microsoft.com/office/drawing/2014/main" id="{19E644DF-B8E3-4B23-AF2E-555B3AACF0B4}"/>
+              </a:ext>
+            </a:extLst>
+          </p:cNvPr>
+          <p:cNvSpPr>
+            <a:spLocks xmlns:a="http://schemas.openxmlformats.org/drawingml/2006/main" noGrp="1"/>
+          </p:cNvSpPr>
+          <p:nvPr/>
+        </p:nvSpPr>
+        <p:spPr>
+          <a:xfrm xmlns:a="http://schemas.openxmlformats.org/drawingml/2006/main">
+            <a:off x="4972050" y="4095750"/>
+            <a:ext cx="1638300" cy="495300"/>
+          </a:xfrm>
+          <a:prstGeom xmlns:a="http://schemas.openxmlformats.org/drawingml/2006/main" prst="rect">
+            <a:avLst/>
+          </a:prstGeom>
+        </p:spPr>
+        <p:txBody>
+          <a:bodyPr xmlns:a="http://schemas.openxmlformats.org/drawingml/2006/main" lIns="0" tIns="0" rIns="0" bIns="0" anchor="t">
+            <a:normAutofit fontScale="98485"/>
           </a:bodyPr>
           <a:lstStyle xmlns:a="http://schemas.openxmlformats.org/drawingml/2006/main"/>
           <a:p xmlns:a="http://schemas.openxmlformats.org/drawingml/2006/main">
             <a:pPr algn="ctr">
-              <a:defRPr sz="1350" b="1">
+              <a:defRPr sz="1650" b="1">
                 <a:solidFill>
                   <a:srgbClr val="C33A32"/>
                 </a:solidFill>
@@ -8843,17 +8921,18 @@
               </a:defRPr>
             </a:pPr>
             <a:r>
-              <a:t>protocol-failed</a:t>
-            </a:r>
-          </a:p>
-        </p:txBody>
-      </p:sp>
-      <p:sp>
-        <p:nvSpPr>
-          <p:cNvPr id="22" name="Shape-190">
-            <a:extLst xmlns:a="http://schemas.openxmlformats.org/drawingml/2006/main">
-              <a:ext uri="{FF2B5EF4-FFF2-40B4-BE49-F238E27FC236}">
-                <a16:creationId xmlns:a16="http://schemas.microsoft.com/office/drawing/2014/main" id="{347933F3-AB75-4F15-83CA-A644F299CC63}"/>
+              <a:t>protocol-
+failed</a:t>
+            </a:r>
+          </a:p>
+        </p:txBody>
+      </p:sp>
+      <p:sp>
+        <p:nvSpPr>
+          <p:cNvPr id="22" name="Shape-192">
+            <a:extLst xmlns:a="http://schemas.openxmlformats.org/drawingml/2006/main">
+              <a:ext uri="{FF2B5EF4-FFF2-40B4-BE49-F238E27FC236}">
+                <a16:creationId xmlns:a16="http://schemas.microsoft.com/office/drawing/2014/main" id="{94D0935D-6453-4BD3-A5A6-959F75B9E14D}"/>
               </a:ext>
             </a:extLst>
           </p:cNvPr>
@@ -8885,35 +8964,35 @@
       </p:sp>
       <p:sp>
         <p:nvSpPr>
-          <p:cNvPr id="23" name="Text-191">
-            <a:extLst xmlns:a="http://schemas.openxmlformats.org/drawingml/2006/main">
-              <a:ext uri="{FF2B5EF4-FFF2-40B4-BE49-F238E27FC236}">
-                <a16:creationId xmlns:a16="http://schemas.microsoft.com/office/drawing/2014/main" id="{EC1DEC30-BA1F-48BB-A66D-C0283B7BD009}"/>
-              </a:ext>
-            </a:extLst>
-          </p:cNvPr>
-          <p:cNvSpPr>
-            <a:spLocks xmlns:a="http://schemas.openxmlformats.org/drawingml/2006/main" noGrp="1"/>
-          </p:cNvSpPr>
-          <p:nvPr/>
-        </p:nvSpPr>
-        <p:spPr>
-          <a:xfrm xmlns:a="http://schemas.openxmlformats.org/drawingml/2006/main">
-            <a:off x="7181850" y="4181475"/>
-            <a:ext cx="1562100" cy="323850"/>
-          </a:xfrm>
-          <a:prstGeom xmlns:a="http://schemas.openxmlformats.org/drawingml/2006/main" prst="rect">
-            <a:avLst/>
-          </a:prstGeom>
-        </p:spPr>
-        <p:txBody>
-          <a:bodyPr xmlns:a="http://schemas.openxmlformats.org/drawingml/2006/main" lIns="0" tIns="0" rIns="0" bIns="0" anchor="t">
-            <a:normAutofit fontScale="100000"/>
+          <p:cNvPr id="23" name="Text-193">
+            <a:extLst xmlns:a="http://schemas.openxmlformats.org/drawingml/2006/main">
+              <a:ext uri="{FF2B5EF4-FFF2-40B4-BE49-F238E27FC236}">
+                <a16:creationId xmlns:a16="http://schemas.microsoft.com/office/drawing/2014/main" id="{763832C8-1AEE-458C-BCD9-6D08B1DB0EAD}"/>
+              </a:ext>
+            </a:extLst>
+          </p:cNvPr>
+          <p:cNvSpPr>
+            <a:spLocks xmlns:a="http://schemas.openxmlformats.org/drawingml/2006/main" noGrp="1"/>
+          </p:cNvSpPr>
+          <p:nvPr/>
+        </p:nvSpPr>
+        <p:spPr>
+          <a:xfrm xmlns:a="http://schemas.openxmlformats.org/drawingml/2006/main">
+            <a:off x="7143750" y="4095750"/>
+            <a:ext cx="1638300" cy="495300"/>
+          </a:xfrm>
+          <a:prstGeom xmlns:a="http://schemas.openxmlformats.org/drawingml/2006/main" prst="rect">
+            <a:avLst/>
+          </a:prstGeom>
+        </p:spPr>
+        <p:txBody>
+          <a:bodyPr xmlns:a="http://schemas.openxmlformats.org/drawingml/2006/main" lIns="0" tIns="0" rIns="0" bIns="0" anchor="t">
+            <a:normAutofit fontScale="98485"/>
           </a:bodyPr>
           <a:lstStyle xmlns:a="http://schemas.openxmlformats.org/drawingml/2006/main"/>
           <a:p xmlns:a="http://schemas.openxmlformats.org/drawingml/2006/main">
             <a:pPr algn="ctr">
-              <a:defRPr sz="1350" b="1">
+              <a:defRPr sz="1650" b="1">
                 <a:solidFill>
                   <a:srgbClr val="C33A32"/>
                 </a:solidFill>
@@ -8923,17 +9002,18 @@
               </a:defRPr>
             </a:pPr>
             <a:r>
-              <a:t>close command input</a:t>
-            </a:r>
-          </a:p>
-        </p:txBody>
-      </p:sp>
-      <p:sp>
-        <p:nvSpPr>
-          <p:cNvPr id="24" name="Shape-192">
-            <a:extLst xmlns:a="http://schemas.openxmlformats.org/drawingml/2006/main">
-              <a:ext uri="{FF2B5EF4-FFF2-40B4-BE49-F238E27FC236}">
-                <a16:creationId xmlns:a16="http://schemas.microsoft.com/office/drawing/2014/main" id="{D4DA9BB4-ECA3-41CF-85DD-46AF087D9651}"/>
+              <a:t>close command
+input</a:t>
+            </a:r>
+          </a:p>
+        </p:txBody>
+      </p:sp>
+      <p:sp>
+        <p:nvSpPr>
+          <p:cNvPr id="24" name="Shape-194">
+            <a:extLst xmlns:a="http://schemas.openxmlformats.org/drawingml/2006/main">
+              <a:ext uri="{FF2B5EF4-FFF2-40B4-BE49-F238E27FC236}">
+                <a16:creationId xmlns:a16="http://schemas.microsoft.com/office/drawing/2014/main" id="{8F452D14-3790-484B-92DA-001C2740D05C}"/>
               </a:ext>
             </a:extLst>
           </p:cNvPr>
@@ -8965,35 +9045,35 @@
       </p:sp>
       <p:sp>
         <p:nvSpPr>
-          <p:cNvPr id="25" name="Text-193">
-            <a:extLst xmlns:a="http://schemas.openxmlformats.org/drawingml/2006/main">
-              <a:ext uri="{FF2B5EF4-FFF2-40B4-BE49-F238E27FC236}">
-                <a16:creationId xmlns:a16="http://schemas.microsoft.com/office/drawing/2014/main" id="{9EED9A16-C603-4874-B78C-027F7445C5EF}"/>
-              </a:ext>
-            </a:extLst>
-          </p:cNvPr>
-          <p:cNvSpPr>
-            <a:spLocks xmlns:a="http://schemas.openxmlformats.org/drawingml/2006/main" noGrp="1"/>
-          </p:cNvSpPr>
-          <p:nvPr/>
-        </p:nvSpPr>
-        <p:spPr>
-          <a:xfrm xmlns:a="http://schemas.openxmlformats.org/drawingml/2006/main">
-            <a:off x="9353550" y="4181475"/>
-            <a:ext cx="1562100" cy="323850"/>
-          </a:xfrm>
-          <a:prstGeom xmlns:a="http://schemas.openxmlformats.org/drawingml/2006/main" prst="rect">
-            <a:avLst/>
-          </a:prstGeom>
-        </p:spPr>
-        <p:txBody>
-          <a:bodyPr xmlns:a="http://schemas.openxmlformats.org/drawingml/2006/main" lIns="0" tIns="0" rIns="0" bIns="0" anchor="t">
-            <a:normAutofit fontScale="100000"/>
+          <p:cNvPr id="25" name="Text-195">
+            <a:extLst xmlns:a="http://schemas.openxmlformats.org/drawingml/2006/main">
+              <a:ext uri="{FF2B5EF4-FFF2-40B4-BE49-F238E27FC236}">
+                <a16:creationId xmlns:a16="http://schemas.microsoft.com/office/drawing/2014/main" id="{A4CE8464-6684-424B-9CA5-A5004EFAF64F}"/>
+              </a:ext>
+            </a:extLst>
+          </p:cNvPr>
+          <p:cNvSpPr>
+            <a:spLocks xmlns:a="http://schemas.openxmlformats.org/drawingml/2006/main" noGrp="1"/>
+          </p:cNvSpPr>
+          <p:nvPr/>
+        </p:nvSpPr>
+        <p:spPr>
+          <a:xfrm xmlns:a="http://schemas.openxmlformats.org/drawingml/2006/main">
+            <a:off x="9315450" y="4095750"/>
+            <a:ext cx="1638300" cy="495300"/>
+          </a:xfrm>
+          <a:prstGeom xmlns:a="http://schemas.openxmlformats.org/drawingml/2006/main" prst="rect">
+            <a:avLst/>
+          </a:prstGeom>
+        </p:spPr>
+        <p:txBody>
+          <a:bodyPr xmlns:a="http://schemas.openxmlformats.org/drawingml/2006/main" lIns="0" tIns="0" rIns="0" bIns="0" anchor="t">
+            <a:normAutofit fontScale="98485"/>
           </a:bodyPr>
           <a:lstStyle xmlns:a="http://schemas.openxmlformats.org/drawingml/2006/main"/>
           <a:p xmlns:a="http://schemas.openxmlformats.org/drawingml/2006/main">
             <a:pPr algn="ctr">
-              <a:defRPr sz="1350" b="1">
+              <a:defRPr sz="1650" b="1">
                 <a:solidFill>
                   <a:srgbClr val="C33A32"/>
                 </a:solidFill>
@@ -9003,17 +9083,18 @@
               </a:defRPr>
             </a:pPr>
             <a:r>
-              <a:t>never guess</a:t>
-            </a:r>
-          </a:p>
-        </p:txBody>
-      </p:sp>
-      <p:sp>
-        <p:nvSpPr>
-          <p:cNvPr id="26" name="Text-194">
-            <a:extLst xmlns:a="http://schemas.openxmlformats.org/drawingml/2006/main">
-              <a:ext uri="{FF2B5EF4-FFF2-40B4-BE49-F238E27FC236}">
-                <a16:creationId xmlns:a16="http://schemas.microsoft.com/office/drawing/2014/main" id="{1A925C06-5156-4032-8466-0DB64ED060F9}"/>
+              <a:t>never
+guess</a:t>
+            </a:r>
+          </a:p>
+        </p:txBody>
+      </p:sp>
+      <p:sp>
+        <p:nvSpPr>
+          <p:cNvPr id="26" name="Text-196">
+            <a:extLst xmlns:a="http://schemas.openxmlformats.org/drawingml/2006/main">
+              <a:ext uri="{FF2B5EF4-FFF2-40B4-BE49-F238E27FC236}">
+                <a16:creationId xmlns:a16="http://schemas.microsoft.com/office/drawing/2014/main" id="{35DFAB94-86A0-4EC0-8B49-E184343D7807}"/>
               </a:ext>
             </a:extLst>
           </p:cNvPr>
@@ -9055,10 +9136,10 @@
       </p:sp>
       <p:sp>
         <p:nvSpPr>
-          <p:cNvPr id="27" name="Text-195">
-            <a:extLst xmlns:a="http://schemas.openxmlformats.org/drawingml/2006/main">
-              <a:ext uri="{FF2B5EF4-FFF2-40B4-BE49-F238E27FC236}">
-                <a16:creationId xmlns:a16="http://schemas.microsoft.com/office/drawing/2014/main" id="{C355B053-0432-45C1-B3E4-84DDCFB03163}"/>
+          <p:cNvPr id="27" name="Text-197">
+            <a:extLst xmlns:a="http://schemas.openxmlformats.org/drawingml/2006/main">
+              <a:ext uri="{FF2B5EF4-FFF2-40B4-BE49-F238E27FC236}">
+                <a16:creationId xmlns:a16="http://schemas.microsoft.com/office/drawing/2014/main" id="{5903814C-A8B8-4F60-ADCA-3B2378E44898}"/>
               </a:ext>
             </a:extLst>
           </p:cNvPr>
@@ -9100,10 +9181,10 @@
       </p:sp>
       <p:sp>
         <p:nvSpPr>
-          <p:cNvPr id="28" name="Text-196">
-            <a:extLst xmlns:a="http://schemas.openxmlformats.org/drawingml/2006/main">
-              <a:ext uri="{FF2B5EF4-FFF2-40B4-BE49-F238E27FC236}">
-                <a16:creationId xmlns:a16="http://schemas.microsoft.com/office/drawing/2014/main" id="{7E9E2735-7611-4069-BEB2-E48D1ED55A14}"/>
+          <p:cNvPr id="28" name="Text-198">
+            <a:extLst xmlns:a="http://schemas.openxmlformats.org/drawingml/2006/main">
+              <a:ext uri="{FF2B5EF4-FFF2-40B4-BE49-F238E27FC236}">
+                <a16:creationId xmlns:a16="http://schemas.microsoft.com/office/drawing/2014/main" id="{1072C0C8-7C60-4B8A-A7C6-F80E271A3388}"/>
               </a:ext>
             </a:extLst>
           </p:cNvPr>
@@ -9145,7 +9226,7 @@
       </p:sp>
       <p:cxnSp>
         <p:nvCxnSpPr>
-          <p:cNvPr id="60" name="Rule-197"/>
+          <p:cNvPr id="60" name="Rule-199"/>
           <p:cNvCxnSpPr/>
           <p:nvPr/>
         </p:nvCxnSpPr>
@@ -9167,10 +9248,10 @@
       </p:cxnSp>
       <p:sp>
         <p:nvSpPr>
-          <p:cNvPr id="30" name="Text-198">
-            <a:extLst xmlns:a="http://schemas.openxmlformats.org/drawingml/2006/main">
-              <a:ext uri="{FF2B5EF4-FFF2-40B4-BE49-F238E27FC236}">
-                <a16:creationId xmlns:a16="http://schemas.microsoft.com/office/drawing/2014/main" id="{F98E4785-058E-4760-9B1C-36A2B15BA3FA}"/>
+          <p:cNvPr id="30" name="Text-200">
+            <a:extLst xmlns:a="http://schemas.openxmlformats.org/drawingml/2006/main">
+              <a:ext uri="{FF2B5EF4-FFF2-40B4-BE49-F238E27FC236}">
+                <a16:creationId xmlns:a16="http://schemas.microsoft.com/office/drawing/2014/main" id="{4A6C4AD6-34C9-4DEA-8456-78C2B4B7472B}"/>
               </a:ext>
             </a:extLst>
           </p:cNvPr>
@@ -9212,10 +9293,10 @@
       </p:sp>
       <p:sp>
         <p:nvSpPr>
-          <p:cNvPr id="31" name="Text-199">
-            <a:extLst xmlns:a="http://schemas.openxmlformats.org/drawingml/2006/main">
-              <a:ext uri="{FF2B5EF4-FFF2-40B4-BE49-F238E27FC236}">
-                <a16:creationId xmlns:a16="http://schemas.microsoft.com/office/drawing/2014/main" id="{8A20470A-1654-4746-9928-14D8B3E520F8}"/>
+          <p:cNvPr id="31" name="Text-201">
+            <a:extLst xmlns:a="http://schemas.openxmlformats.org/drawingml/2006/main">
+              <a:ext uri="{FF2B5EF4-FFF2-40B4-BE49-F238E27FC236}">
+                <a16:creationId xmlns:a16="http://schemas.microsoft.com/office/drawing/2014/main" id="{E8C2E48A-C359-4D49-A4C2-CFEE4DB4556E}"/>
               </a:ext>
             </a:extLst>
           </p:cNvPr>
@@ -9258,7 +9339,7 @@
     </p:spTree>
     <p:extLst>
       <p:ext uri="{BB962C8B-B14F-4D97-AF65-F5344CB8AC3E}">
-        <p14:creationId xmlns:p14="http://schemas.microsoft.com/office/powerpoint/2010/main" val="1349594504"/>
+        <p14:creationId xmlns:p14="http://schemas.microsoft.com/office/powerpoint/2010/main" val="1367331018"/>
       </p:ext>
     </p:extLst>
   </p:cSld>
@@ -9279,10 +9360,10 @@
       </p:grpSpPr>
       <p:sp>
         <p:nvSpPr>
-          <p:cNvPr id="1" name="Shape-236">
-            <a:extLst xmlns:a="http://schemas.openxmlformats.org/drawingml/2006/main">
-              <a:ext uri="{FF2B5EF4-FFF2-40B4-BE49-F238E27FC236}">
-                <a16:creationId xmlns:a16="http://schemas.microsoft.com/office/drawing/2014/main" id="{0A512265-6A61-4877-BB69-DE1685B1140E}"/>
+          <p:cNvPr id="1" name="Shape-238">
+            <a:extLst xmlns:a="http://schemas.openxmlformats.org/drawingml/2006/main">
+              <a:ext uri="{FF2B5EF4-FFF2-40B4-BE49-F238E27FC236}">
+                <a16:creationId xmlns:a16="http://schemas.microsoft.com/office/drawing/2014/main" id="{61DB751A-DA39-4DE8-ACA9-58BB145E284C}"/>
               </a:ext>
             </a:extLst>
           </p:cNvPr>
@@ -9306,10 +9387,10 @@
       </p:sp>
       <p:sp>
         <p:nvSpPr>
-          <p:cNvPr id="2" name="Text-201">
-            <a:extLst xmlns:a="http://schemas.openxmlformats.org/drawingml/2006/main">
-              <a:ext uri="{FF2B5EF4-FFF2-40B4-BE49-F238E27FC236}">
-                <a16:creationId xmlns:a16="http://schemas.microsoft.com/office/drawing/2014/main" id="{A34D0C77-0C18-49D6-8BA8-6B9ECDCF0918}"/>
+          <p:cNvPr id="2" name="Text-203">
+            <a:extLst xmlns:a="http://schemas.openxmlformats.org/drawingml/2006/main">
+              <a:ext uri="{FF2B5EF4-FFF2-40B4-BE49-F238E27FC236}">
+                <a16:creationId xmlns:a16="http://schemas.microsoft.com/office/drawing/2014/main" id="{53AAFDA1-A699-4325-8C03-FC2447DF0C29}"/>
               </a:ext>
             </a:extLst>
           </p:cNvPr>
@@ -9351,7 +9432,7 @@
       </p:sp>
       <p:cxnSp>
         <p:nvCxnSpPr>
-          <p:cNvPr id="39" name="Rule-202"/>
+          <p:cNvPr id="39" name="Rule-204"/>
           <p:cNvCxnSpPr/>
           <p:nvPr/>
         </p:nvCxnSpPr>
@@ -9373,10 +9454,10 @@
       </p:cxnSp>
       <p:sp>
         <p:nvSpPr>
-          <p:cNvPr id="4" name="Shape-203">
-            <a:extLst xmlns:a="http://schemas.openxmlformats.org/drawingml/2006/main">
-              <a:ext uri="{FF2B5EF4-FFF2-40B4-BE49-F238E27FC236}">
-                <a16:creationId xmlns:a16="http://schemas.microsoft.com/office/drawing/2014/main" id="{46342596-3427-4284-93B8-EEEAD4707750}"/>
+          <p:cNvPr id="4" name="Shape-205">
+            <a:extLst xmlns:a="http://schemas.openxmlformats.org/drawingml/2006/main">
+              <a:ext uri="{FF2B5EF4-FFF2-40B4-BE49-F238E27FC236}">
+                <a16:creationId xmlns:a16="http://schemas.microsoft.com/office/drawing/2014/main" id="{19E107EF-98DB-4E8D-8D8B-E8F36642F85C}"/>
               </a:ext>
             </a:extLst>
           </p:cNvPr>
@@ -9408,22 +9489,22 @@
       </p:sp>
       <p:sp>
         <p:nvSpPr>
-          <p:cNvPr id="5" name="Text-204">
-            <a:extLst xmlns:a="http://schemas.openxmlformats.org/drawingml/2006/main">
-              <a:ext uri="{FF2B5EF4-FFF2-40B4-BE49-F238E27FC236}">
-                <a16:creationId xmlns:a16="http://schemas.microsoft.com/office/drawing/2014/main" id="{16EF3E9C-9308-47BB-A8CD-11ED7FFB794D}"/>
-              </a:ext>
-            </a:extLst>
-          </p:cNvPr>
-          <p:cNvSpPr>
-            <a:spLocks xmlns:a="http://schemas.openxmlformats.org/drawingml/2006/main" noGrp="1"/>
-          </p:cNvSpPr>
-          <p:nvPr/>
-        </p:nvSpPr>
-        <p:spPr>
-          <a:xfrm xmlns:a="http://schemas.openxmlformats.org/drawingml/2006/main">
-            <a:off x="552450" y="1857375"/>
-            <a:ext cx="1466850" cy="304800"/>
+          <p:cNvPr id="5" name="Text-206">
+            <a:extLst xmlns:a="http://schemas.openxmlformats.org/drawingml/2006/main">
+              <a:ext uri="{FF2B5EF4-FFF2-40B4-BE49-F238E27FC236}">
+                <a16:creationId xmlns:a16="http://schemas.microsoft.com/office/drawing/2014/main" id="{A1CF438D-03D7-4983-914A-2E8B1F530955}"/>
+              </a:ext>
+            </a:extLst>
+          </p:cNvPr>
+          <p:cNvSpPr>
+            <a:spLocks xmlns:a="http://schemas.openxmlformats.org/drawingml/2006/main" noGrp="1"/>
+          </p:cNvSpPr>
+          <p:nvPr/>
+        </p:nvSpPr>
+        <p:spPr>
+          <a:xfrm xmlns:a="http://schemas.openxmlformats.org/drawingml/2006/main">
+            <a:off x="552450" y="1752600"/>
+            <a:ext cx="1466850" cy="495300"/>
           </a:xfrm>
           <a:prstGeom xmlns:a="http://schemas.openxmlformats.org/drawingml/2006/main" prst="rect">
             <a:avLst/>
@@ -9436,7 +9517,7 @@
           <a:lstStyle xmlns:a="http://schemas.openxmlformats.org/drawingml/2006/main"/>
           <a:p xmlns:a="http://schemas.openxmlformats.org/drawingml/2006/main">
             <a:pPr algn="ctr">
-              <a:defRPr sz="1275" b="1">
+              <a:defRPr sz="1650" b="1">
                 <a:solidFill>
                   <a:srgbClr val="C33A32"/>
                 </a:solidFill>
@@ -9453,10 +9534,10 @@
       </p:sp>
       <p:sp>
         <p:nvSpPr>
-          <p:cNvPr id="6" name="Shape-205">
-            <a:extLst xmlns:a="http://schemas.openxmlformats.org/drawingml/2006/main">
-              <a:ext uri="{FF2B5EF4-FFF2-40B4-BE49-F238E27FC236}">
-                <a16:creationId xmlns:a16="http://schemas.microsoft.com/office/drawing/2014/main" id="{AF393EE8-E875-4CF0-B385-7EB2980D7578}"/>
+          <p:cNvPr id="6" name="Shape-207">
+            <a:extLst xmlns:a="http://schemas.openxmlformats.org/drawingml/2006/main">
+              <a:ext uri="{FF2B5EF4-FFF2-40B4-BE49-F238E27FC236}">
+                <a16:creationId xmlns:a16="http://schemas.microsoft.com/office/drawing/2014/main" id="{4E3B6E03-E2F9-4719-8486-ED1ABDA746A4}"/>
               </a:ext>
             </a:extLst>
           </p:cNvPr>
@@ -9488,35 +9569,35 @@
       </p:sp>
       <p:sp>
         <p:nvSpPr>
-          <p:cNvPr id="7" name="Text-206">
-            <a:extLst xmlns:a="http://schemas.openxmlformats.org/drawingml/2006/main">
-              <a:ext uri="{FF2B5EF4-FFF2-40B4-BE49-F238E27FC236}">
-                <a16:creationId xmlns:a16="http://schemas.microsoft.com/office/drawing/2014/main" id="{36A99F6E-555C-4ACF-89F8-900FA1878259}"/>
-              </a:ext>
-            </a:extLst>
-          </p:cNvPr>
-          <p:cNvSpPr>
-            <a:spLocks xmlns:a="http://schemas.openxmlformats.org/drawingml/2006/main" noGrp="1"/>
-          </p:cNvSpPr>
-          <p:nvPr/>
-        </p:nvSpPr>
-        <p:spPr>
-          <a:xfrm xmlns:a="http://schemas.openxmlformats.org/drawingml/2006/main">
-            <a:off x="2438400" y="1857375"/>
-            <a:ext cx="1466850" cy="304800"/>
-          </a:xfrm>
-          <a:prstGeom xmlns:a="http://schemas.openxmlformats.org/drawingml/2006/main" prst="rect">
-            <a:avLst/>
-          </a:prstGeom>
-        </p:spPr>
-        <p:txBody>
-          <a:bodyPr xmlns:a="http://schemas.openxmlformats.org/drawingml/2006/main" lIns="0" tIns="0" rIns="0" bIns="0" anchor="t">
-            <a:normAutofit fontScale="100000"/>
+          <p:cNvPr id="7" name="Text-208">
+            <a:extLst xmlns:a="http://schemas.openxmlformats.org/drawingml/2006/main">
+              <a:ext uri="{FF2B5EF4-FFF2-40B4-BE49-F238E27FC236}">
+                <a16:creationId xmlns:a16="http://schemas.microsoft.com/office/drawing/2014/main" id="{5898720F-6EA1-4AC9-AE85-A507E94436CD}"/>
+              </a:ext>
+            </a:extLst>
+          </p:cNvPr>
+          <p:cNvSpPr>
+            <a:spLocks xmlns:a="http://schemas.openxmlformats.org/drawingml/2006/main" noGrp="1"/>
+          </p:cNvSpPr>
+          <p:nvPr/>
+        </p:nvSpPr>
+        <p:spPr>
+          <a:xfrm xmlns:a="http://schemas.openxmlformats.org/drawingml/2006/main">
+            <a:off x="2438400" y="1752600"/>
+            <a:ext cx="1466850" cy="495300"/>
+          </a:xfrm>
+          <a:prstGeom xmlns:a="http://schemas.openxmlformats.org/drawingml/2006/main" prst="rect">
+            <a:avLst/>
+          </a:prstGeom>
+        </p:spPr>
+        <p:txBody>
+          <a:bodyPr xmlns:a="http://schemas.openxmlformats.org/drawingml/2006/main" lIns="0" tIns="0" rIns="0" bIns="0" anchor="t">
+            <a:normAutofit fontScale="98485"/>
           </a:bodyPr>
           <a:lstStyle xmlns:a="http://schemas.openxmlformats.org/drawingml/2006/main"/>
           <a:p xmlns:a="http://schemas.openxmlformats.org/drawingml/2006/main">
             <a:pPr algn="ctr">
-              <a:defRPr sz="1275" b="1">
+              <a:defRPr sz="1650" b="1">
                 <a:solidFill>
                   <a:srgbClr val="C33A32"/>
                 </a:solidFill>
@@ -9526,17 +9607,18 @@
               </a:defRPr>
             </a:pPr>
             <a:r>
-              <a:t>wrong version</a:t>
-            </a:r>
-          </a:p>
-        </p:txBody>
-      </p:sp>
-      <p:sp>
-        <p:nvSpPr>
-          <p:cNvPr id="8" name="Shape-207">
-            <a:extLst xmlns:a="http://schemas.openxmlformats.org/drawingml/2006/main">
-              <a:ext uri="{FF2B5EF4-FFF2-40B4-BE49-F238E27FC236}">
-                <a16:creationId xmlns:a16="http://schemas.microsoft.com/office/drawing/2014/main" id="{814F31A6-AAAB-49E4-9F07-3A9BFE611449}"/>
+              <a:t>wrong
+version</a:t>
+            </a:r>
+          </a:p>
+        </p:txBody>
+      </p:sp>
+      <p:sp>
+        <p:nvSpPr>
+          <p:cNvPr id="8" name="Shape-209">
+            <a:extLst xmlns:a="http://schemas.openxmlformats.org/drawingml/2006/main">
+              <a:ext uri="{FF2B5EF4-FFF2-40B4-BE49-F238E27FC236}">
+                <a16:creationId xmlns:a16="http://schemas.microsoft.com/office/drawing/2014/main" id="{634ECE21-D3C8-419B-A51E-B7786B572840}"/>
               </a:ext>
             </a:extLst>
           </p:cNvPr>
@@ -9568,35 +9650,35 @@
       </p:sp>
       <p:sp>
         <p:nvSpPr>
-          <p:cNvPr id="9" name="Text-208">
-            <a:extLst xmlns:a="http://schemas.openxmlformats.org/drawingml/2006/main">
-              <a:ext uri="{FF2B5EF4-FFF2-40B4-BE49-F238E27FC236}">
-                <a16:creationId xmlns:a16="http://schemas.microsoft.com/office/drawing/2014/main" id="{2409AAD4-2EF6-4861-A1C9-08B8A02D40CA}"/>
-              </a:ext>
-            </a:extLst>
-          </p:cNvPr>
-          <p:cNvSpPr>
-            <a:spLocks xmlns:a="http://schemas.openxmlformats.org/drawingml/2006/main" noGrp="1"/>
-          </p:cNvSpPr>
-          <p:nvPr/>
-        </p:nvSpPr>
-        <p:spPr>
-          <a:xfrm xmlns:a="http://schemas.openxmlformats.org/drawingml/2006/main">
-            <a:off x="4324350" y="1857375"/>
-            <a:ext cx="1466850" cy="304800"/>
-          </a:xfrm>
-          <a:prstGeom xmlns:a="http://schemas.openxmlformats.org/drawingml/2006/main" prst="rect">
-            <a:avLst/>
-          </a:prstGeom>
-        </p:spPr>
-        <p:txBody>
-          <a:bodyPr xmlns:a="http://schemas.openxmlformats.org/drawingml/2006/main" lIns="0" tIns="0" rIns="0" bIns="0" anchor="t">
-            <a:normAutofit fontScale="100000"/>
+          <p:cNvPr id="9" name="Text-210">
+            <a:extLst xmlns:a="http://schemas.openxmlformats.org/drawingml/2006/main">
+              <a:ext uri="{FF2B5EF4-FFF2-40B4-BE49-F238E27FC236}">
+                <a16:creationId xmlns:a16="http://schemas.microsoft.com/office/drawing/2014/main" id="{858C5F6F-0869-4CE3-86E8-A7908DA0250A}"/>
+              </a:ext>
+            </a:extLst>
+          </p:cNvPr>
+          <p:cNvSpPr>
+            <a:spLocks xmlns:a="http://schemas.openxmlformats.org/drawingml/2006/main" noGrp="1"/>
+          </p:cNvSpPr>
+          <p:nvPr/>
+        </p:nvSpPr>
+        <p:spPr>
+          <a:xfrm xmlns:a="http://schemas.openxmlformats.org/drawingml/2006/main">
+            <a:off x="4324350" y="1752600"/>
+            <a:ext cx="1466850" cy="495300"/>
+          </a:xfrm>
+          <a:prstGeom xmlns:a="http://schemas.openxmlformats.org/drawingml/2006/main" prst="rect">
+            <a:avLst/>
+          </a:prstGeom>
+        </p:spPr>
+        <p:txBody>
+          <a:bodyPr xmlns:a="http://schemas.openxmlformats.org/drawingml/2006/main" lIns="0" tIns="0" rIns="0" bIns="0" anchor="t">
+            <a:normAutofit fontScale="98485"/>
           </a:bodyPr>
           <a:lstStyle xmlns:a="http://schemas.openxmlformats.org/drawingml/2006/main"/>
           <a:p xmlns:a="http://schemas.openxmlformats.org/drawingml/2006/main">
             <a:pPr algn="ctr">
-              <a:defRPr sz="1275" b="1">
+              <a:defRPr sz="1650" b="1">
                 <a:solidFill>
                   <a:srgbClr val="C33A32"/>
                 </a:solidFill>
@@ -9606,17 +9688,18 @@
               </a:defRPr>
             </a:pPr>
             <a:r>
-              <a:t>unknown type</a:t>
-            </a:r>
-          </a:p>
-        </p:txBody>
-      </p:sp>
-      <p:sp>
-        <p:nvSpPr>
-          <p:cNvPr id="10" name="Shape-209">
-            <a:extLst xmlns:a="http://schemas.openxmlformats.org/drawingml/2006/main">
-              <a:ext uri="{FF2B5EF4-FFF2-40B4-BE49-F238E27FC236}">
-                <a16:creationId xmlns:a16="http://schemas.microsoft.com/office/drawing/2014/main" id="{8677767A-653D-4207-9A5C-7D4AB75EED06}"/>
+              <a:t>unknown
+type</a:t>
+            </a:r>
+          </a:p>
+        </p:txBody>
+      </p:sp>
+      <p:sp>
+        <p:nvSpPr>
+          <p:cNvPr id="10" name="Shape-211">
+            <a:extLst xmlns:a="http://schemas.openxmlformats.org/drawingml/2006/main">
+              <a:ext uri="{FF2B5EF4-FFF2-40B4-BE49-F238E27FC236}">
+                <a16:creationId xmlns:a16="http://schemas.microsoft.com/office/drawing/2014/main" id="{440E577F-66F3-4708-86D6-A267AC26CE9B}"/>
               </a:ext>
             </a:extLst>
           </p:cNvPr>
@@ -9648,35 +9731,35 @@
       </p:sp>
       <p:sp>
         <p:nvSpPr>
-          <p:cNvPr id="11" name="Text-210">
-            <a:extLst xmlns:a="http://schemas.openxmlformats.org/drawingml/2006/main">
-              <a:ext uri="{FF2B5EF4-FFF2-40B4-BE49-F238E27FC236}">
-                <a16:creationId xmlns:a16="http://schemas.microsoft.com/office/drawing/2014/main" id="{7E078AAE-D211-48B4-B548-A6AD86AA74CC}"/>
-              </a:ext>
-            </a:extLst>
-          </p:cNvPr>
-          <p:cNvSpPr>
-            <a:spLocks xmlns:a="http://schemas.openxmlformats.org/drawingml/2006/main" noGrp="1"/>
-          </p:cNvSpPr>
-          <p:nvPr/>
-        </p:nvSpPr>
-        <p:spPr>
-          <a:xfrm xmlns:a="http://schemas.openxmlformats.org/drawingml/2006/main">
-            <a:off x="6210300" y="1857375"/>
-            <a:ext cx="1466850" cy="304800"/>
-          </a:xfrm>
-          <a:prstGeom xmlns:a="http://schemas.openxmlformats.org/drawingml/2006/main" prst="rect">
-            <a:avLst/>
-          </a:prstGeom>
-        </p:spPr>
-        <p:txBody>
-          <a:bodyPr xmlns:a="http://schemas.openxmlformats.org/drawingml/2006/main" lIns="0" tIns="0" rIns="0" bIns="0" anchor="t">
-            <a:normAutofit fontScale="100000"/>
+          <p:cNvPr id="11" name="Text-212">
+            <a:extLst xmlns:a="http://schemas.openxmlformats.org/drawingml/2006/main">
+              <a:ext uri="{FF2B5EF4-FFF2-40B4-BE49-F238E27FC236}">
+                <a16:creationId xmlns:a16="http://schemas.microsoft.com/office/drawing/2014/main" id="{B8721881-092E-4500-8E41-34270B5F9B95}"/>
+              </a:ext>
+            </a:extLst>
+          </p:cNvPr>
+          <p:cNvSpPr>
+            <a:spLocks xmlns:a="http://schemas.openxmlformats.org/drawingml/2006/main" noGrp="1"/>
+          </p:cNvSpPr>
+          <p:nvPr/>
+        </p:nvSpPr>
+        <p:spPr>
+          <a:xfrm xmlns:a="http://schemas.openxmlformats.org/drawingml/2006/main">
+            <a:off x="6210300" y="1752600"/>
+            <a:ext cx="1466850" cy="495300"/>
+          </a:xfrm>
+          <a:prstGeom xmlns:a="http://schemas.openxmlformats.org/drawingml/2006/main" prst="rect">
+            <a:avLst/>
+          </a:prstGeom>
+        </p:spPr>
+        <p:txBody>
+          <a:bodyPr xmlns:a="http://schemas.openxmlformats.org/drawingml/2006/main" lIns="0" tIns="0" rIns="0" bIns="0" anchor="t">
+            <a:normAutofit fontScale="98485"/>
           </a:bodyPr>
           <a:lstStyle xmlns:a="http://schemas.openxmlformats.org/drawingml/2006/main"/>
           <a:p xmlns:a="http://schemas.openxmlformats.org/drawingml/2006/main">
             <a:pPr algn="ctr">
-              <a:defRPr sz="1275" b="1">
+              <a:defRPr sz="1650" b="1">
                 <a:solidFill>
                   <a:srgbClr val="C33A32"/>
                 </a:solidFill>
@@ -9686,17 +9769,18 @@
               </a:defRPr>
             </a:pPr>
             <a:r>
-              <a:t>bad payload</a:t>
-            </a:r>
-          </a:p>
-        </p:txBody>
-      </p:sp>
-      <p:sp>
-        <p:nvSpPr>
-          <p:cNvPr id="12" name="Shape-211">
-            <a:extLst xmlns:a="http://schemas.openxmlformats.org/drawingml/2006/main">
-              <a:ext uri="{FF2B5EF4-FFF2-40B4-BE49-F238E27FC236}">
-                <a16:creationId xmlns:a16="http://schemas.microsoft.com/office/drawing/2014/main" id="{4896D5B8-9963-4BF3-A4D8-5A26E9E1FE93}"/>
+              <a:t>bad
+payload</a:t>
+            </a:r>
+          </a:p>
+        </p:txBody>
+      </p:sp>
+      <p:sp>
+        <p:nvSpPr>
+          <p:cNvPr id="12" name="Shape-213">
+            <a:extLst xmlns:a="http://schemas.openxmlformats.org/drawingml/2006/main">
+              <a:ext uri="{FF2B5EF4-FFF2-40B4-BE49-F238E27FC236}">
+                <a16:creationId xmlns:a16="http://schemas.microsoft.com/office/drawing/2014/main" id="{43EC42DE-56B7-4BDC-9BD7-57838303391E}"/>
               </a:ext>
             </a:extLst>
           </p:cNvPr>
@@ -9728,22 +9812,22 @@
       </p:sp>
       <p:sp>
         <p:nvSpPr>
-          <p:cNvPr id="13" name="Text-212">
-            <a:extLst xmlns:a="http://schemas.openxmlformats.org/drawingml/2006/main">
-              <a:ext uri="{FF2B5EF4-FFF2-40B4-BE49-F238E27FC236}">
-                <a16:creationId xmlns:a16="http://schemas.microsoft.com/office/drawing/2014/main" id="{30F77D37-D350-4F65-931C-DDF7EAD29195}"/>
-              </a:ext>
-            </a:extLst>
-          </p:cNvPr>
-          <p:cNvSpPr>
-            <a:spLocks xmlns:a="http://schemas.openxmlformats.org/drawingml/2006/main" noGrp="1"/>
-          </p:cNvSpPr>
-          <p:nvPr/>
-        </p:nvSpPr>
-        <p:spPr>
-          <a:xfrm xmlns:a="http://schemas.openxmlformats.org/drawingml/2006/main">
-            <a:off x="8096250" y="1857375"/>
-            <a:ext cx="1466850" cy="304800"/>
+          <p:cNvPr id="13" name="Text-214">
+            <a:extLst xmlns:a="http://schemas.openxmlformats.org/drawingml/2006/main">
+              <a:ext uri="{FF2B5EF4-FFF2-40B4-BE49-F238E27FC236}">
+                <a16:creationId xmlns:a16="http://schemas.microsoft.com/office/drawing/2014/main" id="{E5DDC058-2FB0-4056-94B9-D138111E778D}"/>
+              </a:ext>
+            </a:extLst>
+          </p:cNvPr>
+          <p:cNvSpPr>
+            <a:spLocks xmlns:a="http://schemas.openxmlformats.org/drawingml/2006/main" noGrp="1"/>
+          </p:cNvSpPr>
+          <p:nvPr/>
+        </p:nvSpPr>
+        <p:spPr>
+          <a:xfrm xmlns:a="http://schemas.openxmlformats.org/drawingml/2006/main">
+            <a:off x="8096250" y="1752600"/>
+            <a:ext cx="1466850" cy="495300"/>
           </a:xfrm>
           <a:prstGeom xmlns:a="http://schemas.openxmlformats.org/drawingml/2006/main" prst="rect">
             <a:avLst/>
@@ -9756,7 +9840,7 @@
           <a:lstStyle xmlns:a="http://schemas.openxmlformats.org/drawingml/2006/main"/>
           <a:p xmlns:a="http://schemas.openxmlformats.org/drawingml/2006/main">
             <a:pPr algn="ctr">
-              <a:defRPr sz="1275" b="1">
+              <a:defRPr sz="1650" b="1">
                 <a:solidFill>
                   <a:srgbClr val="123DAE"/>
                 </a:solidFill>
@@ -9773,10 +9857,10 @@
       </p:sp>
       <p:sp>
         <p:nvSpPr>
-          <p:cNvPr id="14" name="Shape-213">
-            <a:extLst xmlns:a="http://schemas.openxmlformats.org/drawingml/2006/main">
-              <a:ext uri="{FF2B5EF4-FFF2-40B4-BE49-F238E27FC236}">
-                <a16:creationId xmlns:a16="http://schemas.microsoft.com/office/drawing/2014/main" id="{7708BD35-52ED-4362-9865-F291E491C93A}"/>
+          <p:cNvPr id="14" name="Shape-215">
+            <a:extLst xmlns:a="http://schemas.openxmlformats.org/drawingml/2006/main">
+              <a:ext uri="{FF2B5EF4-FFF2-40B4-BE49-F238E27FC236}">
+                <a16:creationId xmlns:a16="http://schemas.microsoft.com/office/drawing/2014/main" id="{15A83E94-4AD7-4797-8185-DA6739869343}"/>
               </a:ext>
             </a:extLst>
           </p:cNvPr>
@@ -9808,22 +9892,22 @@
       </p:sp>
       <p:sp>
         <p:nvSpPr>
-          <p:cNvPr id="15" name="Text-214">
-            <a:extLst xmlns:a="http://schemas.openxmlformats.org/drawingml/2006/main">
-              <a:ext uri="{FF2B5EF4-FFF2-40B4-BE49-F238E27FC236}">
-                <a16:creationId xmlns:a16="http://schemas.microsoft.com/office/drawing/2014/main" id="{98CA2269-C4C1-49E0-AD4B-EF3D38D7D796}"/>
-              </a:ext>
-            </a:extLst>
-          </p:cNvPr>
-          <p:cNvSpPr>
-            <a:spLocks xmlns:a="http://schemas.openxmlformats.org/drawingml/2006/main" noGrp="1"/>
-          </p:cNvSpPr>
-          <p:nvPr/>
-        </p:nvSpPr>
-        <p:spPr>
-          <a:xfrm xmlns:a="http://schemas.openxmlformats.org/drawingml/2006/main">
-            <a:off x="9982200" y="1857375"/>
-            <a:ext cx="1466850" cy="304800"/>
+          <p:cNvPr id="15" name="Text-216">
+            <a:extLst xmlns:a="http://schemas.openxmlformats.org/drawingml/2006/main">
+              <a:ext uri="{FF2B5EF4-FFF2-40B4-BE49-F238E27FC236}">
+                <a16:creationId xmlns:a16="http://schemas.microsoft.com/office/drawing/2014/main" id="{4F5D804B-BA87-4345-8E4F-F363ABA695C0}"/>
+              </a:ext>
+            </a:extLst>
+          </p:cNvPr>
+          <p:cNvSpPr>
+            <a:spLocks xmlns:a="http://schemas.openxmlformats.org/drawingml/2006/main" noGrp="1"/>
+          </p:cNvSpPr>
+          <p:nvPr/>
+        </p:nvSpPr>
+        <p:spPr>
+          <a:xfrm xmlns:a="http://schemas.openxmlformats.org/drawingml/2006/main">
+            <a:off x="9982200" y="1752600"/>
+            <a:ext cx="1466850" cy="495300"/>
           </a:xfrm>
           <a:prstGeom xmlns:a="http://schemas.openxmlformats.org/drawingml/2006/main" prst="rect">
             <a:avLst/>
@@ -9836,7 +9920,7 @@
           <a:lstStyle xmlns:a="http://schemas.openxmlformats.org/drawingml/2006/main"/>
           <a:p xmlns:a="http://schemas.openxmlformats.org/drawingml/2006/main">
             <a:pPr algn="ctr">
-              <a:defRPr sz="1275" b="1">
+              <a:defRPr sz="1650" b="1">
                 <a:solidFill>
                   <a:srgbClr val="18794E"/>
                 </a:solidFill>
@@ -9853,10 +9937,10 @@
       </p:sp>
       <p:sp>
         <p:nvSpPr>
-          <p:cNvPr id="16" name="Shape-215">
-            <a:extLst xmlns:a="http://schemas.openxmlformats.org/drawingml/2006/main">
-              <a:ext uri="{FF2B5EF4-FFF2-40B4-BE49-F238E27FC236}">
-                <a16:creationId xmlns:a16="http://schemas.microsoft.com/office/drawing/2014/main" id="{044DF3EA-5544-47CD-9428-BB6C45D9D657}"/>
+          <p:cNvPr id="16" name="Shape-217">
+            <a:extLst xmlns:a="http://schemas.openxmlformats.org/drawingml/2006/main">
+              <a:ext uri="{FF2B5EF4-FFF2-40B4-BE49-F238E27FC236}">
+                <a16:creationId xmlns:a16="http://schemas.microsoft.com/office/drawing/2014/main" id="{95122F46-A678-4D84-8902-92B6FD80DF33}"/>
               </a:ext>
             </a:extLst>
           </p:cNvPr>
@@ -9882,10 +9966,10 @@
       </p:sp>
       <p:sp>
         <p:nvSpPr>
-          <p:cNvPr id="17" name="Text-216">
-            <a:extLst xmlns:a="http://schemas.openxmlformats.org/drawingml/2006/main">
-              <a:ext uri="{FF2B5EF4-FFF2-40B4-BE49-F238E27FC236}">
-                <a16:creationId xmlns:a16="http://schemas.microsoft.com/office/drawing/2014/main" id="{8AD719BA-9EC0-4D85-A95B-FF0832202DFF}"/>
+          <p:cNvPr id="17" name="Text-218">
+            <a:extLst xmlns:a="http://schemas.openxmlformats.org/drawingml/2006/main">
+              <a:ext uri="{FF2B5EF4-FFF2-40B4-BE49-F238E27FC236}">
+                <a16:creationId xmlns:a16="http://schemas.microsoft.com/office/drawing/2014/main" id="{E5EABA0E-FF14-4433-A887-49E5A3CE2431}"/>
               </a:ext>
             </a:extLst>
           </p:cNvPr>
@@ -9927,10 +10011,10 @@
       </p:sp>
       <p:sp>
         <p:nvSpPr>
-          <p:cNvPr id="18" name="Text-217">
-            <a:extLst xmlns:a="http://schemas.openxmlformats.org/drawingml/2006/main">
-              <a:ext uri="{FF2B5EF4-FFF2-40B4-BE49-F238E27FC236}">
-                <a16:creationId xmlns:a16="http://schemas.microsoft.com/office/drawing/2014/main" id="{F8F21D33-678C-454E-8B8C-6AE0110E5A88}"/>
+          <p:cNvPr id="18" name="Text-219">
+            <a:extLst xmlns:a="http://schemas.openxmlformats.org/drawingml/2006/main">
+              <a:ext uri="{FF2B5EF4-FFF2-40B4-BE49-F238E27FC236}">
+                <a16:creationId xmlns:a16="http://schemas.microsoft.com/office/drawing/2014/main" id="{C4CB5FB3-C740-4881-B0B1-382682F238F3}"/>
               </a:ext>
             </a:extLst>
           </p:cNvPr>
@@ -9972,22 +10056,22 @@
       </p:sp>
       <p:sp>
         <p:nvSpPr>
-          <p:cNvPr id="19" name="Text-218">
-            <a:extLst xmlns:a="http://schemas.openxmlformats.org/drawingml/2006/main">
-              <a:ext uri="{FF2B5EF4-FFF2-40B4-BE49-F238E27FC236}">
-                <a16:creationId xmlns:a16="http://schemas.microsoft.com/office/drawing/2014/main" id="{047CC9EF-DDE0-4AF3-A182-CB00CB446907}"/>
-              </a:ext>
-            </a:extLst>
-          </p:cNvPr>
-          <p:cNvSpPr>
-            <a:spLocks xmlns:a="http://schemas.openxmlformats.org/drawingml/2006/main" noGrp="1"/>
-          </p:cNvSpPr>
-          <p:nvPr/>
-        </p:nvSpPr>
-        <p:spPr>
-          <a:xfrm xmlns:a="http://schemas.openxmlformats.org/drawingml/2006/main">
-            <a:off x="685800" y="4333875"/>
-            <a:ext cx="3009900" cy="419100"/>
+          <p:cNvPr id="19" name="Text-220">
+            <a:extLst xmlns:a="http://schemas.openxmlformats.org/drawingml/2006/main">
+              <a:ext uri="{FF2B5EF4-FFF2-40B4-BE49-F238E27FC236}">
+                <a16:creationId xmlns:a16="http://schemas.microsoft.com/office/drawing/2014/main" id="{B4523FC2-C6A3-4051-AC8B-4FBF76D1AADF}"/>
+              </a:ext>
+            </a:extLst>
+          </p:cNvPr>
+          <p:cNvSpPr>
+            <a:spLocks xmlns:a="http://schemas.openxmlformats.org/drawingml/2006/main" noGrp="1"/>
+          </p:cNvSpPr>
+          <p:nvPr/>
+        </p:nvSpPr>
+        <p:spPr>
+          <a:xfrm xmlns:a="http://schemas.openxmlformats.org/drawingml/2006/main">
+            <a:off x="685800" y="4295775"/>
+            <a:ext cx="3009900" cy="495300"/>
           </a:xfrm>
           <a:prstGeom xmlns:a="http://schemas.openxmlformats.org/drawingml/2006/main" prst="rect">
             <a:avLst/>
@@ -10000,7 +10084,7 @@
           <a:lstStyle xmlns:a="http://schemas.openxmlformats.org/drawingml/2006/main"/>
           <a:p xmlns:a="http://schemas.openxmlformats.org/drawingml/2006/main">
             <a:pPr algn="l">
-              <a:defRPr sz="1275" b="0">
+              <a:defRPr sz="1650" b="0">
                 <a:solidFill>
                   <a:srgbClr val="5B6472"/>
                 </a:solidFill>
@@ -10017,10 +10101,10 @@
       </p:sp>
       <p:sp>
         <p:nvSpPr>
-          <p:cNvPr id="20" name="Shape-219">
-            <a:extLst xmlns:a="http://schemas.openxmlformats.org/drawingml/2006/main">
-              <a:ext uri="{FF2B5EF4-FFF2-40B4-BE49-F238E27FC236}">
-                <a16:creationId xmlns:a16="http://schemas.microsoft.com/office/drawing/2014/main" id="{8E5D11A9-1310-47AF-8662-9E37F2023BFA}"/>
+          <p:cNvPr id="20" name="Shape-221">
+            <a:extLst xmlns:a="http://schemas.openxmlformats.org/drawingml/2006/main">
+              <a:ext uri="{FF2B5EF4-FFF2-40B4-BE49-F238E27FC236}">
+                <a16:creationId xmlns:a16="http://schemas.microsoft.com/office/drawing/2014/main" id="{E71EE53A-3A40-48D6-9350-6189BBFD4506}"/>
               </a:ext>
             </a:extLst>
           </p:cNvPr>
@@ -10046,10 +10130,10 @@
       </p:sp>
       <p:sp>
         <p:nvSpPr>
-          <p:cNvPr id="21" name="Text-220">
-            <a:extLst xmlns:a="http://schemas.openxmlformats.org/drawingml/2006/main">
-              <a:ext uri="{FF2B5EF4-FFF2-40B4-BE49-F238E27FC236}">
-                <a16:creationId xmlns:a16="http://schemas.microsoft.com/office/drawing/2014/main" id="{6F4CE75C-1551-4EE2-AA1F-703370CC618E}"/>
+          <p:cNvPr id="21" name="Text-222">
+            <a:extLst xmlns:a="http://schemas.openxmlformats.org/drawingml/2006/main">
+              <a:ext uri="{FF2B5EF4-FFF2-40B4-BE49-F238E27FC236}">
+                <a16:creationId xmlns:a16="http://schemas.microsoft.com/office/drawing/2014/main" id="{1C2FD5E0-0FAE-45C2-9326-37B835E11094}"/>
               </a:ext>
             </a:extLst>
           </p:cNvPr>
@@ -10091,10 +10175,10 @@
       </p:sp>
       <p:sp>
         <p:nvSpPr>
-          <p:cNvPr id="22" name="Text-221">
-            <a:extLst xmlns:a="http://schemas.openxmlformats.org/drawingml/2006/main">
-              <a:ext uri="{FF2B5EF4-FFF2-40B4-BE49-F238E27FC236}">
-                <a16:creationId xmlns:a16="http://schemas.microsoft.com/office/drawing/2014/main" id="{51F3FB9B-095C-4795-8ADB-BC7EAF458BFD}"/>
+          <p:cNvPr id="22" name="Text-223">
+            <a:extLst xmlns:a="http://schemas.openxmlformats.org/drawingml/2006/main">
+              <a:ext uri="{FF2B5EF4-FFF2-40B4-BE49-F238E27FC236}">
+                <a16:creationId xmlns:a16="http://schemas.microsoft.com/office/drawing/2014/main" id="{BDA4BC3C-92B1-4D8B-82F1-5935967B1D48}"/>
               </a:ext>
             </a:extLst>
           </p:cNvPr>
@@ -10136,22 +10220,22 @@
       </p:sp>
       <p:sp>
         <p:nvSpPr>
-          <p:cNvPr id="23" name="Text-222">
-            <a:extLst xmlns:a="http://schemas.openxmlformats.org/drawingml/2006/main">
-              <a:ext uri="{FF2B5EF4-FFF2-40B4-BE49-F238E27FC236}">
-                <a16:creationId xmlns:a16="http://schemas.microsoft.com/office/drawing/2014/main" id="{C78A0532-2FD4-4FFC-8C6C-798E4F86C73E}"/>
-              </a:ext>
-            </a:extLst>
-          </p:cNvPr>
-          <p:cNvSpPr>
-            <a:spLocks xmlns:a="http://schemas.openxmlformats.org/drawingml/2006/main" noGrp="1"/>
-          </p:cNvSpPr>
-          <p:nvPr/>
-        </p:nvSpPr>
-        <p:spPr>
-          <a:xfrm xmlns:a="http://schemas.openxmlformats.org/drawingml/2006/main">
-            <a:off x="4467225" y="4333875"/>
-            <a:ext cx="3009900" cy="419100"/>
+          <p:cNvPr id="23" name="Text-224">
+            <a:extLst xmlns:a="http://schemas.openxmlformats.org/drawingml/2006/main">
+              <a:ext uri="{FF2B5EF4-FFF2-40B4-BE49-F238E27FC236}">
+                <a16:creationId xmlns:a16="http://schemas.microsoft.com/office/drawing/2014/main" id="{4285F505-16F5-4ED8-A647-61B65B2C444E}"/>
+              </a:ext>
+            </a:extLst>
+          </p:cNvPr>
+          <p:cNvSpPr>
+            <a:spLocks xmlns:a="http://schemas.openxmlformats.org/drawingml/2006/main" noGrp="1"/>
+          </p:cNvSpPr>
+          <p:nvPr/>
+        </p:nvSpPr>
+        <p:spPr>
+          <a:xfrm xmlns:a="http://schemas.openxmlformats.org/drawingml/2006/main">
+            <a:off x="4467225" y="4295775"/>
+            <a:ext cx="3009900" cy="495300"/>
           </a:xfrm>
           <a:prstGeom xmlns:a="http://schemas.openxmlformats.org/drawingml/2006/main" prst="rect">
             <a:avLst/>
@@ -10164,7 +10248,7 @@
           <a:lstStyle xmlns:a="http://schemas.openxmlformats.org/drawingml/2006/main"/>
           <a:p xmlns:a="http://schemas.openxmlformats.org/drawingml/2006/main">
             <a:pPr algn="l">
-              <a:defRPr sz="1275" b="0">
+              <a:defRPr sz="1650" b="0">
                 <a:solidFill>
                   <a:srgbClr val="5B6472"/>
                 </a:solidFill>
@@ -10181,10 +10265,10 @@
       </p:sp>
       <p:sp>
         <p:nvSpPr>
-          <p:cNvPr id="24" name="Shape-223">
-            <a:extLst xmlns:a="http://schemas.openxmlformats.org/drawingml/2006/main">
-              <a:ext uri="{FF2B5EF4-FFF2-40B4-BE49-F238E27FC236}">
-                <a16:creationId xmlns:a16="http://schemas.microsoft.com/office/drawing/2014/main" id="{958C30D8-9C64-4A35-97AB-838E1FF5564C}"/>
+          <p:cNvPr id="24" name="Shape-225">
+            <a:extLst xmlns:a="http://schemas.openxmlformats.org/drawingml/2006/main">
+              <a:ext uri="{FF2B5EF4-FFF2-40B4-BE49-F238E27FC236}">
+                <a16:creationId xmlns:a16="http://schemas.microsoft.com/office/drawing/2014/main" id="{4625DD07-9CEE-44F5-9889-920C4A56311C}"/>
               </a:ext>
             </a:extLst>
           </p:cNvPr>
@@ -10210,10 +10294,10 @@
       </p:sp>
       <p:sp>
         <p:nvSpPr>
-          <p:cNvPr id="25" name="Text-224">
-            <a:extLst xmlns:a="http://schemas.openxmlformats.org/drawingml/2006/main">
-              <a:ext uri="{FF2B5EF4-FFF2-40B4-BE49-F238E27FC236}">
-                <a16:creationId xmlns:a16="http://schemas.microsoft.com/office/drawing/2014/main" id="{866FC9C0-CE8A-4B00-A5AD-66BF0D49DE1A}"/>
+          <p:cNvPr id="25" name="Text-226">
+            <a:extLst xmlns:a="http://schemas.openxmlformats.org/drawingml/2006/main">
+              <a:ext uri="{FF2B5EF4-FFF2-40B4-BE49-F238E27FC236}">
+                <a16:creationId xmlns:a16="http://schemas.microsoft.com/office/drawing/2014/main" id="{116E8985-8258-4054-A025-59F31CDB6979}"/>
               </a:ext>
             </a:extLst>
           </p:cNvPr>
@@ -10255,10 +10339,10 @@
       </p:sp>
       <p:sp>
         <p:nvSpPr>
-          <p:cNvPr id="26" name="Text-225">
-            <a:extLst xmlns:a="http://schemas.openxmlformats.org/drawingml/2006/main">
-              <a:ext uri="{FF2B5EF4-FFF2-40B4-BE49-F238E27FC236}">
-                <a16:creationId xmlns:a16="http://schemas.microsoft.com/office/drawing/2014/main" id="{B5BE98A6-6C87-4F6B-8D0C-AEC469BFD0A2}"/>
+          <p:cNvPr id="26" name="Text-227">
+            <a:extLst xmlns:a="http://schemas.openxmlformats.org/drawingml/2006/main">
+              <a:ext uri="{FF2B5EF4-FFF2-40B4-BE49-F238E27FC236}">
+                <a16:creationId xmlns:a16="http://schemas.microsoft.com/office/drawing/2014/main" id="{2CF052A6-D745-4EB7-8230-85C686EE46B5}"/>
               </a:ext>
             </a:extLst>
           </p:cNvPr>
@@ -10300,22 +10384,22 @@
       </p:sp>
       <p:sp>
         <p:nvSpPr>
-          <p:cNvPr id="27" name="Text-226">
-            <a:extLst xmlns:a="http://schemas.openxmlformats.org/drawingml/2006/main">
-              <a:ext uri="{FF2B5EF4-FFF2-40B4-BE49-F238E27FC236}">
-                <a16:creationId xmlns:a16="http://schemas.microsoft.com/office/drawing/2014/main" id="{0B8D25B4-D94F-443B-8EB1-DCDDC8FBD6E3}"/>
-              </a:ext>
-            </a:extLst>
-          </p:cNvPr>
-          <p:cNvSpPr>
-            <a:spLocks xmlns:a="http://schemas.openxmlformats.org/drawingml/2006/main" noGrp="1"/>
-          </p:cNvSpPr>
-          <p:nvPr/>
-        </p:nvSpPr>
-        <p:spPr>
-          <a:xfrm xmlns:a="http://schemas.openxmlformats.org/drawingml/2006/main">
-            <a:off x="8248650" y="4333875"/>
-            <a:ext cx="3009900" cy="419100"/>
+          <p:cNvPr id="27" name="Text-228">
+            <a:extLst xmlns:a="http://schemas.openxmlformats.org/drawingml/2006/main">
+              <a:ext uri="{FF2B5EF4-FFF2-40B4-BE49-F238E27FC236}">
+                <a16:creationId xmlns:a16="http://schemas.microsoft.com/office/drawing/2014/main" id="{E71F6EB3-0312-4234-9EB3-DE531495EAB2}"/>
+              </a:ext>
+            </a:extLst>
+          </p:cNvPr>
+          <p:cNvSpPr>
+            <a:spLocks xmlns:a="http://schemas.openxmlformats.org/drawingml/2006/main" noGrp="1"/>
+          </p:cNvSpPr>
+          <p:nvPr/>
+        </p:nvSpPr>
+        <p:spPr>
+          <a:xfrm xmlns:a="http://schemas.openxmlformats.org/drawingml/2006/main">
+            <a:off x="8248650" y="4295775"/>
+            <a:ext cx="3009900" cy="495300"/>
           </a:xfrm>
           <a:prstGeom xmlns:a="http://schemas.openxmlformats.org/drawingml/2006/main" prst="rect">
             <a:avLst/>
@@ -10328,7 +10412,7 @@
           <a:lstStyle xmlns:a="http://schemas.openxmlformats.org/drawingml/2006/main"/>
           <a:p xmlns:a="http://schemas.openxmlformats.org/drawingml/2006/main">
             <a:pPr algn="l">
-              <a:defRPr sz="1275" b="0">
+              <a:defRPr sz="1650" b="0">
                 <a:solidFill>
                   <a:srgbClr val="5B6472"/>
                 </a:solidFill>
@@ -10345,10 +10429,10 @@
       </p:sp>
       <p:sp>
         <p:nvSpPr>
-          <p:cNvPr id="28" name="Shape-227">
-            <a:extLst xmlns:a="http://schemas.openxmlformats.org/drawingml/2006/main">
-              <a:ext uri="{FF2B5EF4-FFF2-40B4-BE49-F238E27FC236}">
-                <a16:creationId xmlns:a16="http://schemas.microsoft.com/office/drawing/2014/main" id="{6897AECA-556F-4957-9B63-7342D9228DAD}"/>
+          <p:cNvPr id="28" name="Shape-229">
+            <a:extLst xmlns:a="http://schemas.openxmlformats.org/drawingml/2006/main">
+              <a:ext uri="{FF2B5EF4-FFF2-40B4-BE49-F238E27FC236}">
+                <a16:creationId xmlns:a16="http://schemas.microsoft.com/office/drawing/2014/main" id="{AC851CC9-A0EF-4C96-87EA-E9495F0366DF}"/>
               </a:ext>
             </a:extLst>
           </p:cNvPr>
@@ -10374,10 +10458,10 @@
       </p:sp>
       <p:sp>
         <p:nvSpPr>
-          <p:cNvPr id="29" name="Text-228">
-            <a:extLst xmlns:a="http://schemas.openxmlformats.org/drawingml/2006/main">
-              <a:ext uri="{FF2B5EF4-FFF2-40B4-BE49-F238E27FC236}">
-                <a16:creationId xmlns:a16="http://schemas.microsoft.com/office/drawing/2014/main" id="{64CB0068-5909-4BF3-87E2-849A4423A574}"/>
+          <p:cNvPr id="29" name="Text-230">
+            <a:extLst xmlns:a="http://schemas.openxmlformats.org/drawingml/2006/main">
+              <a:ext uri="{FF2B5EF4-FFF2-40B4-BE49-F238E27FC236}">
+                <a16:creationId xmlns:a16="http://schemas.microsoft.com/office/drawing/2014/main" id="{BB183774-19E2-4A55-9CD7-138C1008424A}"/>
               </a:ext>
             </a:extLst>
           </p:cNvPr>
@@ -10397,12 +10481,12 @@
         </p:spPr>
         <p:txBody>
           <a:bodyPr xmlns:a="http://schemas.openxmlformats.org/drawingml/2006/main" lIns="0" tIns="0" rIns="0" bIns="0" anchor="t">
-            <a:normAutofit fontScale="100000"/>
+            <a:normAutofit fontScale="90909"/>
           </a:bodyPr>
           <a:lstStyle xmlns:a="http://schemas.openxmlformats.org/drawingml/2006/main"/>
           <a:p xmlns:a="http://schemas.openxmlformats.org/drawingml/2006/main">
             <a:pPr algn="ctr">
-              <a:defRPr sz="1200" b="1">
+              <a:defRPr sz="1650" b="1">
                 <a:solidFill>
                   <a:srgbClr val="0B0D12"/>
                 </a:solidFill>
@@ -10419,10 +10503,10 @@
       </p:sp>
       <p:sp>
         <p:nvSpPr>
-          <p:cNvPr id="30" name="Shape-229">
-            <a:extLst xmlns:a="http://schemas.openxmlformats.org/drawingml/2006/main">
-              <a:ext uri="{FF2B5EF4-FFF2-40B4-BE49-F238E27FC236}">
-                <a16:creationId xmlns:a16="http://schemas.microsoft.com/office/drawing/2014/main" id="{9C44A831-9E27-4ECE-A41E-ADC969A99580}"/>
+          <p:cNvPr id="30" name="Shape-231">
+            <a:extLst xmlns:a="http://schemas.openxmlformats.org/drawingml/2006/main">
+              <a:ext uri="{FF2B5EF4-FFF2-40B4-BE49-F238E27FC236}">
+                <a16:creationId xmlns:a16="http://schemas.microsoft.com/office/drawing/2014/main" id="{CC537D09-73C1-43B9-A4A7-4AD3F8DBE239}"/>
               </a:ext>
             </a:extLst>
           </p:cNvPr>
@@ -10448,10 +10532,10 @@
       </p:sp>
       <p:sp>
         <p:nvSpPr>
-          <p:cNvPr id="31" name="Text-230">
-            <a:extLst xmlns:a="http://schemas.openxmlformats.org/drawingml/2006/main">
-              <a:ext uri="{FF2B5EF4-FFF2-40B4-BE49-F238E27FC236}">
-                <a16:creationId xmlns:a16="http://schemas.microsoft.com/office/drawing/2014/main" id="{5C04E892-20CF-467E-89A4-15732297D02F}"/>
+          <p:cNvPr id="31" name="Text-232">
+            <a:extLst xmlns:a="http://schemas.openxmlformats.org/drawingml/2006/main">
+              <a:ext uri="{FF2B5EF4-FFF2-40B4-BE49-F238E27FC236}">
+                <a16:creationId xmlns:a16="http://schemas.microsoft.com/office/drawing/2014/main" id="{41F6ADE1-AEAF-4EC3-B4B9-4634A7889BB4}"/>
               </a:ext>
             </a:extLst>
           </p:cNvPr>
@@ -10471,12 +10555,12 @@
         </p:spPr>
         <p:txBody>
           <a:bodyPr xmlns:a="http://schemas.openxmlformats.org/drawingml/2006/main" lIns="0" tIns="0" rIns="0" bIns="0" anchor="t">
-            <a:normAutofit fontScale="100000"/>
+            <a:normAutofit fontScale="90909"/>
           </a:bodyPr>
           <a:lstStyle xmlns:a="http://schemas.openxmlformats.org/drawingml/2006/main"/>
           <a:p xmlns:a="http://schemas.openxmlformats.org/drawingml/2006/main">
             <a:pPr algn="ctr">
-              <a:defRPr sz="1200" b="1">
+              <a:defRPr sz="1650" b="1">
                 <a:solidFill>
                   <a:srgbClr val="0B0D12"/>
                 </a:solidFill>
@@ -10486,17 +10570,17 @@
               </a:defRPr>
             </a:pPr>
             <a:r>
-              <a:t>every stdout line remains valid v1 NDJSON</a:t>
-            </a:r>
-          </a:p>
-        </p:txBody>
-      </p:sp>
-      <p:sp>
-        <p:nvSpPr>
-          <p:cNvPr id="32" name="Shape-231">
-            <a:extLst xmlns:a="http://schemas.openxmlformats.org/drawingml/2006/main">
-              <a:ext uri="{FF2B5EF4-FFF2-40B4-BE49-F238E27FC236}">
-                <a16:creationId xmlns:a16="http://schemas.microsoft.com/office/drawing/2014/main" id="{CB6964ED-CE27-4EDD-95C8-0131F6110CC1}"/>
+              <a:t>every stdout line is valid v1 NDJSON</a:t>
+            </a:r>
+          </a:p>
+        </p:txBody>
+      </p:sp>
+      <p:sp>
+        <p:nvSpPr>
+          <p:cNvPr id="32" name="Shape-233">
+            <a:extLst xmlns:a="http://schemas.openxmlformats.org/drawingml/2006/main">
+              <a:ext uri="{FF2B5EF4-FFF2-40B4-BE49-F238E27FC236}">
+                <a16:creationId xmlns:a16="http://schemas.microsoft.com/office/drawing/2014/main" id="{67E10A45-4234-4D5C-B39B-0F2E5C64FDA1}"/>
               </a:ext>
             </a:extLst>
           </p:cNvPr>
@@ -10522,10 +10606,10 @@
       </p:sp>
       <p:sp>
         <p:nvSpPr>
-          <p:cNvPr id="33" name="Text-232">
-            <a:extLst xmlns:a="http://schemas.openxmlformats.org/drawingml/2006/main">
-              <a:ext uri="{FF2B5EF4-FFF2-40B4-BE49-F238E27FC236}">
-                <a16:creationId xmlns:a16="http://schemas.microsoft.com/office/drawing/2014/main" id="{F07ABC1B-80D6-4007-9328-09241CD2C9DF}"/>
+          <p:cNvPr id="33" name="Text-234">
+            <a:extLst xmlns:a="http://schemas.openxmlformats.org/drawingml/2006/main">
+              <a:ext uri="{FF2B5EF4-FFF2-40B4-BE49-F238E27FC236}">
+                <a16:creationId xmlns:a16="http://schemas.microsoft.com/office/drawing/2014/main" id="{0DF142D9-39AB-4B2B-B6A9-689BDCE8E0B5}"/>
               </a:ext>
             </a:extLst>
           </p:cNvPr>
@@ -10545,12 +10629,12 @@
         </p:spPr>
         <p:txBody>
           <a:bodyPr xmlns:a="http://schemas.openxmlformats.org/drawingml/2006/main" lIns="0" tIns="0" rIns="0" bIns="0" anchor="t">
-            <a:normAutofit fontScale="100000"/>
+            <a:normAutofit fontScale="90909"/>
           </a:bodyPr>
           <a:lstStyle xmlns:a="http://schemas.openxmlformats.org/drawingml/2006/main"/>
           <a:p xmlns:a="http://schemas.openxmlformats.org/drawingml/2006/main">
             <a:pPr algn="ctr">
-              <a:defRPr sz="1200" b="1">
+              <a:defRPr sz="1650" b="1">
                 <a:solidFill>
                   <a:srgbClr val="0B0D12"/>
                 </a:solidFill>
@@ -10567,7 +10651,7 @@
       </p:sp>
       <p:cxnSp>
         <p:nvCxnSpPr>
-          <p:cNvPr id="70" name="Rule-233"/>
+          <p:cNvPr id="70" name="Rule-235"/>
           <p:cNvCxnSpPr/>
           <p:nvPr/>
         </p:nvCxnSpPr>
@@ -10589,10 +10673,10 @@
       </p:cxnSp>
       <p:sp>
         <p:nvSpPr>
-          <p:cNvPr id="35" name="Text-234">
-            <a:extLst xmlns:a="http://schemas.openxmlformats.org/drawingml/2006/main">
-              <a:ext uri="{FF2B5EF4-FFF2-40B4-BE49-F238E27FC236}">
-                <a16:creationId xmlns:a16="http://schemas.microsoft.com/office/drawing/2014/main" id="{B0069FFD-F67E-4D84-AD8A-AADE65D7F244}"/>
+          <p:cNvPr id="35" name="Text-236">
+            <a:extLst xmlns:a="http://schemas.openxmlformats.org/drawingml/2006/main">
+              <a:ext uri="{FF2B5EF4-FFF2-40B4-BE49-F238E27FC236}">
+                <a16:creationId xmlns:a16="http://schemas.microsoft.com/office/drawing/2014/main" id="{9046FEFC-81F3-4E02-BF9D-A29D283144DF}"/>
               </a:ext>
             </a:extLst>
           </p:cNvPr>
@@ -10627,17 +10711,17 @@
               </a:defRPr>
             </a:pPr>
             <a:r>
-              <a:t>protocol/fixtures · tests/test_protocol_* · tui/test/protocol*.test.ts</a:t>
-            </a:r>
-          </a:p>
-        </p:txBody>
-      </p:sp>
-      <p:sp>
-        <p:nvSpPr>
-          <p:cNvPr id="36" name="Text-235">
-            <a:extLst xmlns:a="http://schemas.openxmlformats.org/drawingml/2006/main">
-              <a:ext uri="{FF2B5EF4-FFF2-40B4-BE49-F238E27FC236}">
-                <a16:creationId xmlns:a16="http://schemas.microsoft.com/office/drawing/2014/main" id="{A5C622BB-7604-4480-8215-EDA2DFAB888D}"/>
+              <a:t>protocol/fixtures · tests/protocol/test_* · tui/test/protocol*.test.ts</a:t>
+            </a:r>
+          </a:p>
+        </p:txBody>
+      </p:sp>
+      <p:sp>
+        <p:nvSpPr>
+          <p:cNvPr id="36" name="Text-237">
+            <a:extLst xmlns:a="http://schemas.openxmlformats.org/drawingml/2006/main">
+              <a:ext uri="{FF2B5EF4-FFF2-40B4-BE49-F238E27FC236}">
+                <a16:creationId xmlns:a16="http://schemas.microsoft.com/office/drawing/2014/main" id="{08120200-E87B-4661-95EF-ED232BF3A948}"/>
               </a:ext>
             </a:extLst>
           </p:cNvPr>
@@ -10680,7 +10764,7 @@
     </p:spTree>
     <p:extLst>
       <p:ext uri="{BB962C8B-B14F-4D97-AF65-F5344CB8AC3E}">
-        <p14:creationId xmlns:p14="http://schemas.microsoft.com/office/powerpoint/2010/main" val="2134985514"/>
+        <p14:creationId xmlns:p14="http://schemas.microsoft.com/office/powerpoint/2010/main" val="1897086103"/>
       </p:ext>
     </p:extLst>
   </p:cSld>
@@ -10701,10 +10785,10 @@
       </p:grpSpPr>
       <p:sp>
         <p:nvSpPr>
-          <p:cNvPr id="1" name="Shape-249">
-            <a:extLst xmlns:a="http://schemas.openxmlformats.org/drawingml/2006/main">
-              <a:ext uri="{FF2B5EF4-FFF2-40B4-BE49-F238E27FC236}">
-                <a16:creationId xmlns:a16="http://schemas.microsoft.com/office/drawing/2014/main" id="{62044013-8780-4228-A184-AD5A05C1DF84}"/>
+          <p:cNvPr id="1" name="Shape-251">
+            <a:extLst xmlns:a="http://schemas.openxmlformats.org/drawingml/2006/main">
+              <a:ext uri="{FF2B5EF4-FFF2-40B4-BE49-F238E27FC236}">
+                <a16:creationId xmlns:a16="http://schemas.microsoft.com/office/drawing/2014/main" id="{A989AE07-F766-4D2E-BA6E-EEF7F98B63AC}"/>
               </a:ext>
             </a:extLst>
           </p:cNvPr>
@@ -10728,10 +10812,10 @@
       </p:sp>
       <p:sp>
         <p:nvSpPr>
-          <p:cNvPr id="2" name="Text-237">
-            <a:extLst xmlns:a="http://schemas.openxmlformats.org/drawingml/2006/main">
-              <a:ext uri="{FF2B5EF4-FFF2-40B4-BE49-F238E27FC236}">
-                <a16:creationId xmlns:a16="http://schemas.microsoft.com/office/drawing/2014/main" id="{DC0B95B2-F59C-444D-8AB1-8EB1196A4D3D}"/>
+          <p:cNvPr id="2" name="Text-239">
+            <a:extLst xmlns:a="http://schemas.openxmlformats.org/drawingml/2006/main">
+              <a:ext uri="{FF2B5EF4-FFF2-40B4-BE49-F238E27FC236}">
+                <a16:creationId xmlns:a16="http://schemas.microsoft.com/office/drawing/2014/main" id="{F946B74B-CF10-4395-9188-073BDF870125}"/>
               </a:ext>
             </a:extLst>
           </p:cNvPr>
@@ -10743,7 +10827,7 @@
         <p:spPr>
           <a:xfrm xmlns:a="http://schemas.openxmlformats.org/drawingml/2006/main">
             <a:off x="457200" y="400050"/>
-            <a:ext cx="11277600" cy="247650"/>
+            <a:ext cx="11277600" cy="266700"/>
           </a:xfrm>
           <a:prstGeom xmlns:a="http://schemas.openxmlformats.org/drawingml/2006/main" prst="rect">
             <a:avLst/>
@@ -10756,7 +10840,7 @@
           <a:lstStyle xmlns:a="http://schemas.openxmlformats.org/drawingml/2006/main"/>
           <a:p xmlns:a="http://schemas.openxmlformats.org/drawingml/2006/main">
             <a:pPr algn="l">
-              <a:defRPr sz="1200" b="1">
+              <a:defRPr sz="1650" b="1">
                 <a:solidFill>
                   <a:srgbClr val="1F5EFF"/>
                 </a:solidFill>
@@ -10773,10 +10857,10 @@
       </p:sp>
       <p:sp>
         <p:nvSpPr>
-          <p:cNvPr id="3" name="Text-238">
-            <a:extLst xmlns:a="http://schemas.openxmlformats.org/drawingml/2006/main">
-              <a:ext uri="{FF2B5EF4-FFF2-40B4-BE49-F238E27FC236}">
-                <a16:creationId xmlns:a16="http://schemas.microsoft.com/office/drawing/2014/main" id="{06F70267-B7A1-43B2-B415-47526DF43D24}"/>
+          <p:cNvPr id="3" name="Text-240">
+            <a:extLst xmlns:a="http://schemas.openxmlformats.org/drawingml/2006/main">
+              <a:ext uri="{FF2B5EF4-FFF2-40B4-BE49-F238E27FC236}">
+                <a16:creationId xmlns:a16="http://schemas.microsoft.com/office/drawing/2014/main" id="{0B860619-BDA8-4C6A-ACB5-F49649E2FEF5}"/>
               </a:ext>
             </a:extLst>
           </p:cNvPr>
@@ -10818,7 +10902,7 @@
       </p:sp>
       <p:cxnSp>
         <p:nvCxnSpPr>
-          <p:cNvPr id="17" name="Rule-239"/>
+          <p:cNvPr id="17" name="Rule-241"/>
           <p:cNvCxnSpPr/>
           <p:nvPr/>
         </p:nvCxnSpPr>
@@ -10840,10 +10924,10 @@
       </p:cxnSp>
       <p:sp>
         <p:nvSpPr>
-          <p:cNvPr id="5" name="Text-240">
-            <a:extLst xmlns:a="http://schemas.openxmlformats.org/drawingml/2006/main">
-              <a:ext uri="{FF2B5EF4-FFF2-40B4-BE49-F238E27FC236}">
-                <a16:creationId xmlns:a16="http://schemas.microsoft.com/office/drawing/2014/main" id="{B68D47E9-10F8-4786-9564-949B230BBC9F}"/>
+          <p:cNvPr id="5" name="Text-242">
+            <a:extLst xmlns:a="http://schemas.openxmlformats.org/drawingml/2006/main">
+              <a:ext uri="{FF2B5EF4-FFF2-40B4-BE49-F238E27FC236}">
+                <a16:creationId xmlns:a16="http://schemas.microsoft.com/office/drawing/2014/main" id="{1582DF0A-9039-4598-AC89-E426C19E470D}"/>
               </a:ext>
             </a:extLst>
           </p:cNvPr>
@@ -10855,7 +10939,7 @@
         <p:spPr>
           <a:xfrm xmlns:a="http://schemas.openxmlformats.org/drawingml/2006/main">
             <a:off x="457200" y="2400300"/>
-            <a:ext cx="4953000" cy="228600"/>
+            <a:ext cx="4953000" cy="266700"/>
           </a:xfrm>
           <a:prstGeom xmlns:a="http://schemas.openxmlformats.org/drawingml/2006/main" prst="rect">
             <a:avLst/>
@@ -10868,7 +10952,7 @@
           <a:lstStyle xmlns:a="http://schemas.openxmlformats.org/drawingml/2006/main"/>
           <a:p xmlns:a="http://schemas.openxmlformats.org/drawingml/2006/main">
             <a:pPr algn="l">
-              <a:defRPr sz="1125" b="1">
+              <a:defRPr sz="1650" b="1">
                 <a:solidFill>
                   <a:srgbClr val="1F5EFF"/>
                 </a:solidFill>
@@ -10885,10 +10969,10 @@
       </p:sp>
       <p:sp>
         <p:nvSpPr>
-          <p:cNvPr id="6" name="Text-241">
-            <a:extLst xmlns:a="http://schemas.openxmlformats.org/drawingml/2006/main">
-              <a:ext uri="{FF2B5EF4-FFF2-40B4-BE49-F238E27FC236}">
-                <a16:creationId xmlns:a16="http://schemas.microsoft.com/office/drawing/2014/main" id="{0449D0FD-FA9D-421A-BED6-B07F635DD57C}"/>
+          <p:cNvPr id="6" name="Text-243">
+            <a:extLst xmlns:a="http://schemas.openxmlformats.org/drawingml/2006/main">
+              <a:ext uri="{FF2B5EF4-FFF2-40B4-BE49-F238E27FC236}">
+                <a16:creationId xmlns:a16="http://schemas.microsoft.com/office/drawing/2014/main" id="{A9E9556D-2D72-4793-A818-F954021C0FBC}"/>
               </a:ext>
             </a:extLst>
           </p:cNvPr>
@@ -10933,10 +11017,10 @@
       </p:sp>
       <p:sp>
         <p:nvSpPr>
-          <p:cNvPr id="7" name="Shape-242">
-            <a:extLst xmlns:a="http://schemas.openxmlformats.org/drawingml/2006/main">
-              <a:ext uri="{FF2B5EF4-FFF2-40B4-BE49-F238E27FC236}">
-                <a16:creationId xmlns:a16="http://schemas.microsoft.com/office/drawing/2014/main" id="{B87C8A29-78E5-4F80-97D6-1844FE09C6A3}"/>
+          <p:cNvPr id="7" name="Shape-244">
+            <a:extLst xmlns:a="http://schemas.openxmlformats.org/drawingml/2006/main">
+              <a:ext uri="{FF2B5EF4-FFF2-40B4-BE49-F238E27FC236}">
+                <a16:creationId xmlns:a16="http://schemas.microsoft.com/office/drawing/2014/main" id="{95628947-4214-42DD-9383-07F6169C0D81}"/>
               </a:ext>
             </a:extLst>
           </p:cNvPr>
@@ -10962,10 +11046,10 @@
       </p:sp>
       <p:sp>
         <p:nvSpPr>
-          <p:cNvPr id="8" name="Text-243">
-            <a:extLst xmlns:a="http://schemas.openxmlformats.org/drawingml/2006/main">
-              <a:ext uri="{FF2B5EF4-FFF2-40B4-BE49-F238E27FC236}">
-                <a16:creationId xmlns:a16="http://schemas.microsoft.com/office/drawing/2014/main" id="{C9B046FF-B3CB-4FE5-A5CE-5803C2BF2AA9}"/>
+          <p:cNvPr id="8" name="Text-245">
+            <a:extLst xmlns:a="http://schemas.openxmlformats.org/drawingml/2006/main">
+              <a:ext uri="{FF2B5EF4-FFF2-40B4-BE49-F238E27FC236}">
+                <a16:creationId xmlns:a16="http://schemas.microsoft.com/office/drawing/2014/main" id="{FBE396C4-2343-429F-857A-7D550AD7F7B9}"/>
               </a:ext>
             </a:extLst>
           </p:cNvPr>
@@ -10985,12 +11069,12 @@
         </p:spPr>
         <p:txBody>
           <a:bodyPr xmlns:a="http://schemas.openxmlformats.org/drawingml/2006/main" lIns="0" tIns="0" rIns="0" bIns="0" anchor="t">
-            <a:normAutofit fontScale="100000"/>
+            <a:normAutofit fontScale="98485"/>
           </a:bodyPr>
           <a:lstStyle xmlns:a="http://schemas.openxmlformats.org/drawingml/2006/main"/>
           <a:p xmlns:a="http://schemas.openxmlformats.org/drawingml/2006/main">
             <a:pPr algn="l">
-              <a:defRPr sz="1125" b="1">
+              <a:defRPr sz="1650" b="1">
                 <a:solidFill>
                   <a:srgbClr val="1F5EFF"/>
                 </a:solidFill>
@@ -11007,10 +11091,10 @@
       </p:sp>
       <p:sp>
         <p:nvSpPr>
-          <p:cNvPr id="9" name="Text-244">
-            <a:extLst xmlns:a="http://schemas.openxmlformats.org/drawingml/2006/main">
-              <a:ext uri="{FF2B5EF4-FFF2-40B4-BE49-F238E27FC236}">
-                <a16:creationId xmlns:a16="http://schemas.microsoft.com/office/drawing/2014/main" id="{16237D99-8DB5-472C-B88A-5253D1E08C1D}"/>
+          <p:cNvPr id="9" name="Text-246">
+            <a:extLst xmlns:a="http://schemas.openxmlformats.org/drawingml/2006/main">
+              <a:ext uri="{FF2B5EF4-FFF2-40B4-BE49-F238E27FC236}">
+                <a16:creationId xmlns:a16="http://schemas.microsoft.com/office/drawing/2014/main" id="{EF18156B-4EB2-4E21-B604-945DFF4188F8}"/>
               </a:ext>
             </a:extLst>
           </p:cNvPr>
@@ -11055,10 +11139,10 @@
       </p:sp>
       <p:sp>
         <p:nvSpPr>
-          <p:cNvPr id="10" name="Text-245">
-            <a:extLst xmlns:a="http://schemas.openxmlformats.org/drawingml/2006/main">
-              <a:ext uri="{FF2B5EF4-FFF2-40B4-BE49-F238E27FC236}">
-                <a16:creationId xmlns:a16="http://schemas.microsoft.com/office/drawing/2014/main" id="{D4ADED7D-4677-4EE8-9882-735654B74819}"/>
+          <p:cNvPr id="10" name="Text-247">
+            <a:extLst xmlns:a="http://schemas.openxmlformats.org/drawingml/2006/main">
+              <a:ext uri="{FF2B5EF4-FFF2-40B4-BE49-F238E27FC236}">
+                <a16:creationId xmlns:a16="http://schemas.microsoft.com/office/drawing/2014/main" id="{C3B307D9-2243-4FC3-AE76-D913BF731EBD}"/>
               </a:ext>
             </a:extLst>
           </p:cNvPr>
@@ -11100,7 +11184,7 @@
       </p:sp>
       <p:cxnSp>
         <p:nvCxnSpPr>
-          <p:cNvPr id="24" name="Rule-246"/>
+          <p:cNvPr id="24" name="Rule-248"/>
           <p:cNvCxnSpPr/>
           <p:nvPr/>
         </p:nvCxnSpPr>
@@ -11122,10 +11206,10 @@
       </p:cxnSp>
       <p:sp>
         <p:nvSpPr>
-          <p:cNvPr id="12" name="Text-247">
-            <a:extLst xmlns:a="http://schemas.openxmlformats.org/drawingml/2006/main">
-              <a:ext uri="{FF2B5EF4-FFF2-40B4-BE49-F238E27FC236}">
-                <a16:creationId xmlns:a16="http://schemas.microsoft.com/office/drawing/2014/main" id="{A5F93F8E-E9B0-4973-A528-E960CB89025B}"/>
+          <p:cNvPr id="12" name="Text-249">
+            <a:extLst xmlns:a="http://schemas.openxmlformats.org/drawingml/2006/main">
+              <a:ext uri="{FF2B5EF4-FFF2-40B4-BE49-F238E27FC236}">
+                <a16:creationId xmlns:a16="http://schemas.microsoft.com/office/drawing/2014/main" id="{22662F45-A5C5-4A63-884E-962F61E803A0}"/>
               </a:ext>
             </a:extLst>
           </p:cNvPr>
@@ -11167,10 +11251,10 @@
       </p:sp>
       <p:sp>
         <p:nvSpPr>
-          <p:cNvPr id="13" name="Text-248">
-            <a:extLst xmlns:a="http://schemas.openxmlformats.org/drawingml/2006/main">
-              <a:ext uri="{FF2B5EF4-FFF2-40B4-BE49-F238E27FC236}">
-                <a16:creationId xmlns:a16="http://schemas.microsoft.com/office/drawing/2014/main" id="{54E29107-174D-41E7-B1B7-EB9B3CBB557E}"/>
+          <p:cNvPr id="13" name="Text-250">
+            <a:extLst xmlns:a="http://schemas.openxmlformats.org/drawingml/2006/main">
+              <a:ext uri="{FF2B5EF4-FFF2-40B4-BE49-F238E27FC236}">
+                <a16:creationId xmlns:a16="http://schemas.microsoft.com/office/drawing/2014/main" id="{55EE99A2-E8B5-4D13-B219-DF2CF6AE787C}"/>
               </a:ext>
             </a:extLst>
           </p:cNvPr>
@@ -11213,7 +11297,7 @@
     </p:spTree>
     <p:extLst>
       <p:ext uri="{BB962C8B-B14F-4D97-AF65-F5344CB8AC3E}">
-        <p14:creationId xmlns:p14="http://schemas.microsoft.com/office/powerpoint/2010/main" val="8883551"/>
+        <p14:creationId xmlns:p14="http://schemas.microsoft.com/office/powerpoint/2010/main" val="601439495"/>
       </p:ext>
     </p:extLst>
   </p:cSld>
